--- a/S1-CL2-Cloud-Disaster-Recovery/delivery/topic_03/Topic_03_Slides.pptx
+++ b/S1-CL2-Cloud-Disaster-Recovery/delivery/topic_03/Topic_03_Slides.pptx
@@ -3389,7 +3389,7 @@
           <a:noFill/>
         </p:spPr>
         <p:txBody>
-          <a:bodyPr wrap="square" anchor="t" lIns="0" rIns="0" tIns="0" bIns="0">
+          <a:bodyPr wrap="square" anchor="ctr" lIns="0" rIns="0" tIns="0" bIns="0">
             <a:spAutoFit/>
           </a:bodyPr>
           <a:lstStyle/>
@@ -3406,7 +3406,7 @@
               </a:spcAft>
             </a:pPr>
             <a:r>
-              <a:rPr sz="1800" b="1" i="0">
+              <a:rPr sz="2400" b="1" i="0">
                 <a:solidFill>
                   <a:srgbClr val="EDAB0C"/>
                 </a:solidFill>
@@ -3415,7 +3415,7 @@
               <a:t>■  </a:t>
             </a:r>
             <a:r>
-              <a:rPr sz="1800" b="0" i="0">
+              <a:rPr sz="2400" b="0" i="0">
                 <a:solidFill>
                   <a:srgbClr val="2A2929"/>
                 </a:solidFill>
@@ -3437,7 +3437,7 @@
               </a:spcAft>
             </a:pPr>
             <a:r>
-              <a:rPr sz="1800" b="1" i="0">
+              <a:rPr sz="2400" b="1" i="0">
                 <a:solidFill>
                   <a:srgbClr val="EDAB0C"/>
                 </a:solidFill>
@@ -3446,7 +3446,7 @@
               <a:t>■  </a:t>
             </a:r>
             <a:r>
-              <a:rPr sz="1800" b="0" i="0">
+              <a:rPr sz="2400" b="0" i="0">
                 <a:solidFill>
                   <a:srgbClr val="2A2929"/>
                 </a:solidFill>
@@ -3468,7 +3468,7 @@
               </a:spcAft>
             </a:pPr>
             <a:r>
-              <a:rPr sz="1800" b="1" i="0">
+              <a:rPr sz="2400" b="1" i="0">
                 <a:solidFill>
                   <a:srgbClr val="EDAB0C"/>
                 </a:solidFill>
@@ -3477,7 +3477,7 @@
               <a:t>■  </a:t>
             </a:r>
             <a:r>
-              <a:rPr sz="1800" b="0" i="0">
+              <a:rPr sz="2400" b="0" i="0">
                 <a:solidFill>
                   <a:srgbClr val="2A2929"/>
                 </a:solidFill>
@@ -3731,7 +3731,7 @@
           <a:noFill/>
         </p:spPr>
         <p:txBody>
-          <a:bodyPr wrap="square" anchor="t" lIns="0" rIns="0" tIns="0" bIns="0">
+          <a:bodyPr wrap="square" anchor="ctr" lIns="0" rIns="0" tIns="0" bIns="0">
             <a:spAutoFit/>
           </a:bodyPr>
           <a:lstStyle/>
@@ -3748,7 +3748,7 @@
               </a:spcAft>
             </a:pPr>
             <a:r>
-              <a:rPr sz="1800" b="1" i="0">
+              <a:rPr sz="2400" b="1" i="0">
                 <a:solidFill>
                   <a:srgbClr val="EDAB0C"/>
                 </a:solidFill>
@@ -3757,7 +3757,7 @@
               <a:t>■  </a:t>
             </a:r>
             <a:r>
-              <a:rPr sz="1800" b="0" i="0">
+              <a:rPr sz="2400" b="0" i="0">
                 <a:solidFill>
                   <a:srgbClr val="2A2929"/>
                 </a:solidFill>
@@ -3779,7 +3779,7 @@
               </a:spcAft>
             </a:pPr>
             <a:r>
-              <a:rPr sz="1800" b="1" i="0">
+              <a:rPr sz="2400" b="1" i="0">
                 <a:solidFill>
                   <a:srgbClr val="EDAB0C"/>
                 </a:solidFill>
@@ -3788,7 +3788,7 @@
               <a:t>■  </a:t>
             </a:r>
             <a:r>
-              <a:rPr sz="1800" b="0" i="0">
+              <a:rPr sz="2400" b="0" i="0">
                 <a:solidFill>
                   <a:srgbClr val="2A2929"/>
                 </a:solidFill>
@@ -3810,7 +3810,7 @@
               </a:spcAft>
             </a:pPr>
             <a:r>
-              <a:rPr sz="1800" b="1" i="0">
+              <a:rPr sz="2400" b="1" i="0">
                 <a:solidFill>
                   <a:srgbClr val="EDAB0C"/>
                 </a:solidFill>
@@ -3819,7 +3819,7 @@
               <a:t>■  </a:t>
             </a:r>
             <a:r>
-              <a:rPr sz="1800" b="0" i="0">
+              <a:rPr sz="2400" b="0" i="0">
                 <a:solidFill>
                   <a:srgbClr val="2A2929"/>
                 </a:solidFill>
@@ -4809,7 +4809,7 @@
           <a:noFill/>
         </p:spPr>
         <p:txBody>
-          <a:bodyPr wrap="square" anchor="t" lIns="0" rIns="0" tIns="0" bIns="0">
+          <a:bodyPr wrap="square" anchor="ctr" lIns="0" rIns="0" tIns="0" bIns="0">
             <a:spAutoFit/>
           </a:bodyPr>
           <a:lstStyle/>
@@ -4826,7 +4826,7 @@
               </a:spcAft>
             </a:pPr>
             <a:r>
-              <a:rPr sz="1800" b="1" i="0">
+              <a:rPr sz="2400" b="1" i="0">
                 <a:solidFill>
                   <a:srgbClr val="EDAB0C"/>
                 </a:solidFill>
@@ -4835,7 +4835,7 @@
               <a:t>■  </a:t>
             </a:r>
             <a:r>
-              <a:rPr sz="1800" b="0" i="0">
+              <a:rPr sz="2400" b="0" i="0">
                 <a:solidFill>
                   <a:srgbClr val="2A2929"/>
                 </a:solidFill>
@@ -4857,7 +4857,7 @@
               </a:spcAft>
             </a:pPr>
             <a:r>
-              <a:rPr sz="1800" b="1" i="0">
+              <a:rPr sz="2400" b="1" i="0">
                 <a:solidFill>
                   <a:srgbClr val="EDAB0C"/>
                 </a:solidFill>
@@ -4866,7 +4866,7 @@
               <a:t>■  </a:t>
             </a:r>
             <a:r>
-              <a:rPr sz="1800" b="0" i="0">
+              <a:rPr sz="2400" b="0" i="0">
                 <a:solidFill>
                   <a:srgbClr val="2A2929"/>
                 </a:solidFill>
@@ -4888,7 +4888,7 @@
               </a:spcAft>
             </a:pPr>
             <a:r>
-              <a:rPr sz="1800" b="1" i="0">
+              <a:rPr sz="2400" b="1" i="0">
                 <a:solidFill>
                   <a:srgbClr val="EDAB0C"/>
                 </a:solidFill>
@@ -4897,7 +4897,7 @@
               <a:t>■  </a:t>
             </a:r>
             <a:r>
-              <a:rPr sz="1800" b="0" i="0">
+              <a:rPr sz="2400" b="0" i="0">
                 <a:solidFill>
                   <a:srgbClr val="2A2929"/>
                 </a:solidFill>
@@ -5151,7 +5151,7 @@
           <a:noFill/>
         </p:spPr>
         <p:txBody>
-          <a:bodyPr wrap="square" anchor="t" lIns="0" rIns="0" tIns="0" bIns="0">
+          <a:bodyPr wrap="square" anchor="ctr" lIns="0" rIns="0" tIns="0" bIns="0">
             <a:spAutoFit/>
           </a:bodyPr>
           <a:lstStyle/>
@@ -5168,7 +5168,7 @@
               </a:spcAft>
             </a:pPr>
             <a:r>
-              <a:rPr sz="1800" b="1" i="0">
+              <a:rPr sz="2400" b="1" i="0">
                 <a:solidFill>
                   <a:srgbClr val="EDAB0C"/>
                 </a:solidFill>
@@ -5177,7 +5177,7 @@
               <a:t>■  </a:t>
             </a:r>
             <a:r>
-              <a:rPr sz="1800" b="0" i="0">
+              <a:rPr sz="2400" b="0" i="0">
                 <a:solidFill>
                   <a:srgbClr val="2A2929"/>
                 </a:solidFill>
@@ -5199,7 +5199,7 @@
               </a:spcAft>
             </a:pPr>
             <a:r>
-              <a:rPr sz="1800" b="1" i="0">
+              <a:rPr sz="2400" b="1" i="0">
                 <a:solidFill>
                   <a:srgbClr val="EDAB0C"/>
                 </a:solidFill>
@@ -5208,7 +5208,7 @@
               <a:t>■  </a:t>
             </a:r>
             <a:r>
-              <a:rPr sz="1800" b="0" i="0">
+              <a:rPr sz="2400" b="0" i="0">
                 <a:solidFill>
                   <a:srgbClr val="2A2929"/>
                 </a:solidFill>
@@ -5230,7 +5230,7 @@
               </a:spcAft>
             </a:pPr>
             <a:r>
-              <a:rPr sz="1800" b="1" i="0">
+              <a:rPr sz="2400" b="1" i="0">
                 <a:solidFill>
                   <a:srgbClr val="EDAB0C"/>
                 </a:solidFill>
@@ -5239,7 +5239,7 @@
               <a:t>■  </a:t>
             </a:r>
             <a:r>
-              <a:rPr sz="1800" b="0" i="0">
+              <a:rPr sz="2400" b="0" i="0">
                 <a:solidFill>
                   <a:srgbClr val="2A2929"/>
                 </a:solidFill>
@@ -5493,7 +5493,7 @@
           <a:noFill/>
         </p:spPr>
         <p:txBody>
-          <a:bodyPr wrap="square" anchor="t" lIns="0" rIns="0" tIns="0" bIns="0">
+          <a:bodyPr wrap="square" anchor="ctr" lIns="0" rIns="0" tIns="0" bIns="0">
             <a:spAutoFit/>
           </a:bodyPr>
           <a:lstStyle/>
@@ -5510,7 +5510,7 @@
               </a:spcAft>
             </a:pPr>
             <a:r>
-              <a:rPr sz="1800" b="1" i="0">
+              <a:rPr sz="2400" b="1" i="0">
                 <a:solidFill>
                   <a:srgbClr val="EDAB0C"/>
                 </a:solidFill>
@@ -5519,7 +5519,7 @@
               <a:t>■  </a:t>
             </a:r>
             <a:r>
-              <a:rPr sz="1800" b="0" i="0">
+              <a:rPr sz="2400" b="0" i="0">
                 <a:solidFill>
                   <a:srgbClr val="2A2929"/>
                 </a:solidFill>
@@ -5541,7 +5541,7 @@
               </a:spcAft>
             </a:pPr>
             <a:r>
-              <a:rPr sz="1800" b="1" i="0">
+              <a:rPr sz="2400" b="1" i="0">
                 <a:solidFill>
                   <a:srgbClr val="EDAB0C"/>
                 </a:solidFill>
@@ -5550,7 +5550,7 @@
               <a:t>■  </a:t>
             </a:r>
             <a:r>
-              <a:rPr sz="1800" b="0" i="0">
+              <a:rPr sz="2400" b="0" i="0">
                 <a:solidFill>
                   <a:srgbClr val="2A2929"/>
                 </a:solidFill>
@@ -5572,7 +5572,7 @@
               </a:spcAft>
             </a:pPr>
             <a:r>
-              <a:rPr sz="1800" b="1" i="0">
+              <a:rPr sz="2400" b="1" i="0">
                 <a:solidFill>
                   <a:srgbClr val="EDAB0C"/>
                 </a:solidFill>
@@ -5581,7 +5581,7 @@
               <a:t>■  </a:t>
             </a:r>
             <a:r>
-              <a:rPr sz="1800" b="0" i="0">
+              <a:rPr sz="2400" b="0" i="0">
                 <a:solidFill>
                   <a:srgbClr val="2A2929"/>
                 </a:solidFill>
@@ -8516,7 +8516,7 @@
           <a:noFill/>
         </p:spPr>
         <p:txBody>
-          <a:bodyPr wrap="square" anchor="t" lIns="0" rIns="0" tIns="0" bIns="0">
+          <a:bodyPr wrap="square" anchor="ctr" lIns="0" rIns="0" tIns="0" bIns="0">
             <a:spAutoFit/>
           </a:bodyPr>
           <a:lstStyle/>
@@ -8533,7 +8533,7 @@
               </a:spcAft>
             </a:pPr>
             <a:r>
-              <a:rPr sz="1800" b="1" i="0">
+              <a:rPr sz="2400" b="1" i="0">
                 <a:solidFill>
                   <a:srgbClr val="EDAB0C"/>
                 </a:solidFill>
@@ -8542,7 +8542,7 @@
               <a:t>■  </a:t>
             </a:r>
             <a:r>
-              <a:rPr sz="1800" b="0" i="0">
+              <a:rPr sz="2400" b="0" i="0">
                 <a:solidFill>
                   <a:srgbClr val="2A2929"/>
                 </a:solidFill>
@@ -8564,7 +8564,7 @@
               </a:spcAft>
             </a:pPr>
             <a:r>
-              <a:rPr sz="1800" b="1" i="0">
+              <a:rPr sz="2400" b="1" i="0">
                 <a:solidFill>
                   <a:srgbClr val="EDAB0C"/>
                 </a:solidFill>
@@ -8573,7 +8573,7 @@
               <a:t>■  </a:t>
             </a:r>
             <a:r>
-              <a:rPr sz="1800" b="0" i="0">
+              <a:rPr sz="2400" b="0" i="0">
                 <a:solidFill>
                   <a:srgbClr val="2A2929"/>
                 </a:solidFill>
@@ -8595,7 +8595,7 @@
               </a:spcAft>
             </a:pPr>
             <a:r>
-              <a:rPr sz="1800" b="1" i="0">
+              <a:rPr sz="2400" b="1" i="0">
                 <a:solidFill>
                   <a:srgbClr val="EDAB0C"/>
                 </a:solidFill>
@@ -8604,7 +8604,7 @@
               <a:t>■  </a:t>
             </a:r>
             <a:r>
-              <a:rPr sz="1800" b="0" i="0">
+              <a:rPr sz="2400" b="0" i="0">
                 <a:solidFill>
                   <a:srgbClr val="2A2929"/>
                 </a:solidFill>
@@ -8858,7 +8858,7 @@
           <a:noFill/>
         </p:spPr>
         <p:txBody>
-          <a:bodyPr wrap="square" anchor="t" lIns="0" rIns="0" tIns="0" bIns="0">
+          <a:bodyPr wrap="square" anchor="ctr" lIns="0" rIns="0" tIns="0" bIns="0">
             <a:spAutoFit/>
           </a:bodyPr>
           <a:lstStyle/>
@@ -8875,7 +8875,7 @@
               </a:spcAft>
             </a:pPr>
             <a:r>
-              <a:rPr sz="1800" b="1" i="0">
+              <a:rPr sz="2400" b="1" i="0">
                 <a:solidFill>
                   <a:srgbClr val="EDAB0C"/>
                 </a:solidFill>
@@ -8884,7 +8884,7 @@
               <a:t>■  </a:t>
             </a:r>
             <a:r>
-              <a:rPr sz="1800" b="0" i="0">
+              <a:rPr sz="2400" b="0" i="0">
                 <a:solidFill>
                   <a:srgbClr val="2A2929"/>
                 </a:solidFill>
@@ -8906,7 +8906,7 @@
               </a:spcAft>
             </a:pPr>
             <a:r>
-              <a:rPr sz="1800" b="1" i="0">
+              <a:rPr sz="2400" b="1" i="0">
                 <a:solidFill>
                   <a:srgbClr val="EDAB0C"/>
                 </a:solidFill>
@@ -8915,7 +8915,7 @@
               <a:t>■  </a:t>
             </a:r>
             <a:r>
-              <a:rPr sz="1800" b="0" i="0">
+              <a:rPr sz="2400" b="0" i="0">
                 <a:solidFill>
                   <a:srgbClr val="2A2929"/>
                 </a:solidFill>
@@ -8937,7 +8937,7 @@
               </a:spcAft>
             </a:pPr>
             <a:r>
-              <a:rPr sz="1800" b="1" i="0">
+              <a:rPr sz="2400" b="1" i="0">
                 <a:solidFill>
                   <a:srgbClr val="EDAB0C"/>
                 </a:solidFill>
@@ -8946,7 +8946,7 @@
               <a:t>■  </a:t>
             </a:r>
             <a:r>
-              <a:rPr sz="1800" b="0" i="0">
+              <a:rPr sz="2400" b="0" i="0">
                 <a:solidFill>
                   <a:srgbClr val="2A2929"/>
                 </a:solidFill>
@@ -9200,7 +9200,7 @@
           <a:noFill/>
         </p:spPr>
         <p:txBody>
-          <a:bodyPr wrap="square" anchor="t" lIns="0" rIns="0" tIns="0" bIns="0">
+          <a:bodyPr wrap="square" anchor="ctr" lIns="0" rIns="0" tIns="0" bIns="0">
             <a:spAutoFit/>
           </a:bodyPr>
           <a:lstStyle/>
@@ -9217,7 +9217,7 @@
               </a:spcAft>
             </a:pPr>
             <a:r>
-              <a:rPr sz="1800" b="1" i="0">
+              <a:rPr sz="2400" b="1" i="0">
                 <a:solidFill>
                   <a:srgbClr val="EDAB0C"/>
                 </a:solidFill>
@@ -9226,7 +9226,7 @@
               <a:t>■  </a:t>
             </a:r>
             <a:r>
-              <a:rPr sz="1800" b="0" i="0">
+              <a:rPr sz="2400" b="0" i="0">
                 <a:solidFill>
                   <a:srgbClr val="2A2929"/>
                 </a:solidFill>
@@ -9248,7 +9248,7 @@
               </a:spcAft>
             </a:pPr>
             <a:r>
-              <a:rPr sz="1800" b="1" i="0">
+              <a:rPr sz="2400" b="1" i="0">
                 <a:solidFill>
                   <a:srgbClr val="EDAB0C"/>
                 </a:solidFill>
@@ -9257,7 +9257,7 @@
               <a:t>■  </a:t>
             </a:r>
             <a:r>
-              <a:rPr sz="1800" b="0" i="0">
+              <a:rPr sz="2400" b="0" i="0">
                 <a:solidFill>
                   <a:srgbClr val="2A2929"/>
                 </a:solidFill>
@@ -9279,7 +9279,7 @@
               </a:spcAft>
             </a:pPr>
             <a:r>
-              <a:rPr sz="1800" b="1" i="0">
+              <a:rPr sz="2400" b="1" i="0">
                 <a:solidFill>
                   <a:srgbClr val="EDAB0C"/>
                 </a:solidFill>
@@ -9288,7 +9288,7 @@
               <a:t>■  </a:t>
             </a:r>
             <a:r>
-              <a:rPr sz="1800" b="0" i="0">
+              <a:rPr sz="2400" b="0" i="0">
                 <a:solidFill>
                   <a:srgbClr val="2A2929"/>
                 </a:solidFill>

--- a/S1-CL2-Cloud-Disaster-Recovery/delivery/topic_03/Topic_03_Slides.pptx
+++ b/S1-CL2-Cloud-Disaster-Recovery/delivery/topic_03/Topic_03_Slides.pptx
@@ -7,24 +7,24 @@
   <p:sldIdLst>
     <p:sldId id="256" r:id="rId7"/>
     <p:sldId id="257" r:id="rId8"/>
-    <p:sldId id="258" r:id="rId9"/>
-    <p:sldId id="259" r:id="rId10"/>
-    <p:sldId id="260" r:id="rId11"/>
-    <p:sldId id="261" r:id="rId12"/>
-    <p:sldId id="262" r:id="rId13"/>
-    <p:sldId id="263" r:id="rId14"/>
-    <p:sldId id="264" r:id="rId15"/>
-    <p:sldId id="265" r:id="rId16"/>
-    <p:sldId id="266" r:id="rId17"/>
-    <p:sldId id="267" r:id="rId18"/>
-    <p:sldId id="268" r:id="rId19"/>
-    <p:sldId id="269" r:id="rId20"/>
-    <p:sldId id="270" r:id="rId21"/>
-    <p:sldId id="271" r:id="rId22"/>
-    <p:sldId id="272" r:id="rId23"/>
-    <p:sldId id="273" r:id="rId24"/>
-    <p:sldId id="274" r:id="rId25"/>
-    <p:sldId id="275" r:id="rId26"/>
+    <p:sldId id="258" r:id="rId10"/>
+    <p:sldId id="259" r:id="rId11"/>
+    <p:sldId id="260" r:id="rId12"/>
+    <p:sldId id="261" r:id="rId13"/>
+    <p:sldId id="262" r:id="rId14"/>
+    <p:sldId id="263" r:id="rId15"/>
+    <p:sldId id="264" r:id="rId16"/>
+    <p:sldId id="265" r:id="rId17"/>
+    <p:sldId id="266" r:id="rId18"/>
+    <p:sldId id="267" r:id="rId19"/>
+    <p:sldId id="268" r:id="rId20"/>
+    <p:sldId id="269" r:id="rId21"/>
+    <p:sldId id="270" r:id="rId22"/>
+    <p:sldId id="271" r:id="rId23"/>
+    <p:sldId id="272" r:id="rId24"/>
+    <p:sldId id="273" r:id="rId25"/>
+    <p:sldId id="274" r:id="rId26"/>
+    <p:sldId id="275" r:id="rId27"/>
   </p:sldIdLst>
   <p:sldSz cx="12191695" cy="6858000" type="screen4x3"/>
   <p:notesSz cx="6858000" cy="9144000"/>
@@ -124,6 +124,1731 @@
     </a:lvl9pPr>
   </p:defaultTextStyle>
 </p:presentation>
+</file>
+
+<file path=ppt/notesMasters/notesMaster1.xml><?xml version="1.0" encoding="utf-8"?>
+<p:notesMaster xmlns:a="http://schemas.openxmlformats.org/drawingml/2006/main" xmlns:p="http://schemas.openxmlformats.org/presentationml/2006/main" xmlns:r="http://schemas.openxmlformats.org/officeDocument/2006/relationships">
+  <p:cSld>
+    <p:bg>
+      <p:bgRef idx="1001">
+        <a:schemeClr val="bg1"/>
+      </p:bgRef>
+    </p:bg>
+    <p:spTree>
+      <p:nvGrpSpPr>
+        <p:cNvPr id="1" name=""/>
+        <p:cNvGrpSpPr/>
+        <p:nvPr/>
+      </p:nvGrpSpPr>
+      <p:grpSpPr>
+        <a:xfrm>
+          <a:off x="0" y="0"/>
+          <a:ext cx="0" cy="0"/>
+          <a:chOff x="0" y="0"/>
+          <a:chExt cx="0" cy="0"/>
+        </a:xfrm>
+      </p:grpSpPr>
+      <p:sp>
+        <p:nvSpPr>
+          <p:cNvPr id="2" name="Header Placeholder 1"/>
+          <p:cNvSpPr>
+            <a:spLocks noGrp="1"/>
+          </p:cNvSpPr>
+          <p:nvPr>
+            <p:ph type="hdr" sz="quarter"/>
+          </p:nvPr>
+        </p:nvSpPr>
+        <p:spPr>
+          <a:xfrm>
+            <a:off x="0" y="0"/>
+            <a:ext cx="2971800" cy="457200"/>
+          </a:xfrm>
+          <a:prstGeom prst="rect">
+            <a:avLst/>
+          </a:prstGeom>
+        </p:spPr>
+        <p:txBody>
+          <a:bodyPr vert="horz" lIns="91440" tIns="45720" rIns="91440" bIns="45720" rtlCol="0"/>
+          <a:lstStyle>
+            <a:lvl1pPr algn="l">
+              <a:defRPr sz="1200"/>
+            </a:lvl1pPr>
+          </a:lstStyle>
+          <a:p>
+            <a:endParaRPr lang="en-US"/>
+          </a:p>
+        </p:txBody>
+      </p:sp>
+      <p:sp>
+        <p:nvSpPr>
+          <p:cNvPr id="3" name="Date Placeholder 2"/>
+          <p:cNvSpPr>
+            <a:spLocks noGrp="1"/>
+          </p:cNvSpPr>
+          <p:nvPr>
+            <p:ph type="dt" idx="1"/>
+          </p:nvPr>
+        </p:nvSpPr>
+        <p:spPr>
+          <a:xfrm>
+            <a:off x="3884613" y="0"/>
+            <a:ext cx="2971800" cy="457200"/>
+          </a:xfrm>
+          <a:prstGeom prst="rect">
+            <a:avLst/>
+          </a:prstGeom>
+        </p:spPr>
+        <p:txBody>
+          <a:bodyPr vert="horz" lIns="91440" tIns="45720" rIns="91440" bIns="45720" rtlCol="0"/>
+          <a:lstStyle>
+            <a:lvl1pPr algn="r">
+              <a:defRPr sz="1200"/>
+            </a:lvl1pPr>
+          </a:lstStyle>
+          <a:p>
+            <a:fld id="{0F89C1C7-3DCD-1040-A9CF-14679D8B5DDD}" type="datetimeFigureOut">
+              <a:rPr lang="en-US" smtClean="0"/>
+              <a:t>10/17/16</a:t>
+            </a:fld>
+            <a:endParaRPr lang="en-US"/>
+          </a:p>
+        </p:txBody>
+      </p:sp>
+      <p:sp>
+        <p:nvSpPr>
+          <p:cNvPr id="4" name="Slide Image Placeholder 3"/>
+          <p:cNvSpPr>
+            <a:spLocks noGrp="1" noRot="1" noChangeAspect="1"/>
+          </p:cNvSpPr>
+          <p:nvPr>
+            <p:ph type="sldImg" idx="2"/>
+          </p:nvPr>
+        </p:nvSpPr>
+        <p:spPr>
+          <a:xfrm>
+            <a:off x="1143000" y="685800"/>
+            <a:ext cx="4572000" cy="3429000"/>
+          </a:xfrm>
+          <a:prstGeom prst="rect">
+            <a:avLst/>
+          </a:prstGeom>
+          <a:noFill/>
+          <a:ln w="12700">
+            <a:solidFill>
+              <a:prstClr val="black"/>
+            </a:solidFill>
+          </a:ln>
+        </p:spPr>
+        <p:txBody>
+          <a:bodyPr vert="horz" lIns="91440" tIns="45720" rIns="91440" bIns="45720" rtlCol="0" anchor="ctr"/>
+          <a:lstStyle/>
+          <a:p>
+            <a:endParaRPr lang="en-US"/>
+          </a:p>
+        </p:txBody>
+      </p:sp>
+      <p:sp>
+        <p:nvSpPr>
+          <p:cNvPr id="5" name="Notes Placeholder 4"/>
+          <p:cNvSpPr>
+            <a:spLocks noGrp="1"/>
+          </p:cNvSpPr>
+          <p:nvPr>
+            <p:ph type="body" sz="quarter" idx="3"/>
+          </p:nvPr>
+        </p:nvSpPr>
+        <p:spPr>
+          <a:xfrm>
+            <a:off x="685800" y="4343400"/>
+            <a:ext cx="5486400" cy="4114800"/>
+          </a:xfrm>
+          <a:prstGeom prst="rect">
+            <a:avLst/>
+          </a:prstGeom>
+        </p:spPr>
+        <p:txBody>
+          <a:bodyPr vert="horz" lIns="91440" tIns="45720" rIns="91440" bIns="45720" rtlCol="0"/>
+          <a:lstStyle/>
+          <a:p>
+            <a:pPr lvl="0"/>
+            <a:r>
+              <a:rPr lang="en-US" smtClean="0"/>
+              <a:t>Click to edit Master text styles</a:t>
+            </a:r>
+          </a:p>
+          <a:p>
+            <a:pPr lvl="1"/>
+            <a:r>
+              <a:rPr lang="en-US" smtClean="0"/>
+              <a:t>Second level</a:t>
+            </a:r>
+          </a:p>
+          <a:p>
+            <a:pPr lvl="2"/>
+            <a:r>
+              <a:rPr lang="en-US" smtClean="0"/>
+              <a:t>Third level</a:t>
+            </a:r>
+          </a:p>
+          <a:p>
+            <a:pPr lvl="3"/>
+            <a:r>
+              <a:rPr lang="en-US" smtClean="0"/>
+              <a:t>Fourth level</a:t>
+            </a:r>
+          </a:p>
+          <a:p>
+            <a:pPr lvl="4"/>
+            <a:r>
+              <a:rPr lang="en-US" smtClean="0"/>
+              <a:t>Fifth level</a:t>
+            </a:r>
+            <a:endParaRPr lang="en-US"/>
+          </a:p>
+        </p:txBody>
+      </p:sp>
+      <p:sp>
+        <p:nvSpPr>
+          <p:cNvPr id="6" name="Footer Placeholder 5"/>
+          <p:cNvSpPr>
+            <a:spLocks noGrp="1"/>
+          </p:cNvSpPr>
+          <p:nvPr>
+            <p:ph type="ftr" sz="quarter" idx="4"/>
+          </p:nvPr>
+        </p:nvSpPr>
+        <p:spPr>
+          <a:xfrm>
+            <a:off x="0" y="8685213"/>
+            <a:ext cx="2971800" cy="457200"/>
+          </a:xfrm>
+          <a:prstGeom prst="rect">
+            <a:avLst/>
+          </a:prstGeom>
+        </p:spPr>
+        <p:txBody>
+          <a:bodyPr vert="horz" lIns="91440" tIns="45720" rIns="91440" bIns="45720" rtlCol="0" anchor="b"/>
+          <a:lstStyle>
+            <a:lvl1pPr algn="l">
+              <a:defRPr sz="1200"/>
+            </a:lvl1pPr>
+          </a:lstStyle>
+          <a:p>
+            <a:endParaRPr lang="en-US"/>
+          </a:p>
+        </p:txBody>
+      </p:sp>
+      <p:sp>
+        <p:nvSpPr>
+          <p:cNvPr id="7" name="Slide Number Placeholder 6"/>
+          <p:cNvSpPr>
+            <a:spLocks noGrp="1"/>
+          </p:cNvSpPr>
+          <p:nvPr>
+            <p:ph type="sldNum" sz="quarter" idx="5"/>
+          </p:nvPr>
+        </p:nvSpPr>
+        <p:spPr>
+          <a:xfrm>
+            <a:off x="3884613" y="8685213"/>
+            <a:ext cx="2971800" cy="457200"/>
+          </a:xfrm>
+          <a:prstGeom prst="rect">
+            <a:avLst/>
+          </a:prstGeom>
+        </p:spPr>
+        <p:txBody>
+          <a:bodyPr vert="horz" lIns="91440" tIns="45720" rIns="91440" bIns="45720" rtlCol="0" anchor="b"/>
+          <a:lstStyle>
+            <a:lvl1pPr algn="r">
+              <a:defRPr sz="1200"/>
+            </a:lvl1pPr>
+          </a:lstStyle>
+          <a:p>
+            <a:fld id="{BB5E49A5-4136-284D-997B-48E1D791AD67}" type="slidenum">
+              <a:rPr lang="en-US" smtClean="0"/>
+              <a:t>‹#›</a:t>
+            </a:fld>
+            <a:endParaRPr lang="en-US"/>
+          </a:p>
+        </p:txBody>
+      </p:sp>
+    </p:spTree>
+    <p:extLst>
+      <p:ext uri="{BB962C8B-B14F-4D97-AF65-F5344CB8AC3E}">
+        <p14:creationId xmlns:p14="http://schemas.microsoft.com/office/powerpoint/2010/main" val="2623252185"/>
+      </p:ext>
+    </p:extLst>
+  </p:cSld>
+  <p:clrMap bg1="lt1" tx1="dk1" bg2="lt2" tx2="dk2" accent1="accent1" accent2="accent2" accent3="accent3" accent4="accent4" accent5="accent5" accent6="accent6" hlink="hlink" folHlink="folHlink"/>
+  <p:notesStyle>
+    <a:lvl1pPr marL="0" algn="l" defTabSz="457200" rtl="0" eaLnBrk="1" latinLnBrk="0" hangingPunct="1">
+      <a:defRPr sz="1200" kern="1200">
+        <a:solidFill>
+          <a:schemeClr val="tx1"/>
+        </a:solidFill>
+        <a:latin typeface="+mn-lt"/>
+        <a:ea typeface="+mn-ea"/>
+        <a:cs typeface="+mn-cs"/>
+      </a:defRPr>
+    </a:lvl1pPr>
+    <a:lvl2pPr marL="457200" algn="l" defTabSz="457200" rtl="0" eaLnBrk="1" latinLnBrk="0" hangingPunct="1">
+      <a:defRPr sz="1200" kern="1200">
+        <a:solidFill>
+          <a:schemeClr val="tx1"/>
+        </a:solidFill>
+        <a:latin typeface="+mn-lt"/>
+        <a:ea typeface="+mn-ea"/>
+        <a:cs typeface="+mn-cs"/>
+      </a:defRPr>
+    </a:lvl2pPr>
+    <a:lvl3pPr marL="914400" algn="l" defTabSz="457200" rtl="0" eaLnBrk="1" latinLnBrk="0" hangingPunct="1">
+      <a:defRPr sz="1200" kern="1200">
+        <a:solidFill>
+          <a:schemeClr val="tx1"/>
+        </a:solidFill>
+        <a:latin typeface="+mn-lt"/>
+        <a:ea typeface="+mn-ea"/>
+        <a:cs typeface="+mn-cs"/>
+      </a:defRPr>
+    </a:lvl3pPr>
+    <a:lvl4pPr marL="1371600" algn="l" defTabSz="457200" rtl="0" eaLnBrk="1" latinLnBrk="0" hangingPunct="1">
+      <a:defRPr sz="1200" kern="1200">
+        <a:solidFill>
+          <a:schemeClr val="tx1"/>
+        </a:solidFill>
+        <a:latin typeface="+mn-lt"/>
+        <a:ea typeface="+mn-ea"/>
+        <a:cs typeface="+mn-cs"/>
+      </a:defRPr>
+    </a:lvl4pPr>
+    <a:lvl5pPr marL="1828800" algn="l" defTabSz="457200" rtl="0" eaLnBrk="1" latinLnBrk="0" hangingPunct="1">
+      <a:defRPr sz="1200" kern="1200">
+        <a:solidFill>
+          <a:schemeClr val="tx1"/>
+        </a:solidFill>
+        <a:latin typeface="+mn-lt"/>
+        <a:ea typeface="+mn-ea"/>
+        <a:cs typeface="+mn-cs"/>
+      </a:defRPr>
+    </a:lvl5pPr>
+    <a:lvl6pPr marL="2286000" algn="l" defTabSz="457200" rtl="0" eaLnBrk="1" latinLnBrk="0" hangingPunct="1">
+      <a:defRPr sz="1200" kern="1200">
+        <a:solidFill>
+          <a:schemeClr val="tx1"/>
+        </a:solidFill>
+        <a:latin typeface="+mn-lt"/>
+        <a:ea typeface="+mn-ea"/>
+        <a:cs typeface="+mn-cs"/>
+      </a:defRPr>
+    </a:lvl6pPr>
+    <a:lvl7pPr marL="2743200" algn="l" defTabSz="457200" rtl="0" eaLnBrk="1" latinLnBrk="0" hangingPunct="1">
+      <a:defRPr sz="1200" kern="1200">
+        <a:solidFill>
+          <a:schemeClr val="tx1"/>
+        </a:solidFill>
+        <a:latin typeface="+mn-lt"/>
+        <a:ea typeface="+mn-ea"/>
+        <a:cs typeface="+mn-cs"/>
+      </a:defRPr>
+    </a:lvl7pPr>
+    <a:lvl8pPr marL="3200400" algn="l" defTabSz="457200" rtl="0" eaLnBrk="1" latinLnBrk="0" hangingPunct="1">
+      <a:defRPr sz="1200" kern="1200">
+        <a:solidFill>
+          <a:schemeClr val="tx1"/>
+        </a:solidFill>
+        <a:latin typeface="+mn-lt"/>
+        <a:ea typeface="+mn-ea"/>
+        <a:cs typeface="+mn-cs"/>
+      </a:defRPr>
+    </a:lvl8pPr>
+    <a:lvl9pPr marL="3657600" algn="l" defTabSz="457200" rtl="0" eaLnBrk="1" latinLnBrk="0" hangingPunct="1">
+      <a:defRPr sz="1200" kern="1200">
+        <a:solidFill>
+          <a:schemeClr val="tx1"/>
+        </a:solidFill>
+        <a:latin typeface="+mn-lt"/>
+        <a:ea typeface="+mn-ea"/>
+        <a:cs typeface="+mn-cs"/>
+      </a:defRPr>
+    </a:lvl9pPr>
+  </p:notesStyle>
+</p:notesMaster>
+</file>
+
+<file path=ppt/notesSlides/notesSlide1.xml><?xml version="1.0" encoding="utf-8"?>
+<p:notes xmlns:a="http://schemas.openxmlformats.org/drawingml/2006/main" xmlns:p="http://schemas.openxmlformats.org/presentationml/2006/main" xmlns:r="http://schemas.openxmlformats.org/officeDocument/2006/relationships">
+  <p:cSld>
+    <p:spTree>
+      <p:nvGrpSpPr>
+        <p:cNvPr id="1" name=""/>
+        <p:cNvGrpSpPr/>
+        <p:nvPr/>
+      </p:nvGrpSpPr>
+      <p:grpSpPr>
+        <a:xfrm>
+          <a:off x="0" y="0"/>
+          <a:ext cx="0" cy="0"/>
+          <a:chOff x="0" y="0"/>
+          <a:chExt cx="0" cy="0"/>
+        </a:xfrm>
+      </p:grpSpPr>
+      <p:sp>
+        <p:nvSpPr>
+          <p:cNvPr id="2" name="Slide Image Placeholder 1"/>
+          <p:cNvSpPr>
+            <a:spLocks noGrp="1"/>
+          </p:cNvSpPr>
+          <p:nvPr>
+            <p:ph type="sldImg" idx="2"/>
+          </p:nvPr>
+        </p:nvSpPr>
+        <p:spPr/>
+      </p:sp>
+      <p:sp>
+        <p:nvSpPr>
+          <p:cNvPr id="3" name="Notes Placeholder 2"/>
+          <p:cNvSpPr>
+            <a:spLocks noGrp="1"/>
+          </p:cNvSpPr>
+          <p:nvPr>
+            <p:ph type="body" idx="3" sz="quarter"/>
+          </p:nvPr>
+        </p:nvSpPr>
+        <p:spPr/>
+        <p:txBody>
+          <a:bodyPr/>
+          <a:lstStyle/>
+          <a:p>
+            <a:r>
+              <a:t>Frame the pivot — from designing the system (Topics 1–2) to protecting it. This is the front half of the DR lifecycle; set the two moves and the boundary.</a:t>
+            </a:r>
+          </a:p>
+          <a:p>
+            <a:r>
+              <a:t>• First bullet: Topics 1–2 built the system; Topic 3 asks what happens when part of it FAILS. The question flips from "how does it run?" to "how does it recover?"</a:t>
+            </a:r>
+          </a:p>
+          <a:p>
+            <a:r>
+              <a:t>• Second bullet: locate the Topic — this is the FRONT HALF of the DR plan: the requirements and the impact analysis. The back half (strategy + written plan) is Topic 4.</a:t>
+            </a:r>
+          </a:p>
+          <a:p>
+            <a:r>
+              <a:t>• Third bullet: name the two moves — establish what recovery must ACHIEVE (requirements + objectives), then analyse the RISKS that threaten it (impact analysis). In that order; you can't analyse risk against targets you haven't set.</a:t>
+            </a:r>
+          </a:p>
+          <a:p>
+            <a:r>
+              <a:t>• Hold the boundary (last bullet): ANALYSIS ONLY — the strategy and the written plan are Topic 4; recovery is never executed here.</a:t>
+            </a:r>
+          </a:p>
+          <a:p>
+            <a:r>
+              <a:t>Misconception to pre-empt: "DR is about backups/technology." No — it starts with BUSINESS requirements and risk analysis; the technology choice comes later (Topic 4). Lead with the business, not the tool.</a:t>
+            </a:r>
+          </a:p>
+          <a:p>
+            <a:r>
+              <a:t>Question to pose: "Before you can say how to recover a system, what two things must you establish first?" (what recovery must achieve — the requirements/objectives — and what threatens it — the risks).</a:t>
+            </a:r>
+          </a:p>
+          <a:p>
+            <a:r>
+              <a:t>UoC/AT1 tie: this Topic develops [ICTCLD501 PC 1.1]–[ICTCLD501 PC 1.3], [ICTCLD501 PC 2.1]–[ICTCLD501 PC 2.5], [ICTCLD501 PE 2] and [ICTCLD501 KE 1]/[ICTCLD501 KE 2]/[ICTCLD501 KE 5], evidenced in AT1 Part B §1–2 and the Part B KE appendix.</a:t>
+            </a:r>
+          </a:p>
+        </p:txBody>
+      </p:sp>
+      <p:sp>
+        <p:nvSpPr>
+          <p:cNvPr id="4" name="Slide Number Placeholder 3"/>
+          <p:cNvSpPr>
+            <a:spLocks noGrp="1"/>
+          </p:cNvSpPr>
+          <p:nvPr>
+            <p:ph type="sldNum" idx="5" sz="quarter"/>
+          </p:nvPr>
+        </p:nvSpPr>
+        <p:spPr/>
+      </p:sp>
+    </p:spTree>
+  </p:cSld>
+  <p:clrMapOvr>
+    <a:masterClrMapping/>
+  </p:clrMapOvr>
+</p:notes>
+</file>
+
+<file path=ppt/notesSlides/notesSlide10.xml><?xml version="1.0" encoding="utf-8"?>
+<p:notes xmlns:a="http://schemas.openxmlformats.org/drawingml/2006/main" xmlns:p="http://schemas.openxmlformats.org/presentationml/2006/main" xmlns:r="http://schemas.openxmlformats.org/officeDocument/2006/relationships">
+  <p:cSld>
+    <p:spTree>
+      <p:nvGrpSpPr>
+        <p:cNvPr id="1" name=""/>
+        <p:cNvGrpSpPr/>
+        <p:nvPr/>
+      </p:nvGrpSpPr>
+      <p:grpSpPr>
+        <a:xfrm>
+          <a:off x="0" y="0"/>
+          <a:ext cx="0" cy="0"/>
+          <a:chOff x="0" y="0"/>
+          <a:chExt cx="0" cy="0"/>
+        </a:xfrm>
+      </p:grpSpPr>
+      <p:sp>
+        <p:nvSpPr>
+          <p:cNvPr id="2" name="Slide Image Placeholder 1"/>
+          <p:cNvSpPr>
+            <a:spLocks noGrp="1"/>
+          </p:cNvSpPr>
+          <p:nvPr>
+            <p:ph type="sldImg" idx="2"/>
+          </p:nvPr>
+        </p:nvSpPr>
+        <p:spPr/>
+      </p:sp>
+      <p:sp>
+        <p:nvSpPr>
+          <p:cNvPr id="3" name="Notes Placeholder 2"/>
+          <p:cNvSpPr>
+            <a:spLocks noGrp="1"/>
+          </p:cNvSpPr>
+          <p:nvPr>
+            <p:ph type="body" idx="3" sz="quarter"/>
+          </p:nvPr>
+        </p:nvSpPr>
+        <p:spPr/>
+        <p:txBody>
+          <a:bodyPr/>
+          <a:lstStyle/>
+          <a:p>
+            <a:r>
+              <a:t>Open C3 — the risk half. Teach WHAT can go wrong in the cloud and the METHOD for analysing it consistently. Vendor-neutral; sets up the assessment activity.</a:t>
+            </a:r>
+          </a:p>
+          <a:p>
+            <a:r>
+              <a:t>• First bullet: name the cloud RISK ENVIRONMENT — region/AZ outages, misconfiguration, dependency failure, human error, malicious action. Note most real incidents are NOT dramatic region outages; misconfiguration and human error dominate.</a:t>
+            </a:r>
+          </a:p>
+          <a:p>
+            <a:r>
+              <a:t>• Second bullet: a DATA-ANALYSIS METHODOLOGY turns those into a COMPARABLE picture — likelihood and impact scored CONSISTENTLY, so events can be ranked against each other.</a:t>
+            </a:r>
+          </a:p>
+          <a:p>
+            <a:r>
+              <a:t>• Third bullet (accent it): risk analysis is SYSTEMATIC, not a guess — the SAME scale for every event. Consistency is what makes the ranking meaningful.</a:t>
+            </a:r>
+          </a:p>
+          <a:p>
+            <a:r>
+              <a:t>Misconception to pre-empt: "the big risk is a data-centre disaster." No — the common risks are misconfiguration and human error; a plan that only guards against region outages misses where incidents actually come from.</a:t>
+            </a:r>
+          </a:p>
+          <a:p>
+            <a:r>
+              <a:t>Question to pose: "Two people score the same risk 'high' and 'medium' — what's missing that would make them agree?" (a defined, shared scale — the methodology; without it the scores aren't comparable).</a:t>
+            </a:r>
+          </a:p>
+          <a:p>
+            <a:r>
+              <a:t>UoC/AT1 tie: [ICTCLD501 KE 1] (cloud risk environments) + [ICTCLD501 KE 2] (data-analysis methodologies) — the foundation for the risk assessment (PC 2.2/2.4/2.5, PE 2) in AT1 Part B.</a:t>
+            </a:r>
+          </a:p>
+        </p:txBody>
+      </p:sp>
+      <p:sp>
+        <p:nvSpPr>
+          <p:cNvPr id="4" name="Slide Number Placeholder 3"/>
+          <p:cNvSpPr>
+            <a:spLocks noGrp="1"/>
+          </p:cNvSpPr>
+          <p:nvPr>
+            <p:ph type="sldNum" idx="5" sz="quarter"/>
+          </p:nvPr>
+        </p:nvSpPr>
+        <p:spPr/>
+      </p:sp>
+    </p:spTree>
+  </p:cSld>
+  <p:clrMapOvr>
+    <a:masterClrMapping/>
+  </p:clrMapOvr>
+</p:notes>
+</file>
+
+<file path=ppt/notesSlides/notesSlide11.xml><?xml version="1.0" encoding="utf-8"?>
+<p:notes xmlns:a="http://schemas.openxmlformats.org/drawingml/2006/main" xmlns:p="http://schemas.openxmlformats.org/presentationml/2006/main" xmlns:r="http://schemas.openxmlformats.org/officeDocument/2006/relationships">
+  <p:cSld>
+    <p:spTree>
+      <p:nvGrpSpPr>
+        <p:cNvPr id="1" name=""/>
+        <p:cNvGrpSpPr/>
+        <p:nvPr/>
+      </p:nvGrpSpPr>
+      <p:grpSpPr>
+        <a:xfrm>
+          <a:off x="0" y="0"/>
+          <a:ext cx="0" cy="0"/>
+          <a:chOff x="0" y="0"/>
+          <a:chExt cx="0" cy="0"/>
+        </a:xfrm>
+      </p:grpSpPr>
+      <p:sp>
+        <p:nvSpPr>
+          <p:cNvPr id="2" name="Slide Image Placeholder 1"/>
+          <p:cNvSpPr>
+            <a:spLocks noGrp="1"/>
+          </p:cNvSpPr>
+          <p:nvPr>
+            <p:ph type="sldImg" idx="2"/>
+          </p:nvPr>
+        </p:nvSpPr>
+        <p:spPr/>
+      </p:sp>
+      <p:sp>
+        <p:nvSpPr>
+          <p:cNvPr id="3" name="Notes Placeholder 2"/>
+          <p:cNvSpPr>
+            <a:spLocks noGrp="1"/>
+          </p:cNvSpPr>
+          <p:nvPr>
+            <p:ph type="body" idx="3" sz="quarter"/>
+          </p:nvPr>
+        </p:nvSpPr>
+        <p:spPr/>
+        <p:txBody>
+          <a:bodyPr/>
+          <a:lstStyle/>
+          <a:p>
+            <a:r>
+              <a:t>Teach the risk ASSESSMENT itself — the mechanical heart of the impact analysis. This defines exactly what the activity produces.</a:t>
+            </a:r>
+          </a:p>
+          <a:p>
+            <a:r>
+              <a:t>• First bullet: assess at least THREE major risk events — for each, its LIKELIHOOD and its IMPACT scored on the shared scale. Three is the assessed minimum (PE 2), not a target to stop at.</a:t>
+            </a:r>
+          </a:p>
+          <a:p>
+            <a:r>
+              <a:t>• Second bullet: SEVERITY = likelihood × impact; RANK the events so the plan can PRIORITISE. The ranking is the whole point — it tells Topic 4 what to protect first.</a:t>
+            </a:r>
+          </a:p>
+          <a:p>
+            <a:r>
+              <a:t>• Third bullet (accent it): record plan EXCLUSIONS — the risks the plan deliberately does NOT cover, and WHY. Naming what's out of scope, with justification, is a mark of a mature plan, not a gap in it.</a:t>
+            </a:r>
+          </a:p>
+          <a:p>
+            <a:r>
+              <a:t>Misconception to pre-empt: "more risks listed = better." No — three well-analysed, ranked risks beat a long unscored list; and a plan with NO stated exclusions is naive, not thorough.</a:t>
+            </a:r>
+          </a:p>
+          <a:p>
+            <a:r>
+              <a:t>Question to pose: "A low-likelihood, high-impact event vs a high-likelihood, low-impact one — how does severity = likelihood × impact help you rank them?" (it forces a single comparable score; discuss where they land).</a:t>
+            </a:r>
+          </a:p>
+          <a:p>
+            <a:r>
+              <a:t>UoC/AT1 tie: [ICTCLD501 PC 2.2] (assess risks + plan exclusions) + [ICTCLD501 PE 2] (determine likelihood and impact for the DR plan) — AT1 Part B B5.</a:t>
+            </a:r>
+          </a:p>
+        </p:txBody>
+      </p:sp>
+      <p:sp>
+        <p:nvSpPr>
+          <p:cNvPr id="4" name="Slide Number Placeholder 3"/>
+          <p:cNvSpPr>
+            <a:spLocks noGrp="1"/>
+          </p:cNvSpPr>
+          <p:nvPr>
+            <p:ph type="sldNum" idx="5" sz="quarter"/>
+          </p:nvPr>
+        </p:nvSpPr>
+        <p:spPr/>
+      </p:sp>
+    </p:spTree>
+  </p:cSld>
+  <p:clrMapOvr>
+    <a:masterClrMapping/>
+  </p:clrMapOvr>
+</p:notes>
+</file>
+
+<file path=ppt/notesSlides/notesSlide12.xml><?xml version="1.0" encoding="utf-8"?>
+<p:notes xmlns:a="http://schemas.openxmlformats.org/drawingml/2006/main" xmlns:p="http://schemas.openxmlformats.org/presentationml/2006/main" xmlns:r="http://schemas.openxmlformats.org/officeDocument/2006/relationships">
+  <p:cSld>
+    <p:spTree>
+      <p:nvGrpSpPr>
+        <p:cNvPr id="1" name=""/>
+        <p:cNvGrpSpPr/>
+        <p:nvPr/>
+      </p:nvGrpSpPr>
+      <p:grpSpPr>
+        <a:xfrm>
+          <a:off x="0" y="0"/>
+          <a:ext cx="0" cy="0"/>
+          <a:chOff x="0" y="0"/>
+          <a:chExt cx="0" cy="0"/>
+        </a:xfrm>
+      </p:grpSpPr>
+      <p:sp>
+        <p:nvSpPr>
+          <p:cNvPr id="2" name="Slide Image Placeholder 1"/>
+          <p:cNvSpPr>
+            <a:spLocks noGrp="1"/>
+          </p:cNvSpPr>
+          <p:nvPr>
+            <p:ph type="sldImg" idx="2"/>
+          </p:nvPr>
+        </p:nvSpPr>
+        <p:spPr/>
+      </p:sp>
+      <p:sp>
+        <p:nvSpPr>
+          <p:cNvPr id="3" name="Notes Placeholder 2"/>
+          <p:cNvSpPr>
+            <a:spLocks noGrp="1"/>
+          </p:cNvSpPr>
+          <p:nvPr>
+            <p:ph type="body" idx="3" sz="quarter"/>
+          </p:nvPr>
+        </p:nvSpPr>
+        <p:spPr/>
+        <p:txBody>
+          <a:bodyPr/>
+          <a:lstStyle/>
+          <a:p>
+            <a:r>
+              <a:t>Teach the last C3 step — evaluate the business impact and DOCUMENT the outcomes properly. This closes the front half and feeds Topic 4.</a:t>
+            </a:r>
+          </a:p>
+          <a:p>
+            <a:r>
+              <a:t>• First bullet: EVALUATE the severity of IMPACT and DISRUPTION of each event ON THE BUSINESS — translate the score into business terms (lost enrolments, breached obligation), not just "high".</a:t>
+            </a:r>
+          </a:p>
+          <a:p>
+            <a:r>
+              <a:t>• Second bullet: DOCUMENT the impact-analysis outcomes per ORGANISATIONAL POLICIES and procedures — the write-up has a required form; documenting to policy is itself assessed (PC 2.5).</a:t>
+            </a:r>
+          </a:p>
+          <a:p>
+            <a:r>
+              <a:t>• Third bullet (accent it): the documented analysis is the INPUT the Topic 4 recovery plan is BUILT FROM — this isn't busywork; the ranked, documented risks directly drive the plan's priorities.</a:t>
+            </a:r>
+          </a:p>
+          <a:p>
+            <a:r>
+              <a:t>Misconception to pre-empt: "documenting is just tidying up the notes." No — documenting to organisational policy is an assessed step (PC 2.5), and it's the artefact Topic 4 consumes; sloppy documentation breaks the next stage.</a:t>
+            </a:r>
+          </a:p>
+          <a:p>
+            <a:r>
+              <a:t>Question to pose: "Your top risk is documented — how will Topic 4's plan use that exact document?" (it sets the recovery priority order and the targets the plan must meet).</a:t>
+            </a:r>
+          </a:p>
+          <a:p>
+            <a:r>
+              <a:t>UoC/AT1 tie: [ICTCLD501 PC 2.4] (evaluate severity of impact/disruption) + [ICTCLD501 PC 2.5] (document outcomes per policies) — AT1 Part B B6–B7.</a:t>
+            </a:r>
+          </a:p>
+        </p:txBody>
+      </p:sp>
+      <p:sp>
+        <p:nvSpPr>
+          <p:cNvPr id="4" name="Slide Number Placeholder 3"/>
+          <p:cNvSpPr>
+            <a:spLocks noGrp="1"/>
+          </p:cNvSpPr>
+          <p:nvPr>
+            <p:ph type="sldNum" idx="5" sz="quarter"/>
+          </p:nvPr>
+        </p:nvSpPr>
+        <p:spPr/>
+      </p:sp>
+    </p:spTree>
+  </p:cSld>
+  <p:clrMapOvr>
+    <a:masterClrMapping/>
+  </p:clrMapOvr>
+</p:notes>
+</file>
+
+<file path=ppt/notesSlides/notesSlide13.xml><?xml version="1.0" encoding="utf-8"?>
+<p:notes xmlns:a="http://schemas.openxmlformats.org/drawingml/2006/main" xmlns:p="http://schemas.openxmlformats.org/presentationml/2006/main" xmlns:r="http://schemas.openxmlformats.org/officeDocument/2006/relationships">
+  <p:cSld>
+    <p:spTree>
+      <p:nvGrpSpPr>
+        <p:cNvPr id="1" name=""/>
+        <p:cNvGrpSpPr/>
+        <p:nvPr/>
+      </p:nvGrpSpPr>
+      <p:grpSpPr>
+        <a:xfrm>
+          <a:off x="0" y="0"/>
+          <a:ext cx="0" cy="0"/>
+          <a:chOff x="0" y="0"/>
+          <a:chExt cx="0" cy="0"/>
+        </a:xfrm>
+      </p:grpSpPr>
+      <p:sp>
+        <p:nvSpPr>
+          <p:cNvPr id="2" name="Slide Image Placeholder 1"/>
+          <p:cNvSpPr>
+            <a:spLocks noGrp="1"/>
+          </p:cNvSpPr>
+          <p:nvPr>
+            <p:ph type="sldImg" idx="2"/>
+          </p:nvPr>
+        </p:nvSpPr>
+        <p:spPr/>
+      </p:sp>
+      <p:sp>
+        <p:nvSpPr>
+          <p:cNvPr id="3" name="Notes Placeholder 2"/>
+          <p:cNvSpPr>
+            <a:spLocks noGrp="1"/>
+          </p:cNvSpPr>
+          <p:nvPr>
+            <p:ph type="body" idx="3" sz="quarter"/>
+          </p:nvPr>
+        </p:nvSpPr>
+        <p:spPr/>
+        <p:txBody>
+          <a:bodyPr/>
+          <a:lstStyle/>
+          <a:p>
+            <a:r>
+              <a:t>Facilitation — the biggest activity in the Topic: students produce the impact analysis for the practice scenario. The core AT1 Part B §2 rehearsal; the worked risk-register table on the next slide is their shape.</a:t>
+            </a:r>
+          </a:p>
+          <a:p>
+            <a:r>
+              <a:t>Tell students: "For the practice scenario, assess at least THREE major risk events — score each for likelihood and impact on one scale, compute severity, rank them, and note what the plan excludes. Then document the outcomes."</a:t>
+            </a:r>
+          </a:p>
+          <a:p>
+            <a:r>
+              <a:t>Steps (put on the board):</a:t>
+            </a:r>
+          </a:p>
+          <a:p>
+            <a:r>
+              <a:t>1. Pick ≥3 major risk events from the cloud risk environment (don't just list region outages — include misconfiguration/human error).</a:t>
+            </a:r>
+          </a:p>
+          <a:p>
+            <a:r>
+              <a:t>2. Score each: likelihood × impact = severity, all on the SAME scale; rank them.</a:t>
+            </a:r>
+          </a:p>
+          <a:p>
+            <a:r>
+              <a:t>3. Note plan exclusions — what's deliberately out, and why.</a:t>
+            </a:r>
+          </a:p>
+          <a:p>
+            <a:r>
+              <a:t>4. Document the outcomes in business terms (what the impact means for the organisation).</a:t>
+            </a:r>
+          </a:p>
+          <a:p>
+            <a:r>
+              <a:t>Must produce: a ranked risk register (≥3 events, likelihood/impact/severity), stated exclusions, and a short documented impact write-up.</a:t>
+            </a:r>
+          </a:p>
+          <a:p>
+            <a:r>
+              <a:t>Timing: ~30 min. Where they get stuck: they list risks without scoring on a consistent scale (make them fix one scale first), and they skip exclusions (prompt "what did you decide NOT to cover, and why?").</a:t>
+            </a:r>
+          </a:p>
+          <a:p>
+            <a:r>
+              <a:t>Share-back prompt: "Give me your top-ranked risk and the score behind it" — check the scale is applied consistently.</a:t>
+            </a:r>
+          </a:p>
+          <a:p>
+            <a:r>
+              <a:t>No-leakage note: practice scenario only (comparable, not identical); AT1 evidences the same risk-and-impact skill on the assessed system — keep them on the practice brief.</a:t>
+            </a:r>
+          </a:p>
+          <a:p>
+            <a:r>
+              <a:t>UoC/AT1 tie: [ICTCLD501 PC 2.2] · [ICTCLD501 PC 2.4] · [ICTCLD501 PC 2.5] · [ICTCLD501 PE 2] — the impact-analysis core of AT1 Part B §2.</a:t>
+            </a:r>
+          </a:p>
+        </p:txBody>
+      </p:sp>
+      <p:sp>
+        <p:nvSpPr>
+          <p:cNvPr id="4" name="Slide Number Placeholder 3"/>
+          <p:cNvSpPr>
+            <a:spLocks noGrp="1"/>
+          </p:cNvSpPr>
+          <p:nvPr>
+            <p:ph type="sldNum" idx="5" sz="quarter"/>
+          </p:nvPr>
+        </p:nvSpPr>
+        <p:spPr/>
+      </p:sp>
+    </p:spTree>
+  </p:cSld>
+  <p:clrMapOvr>
+    <a:masterClrMapping/>
+  </p:clrMapOvr>
+</p:notes>
+</file>
+
+<file path=ppt/notesSlides/notesSlide2.xml><?xml version="1.0" encoding="utf-8"?>
+<p:notes xmlns:a="http://schemas.openxmlformats.org/drawingml/2006/main" xmlns:p="http://schemas.openxmlformats.org/presentationml/2006/main" xmlns:r="http://schemas.openxmlformats.org/officeDocument/2006/relationships">
+  <p:cSld>
+    <p:spTree>
+      <p:nvGrpSpPr>
+        <p:cNvPr id="1" name=""/>
+        <p:cNvGrpSpPr/>
+        <p:nvPr/>
+      </p:nvGrpSpPr>
+      <p:grpSpPr>
+        <a:xfrm>
+          <a:off x="0" y="0"/>
+          <a:ext cx="0" cy="0"/>
+          <a:chOff x="0" y="0"/>
+          <a:chExt cx="0" cy="0"/>
+        </a:xfrm>
+      </p:grpSpPr>
+      <p:sp>
+        <p:nvSpPr>
+          <p:cNvPr id="2" name="Slide Image Placeholder 1"/>
+          <p:cNvSpPr>
+            <a:spLocks noGrp="1"/>
+          </p:cNvSpPr>
+          <p:nvPr>
+            <p:ph type="sldImg" idx="2"/>
+          </p:nvPr>
+        </p:nvSpPr>
+        <p:spPr/>
+      </p:sp>
+      <p:sp>
+        <p:nvSpPr>
+          <p:cNvPr id="3" name="Notes Placeholder 2"/>
+          <p:cNvSpPr>
+            <a:spLocks noGrp="1"/>
+          </p:cNvSpPr>
+          <p:nvPr>
+            <p:ph type="body" idx="3" sz="quarter"/>
+          </p:nvPr>
+        </p:nvSpPr>
+        <p:spPr/>
+        <p:txBody>
+          <a:bodyPr/>
+          <a:lstStyle/>
+          <a:p>
+            <a:r>
+              <a:t>Install the purpose of a DR plan — vendor-neutral. Keep it tight; it sets the "requirements before technology" discipline for the whole Topic.</a:t>
+            </a:r>
+          </a:p>
+          <a:p>
+            <a:r>
+              <a:t>• First bullet: a DR plan RESTORES service after a disruptive event, to AGREED targets. "Agreed" matters — recovery is measured against targets the business signed off, not best effort.</a:t>
+            </a:r>
+          </a:p>
+          <a:p>
+            <a:r>
+              <a:t>• Second bullet: it's driven by BUSINESS NEEDS — what the organisation can and cannot tolerate losing. The business sets the tolerance; the plan serves it.</a:t>
+            </a:r>
+          </a:p>
+          <a:p>
+            <a:r>
+              <a:t>• Third bullet (accent it): START by writing down the REQUIREMENTS, not by picking a technology. Leading with "we'll use backups" is the classic mistake — requirements first.</a:t>
+            </a:r>
+          </a:p>
+          <a:p>
+            <a:r>
+              <a:t>Misconception to pre-empt: "DR planning = choosing a backup product." No — that's the last step; you first establish what must recover, how fast, and against which risks. Technology is chosen to meet requirements, not the reverse.</a:t>
+            </a:r>
+          </a:p>
+          <a:p>
+            <a:r>
+              <a:t>Question to pose: "Two systems both go down — why might one need recovery in minutes and the other can wait a day?" (business tolerance differs; the requirement, not the tech, decides).</a:t>
+            </a:r>
+          </a:p>
+          <a:p>
+            <a:r>
+              <a:t>UoC/AT1 tie: [ICTCLD501 PC 1.1] (identify DR requirements per business needs) — the requirements-first mindset AT1 Part B §1 rewards.</a:t>
+            </a:r>
+          </a:p>
+        </p:txBody>
+      </p:sp>
+      <p:sp>
+        <p:nvSpPr>
+          <p:cNvPr id="4" name="Slide Number Placeholder 3"/>
+          <p:cNvSpPr>
+            <a:spLocks noGrp="1"/>
+          </p:cNvSpPr>
+          <p:nvPr>
+            <p:ph type="sldNum" idx="5" sz="quarter"/>
+          </p:nvPr>
+        </p:nvSpPr>
+        <p:spPr/>
+      </p:sp>
+    </p:spTree>
+  </p:cSld>
+  <p:clrMapOvr>
+    <a:masterClrMapping/>
+  </p:clrMapOvr>
+</p:notes>
+</file>
+
+<file path=ppt/notesSlides/notesSlide3.xml><?xml version="1.0" encoding="utf-8"?>
+<p:notes xmlns:a="http://schemas.openxmlformats.org/drawingml/2006/main" xmlns:p="http://schemas.openxmlformats.org/presentationml/2006/main" xmlns:r="http://schemas.openxmlformats.org/officeDocument/2006/relationships">
+  <p:cSld>
+    <p:spTree>
+      <p:nvGrpSpPr>
+        <p:cNvPr id="1" name=""/>
+        <p:cNvGrpSpPr/>
+        <p:nvPr/>
+      </p:nvGrpSpPr>
+      <p:grpSpPr>
+        <a:xfrm>
+          <a:off x="0" y="0"/>
+          <a:ext cx="0" cy="0"/>
+          <a:chOff x="0" y="0"/>
+          <a:chExt cx="0" cy="0"/>
+        </a:xfrm>
+      </p:grpSpPr>
+      <p:sp>
+        <p:nvSpPr>
+          <p:cNvPr id="2" name="Slide Image Placeholder 1"/>
+          <p:cNvSpPr>
+            <a:spLocks noGrp="1"/>
+          </p:cNvSpPr>
+          <p:nvPr>
+            <p:ph type="sldImg" idx="2"/>
+          </p:nvPr>
+        </p:nvSpPr>
+        <p:spPr/>
+      </p:sp>
+      <p:sp>
+        <p:nvSpPr>
+          <p:cNvPr id="3" name="Notes Placeholder 2"/>
+          <p:cNvSpPr>
+            <a:spLocks noGrp="1"/>
+          </p:cNvSpPr>
+          <p:nvPr>
+            <p:ph type="body" idx="3" sz="quarter"/>
+          </p:nvPr>
+        </p:nvSpPr>
+        <p:spPr/>
+        <p:txBody>
+          <a:bodyPr/>
+          <a:lstStyle/>
+          <a:p>
+            <a:r>
+              <a:t>Teach how to ELICIT the DR requirements from the brief — the first concrete C1 skill. A consultant reads the brief; they don't guess.</a:t>
+            </a:r>
+          </a:p>
+          <a:p>
+            <a:r>
+              <a:t>• First bullet: read the engagement brief — which systems are business-CRITICAL, and TO WHOM. Criticality is relative to a stakeholder; name both.</a:t>
+            </a:r>
+          </a:p>
+          <a:p>
+            <a:r>
+              <a:t>• Second bullet: requirements come from the BUSINESS — worked examples: enrolment front-door uptime, financial-record integrity, residency. Note the mix of availability, integrity and compliance requirements.</a:t>
+            </a:r>
+          </a:p>
+          <a:p>
+            <a:r>
+              <a:t>• Third bullet (accent it): STATE each requirement so it can later be TESTED against a proposed plan. A requirement you can't test is a wish — make it checkable ("front door available 99.5%", not "highly available").</a:t>
+            </a:r>
+          </a:p>
+          <a:p>
+            <a:r>
+              <a:t>Misconception to pre-empt: "all systems are equally critical." No — DR is about PRIORITISATION; some systems justify expensive fast recovery, others don't. Naming criticality per stakeholder is the analytical work.</a:t>
+            </a:r>
+          </a:p>
+          <a:p>
+            <a:r>
+              <a:t>Question to pose: "'The system should be reliable' — why is that useless as a DR requirement, and how would you fix it?" (untestable; restate as a measurable target the plan can be checked against).</a:t>
+            </a:r>
+          </a:p>
+          <a:p>
+            <a:r>
+              <a:t>UoC/AT1 tie: [ICTCLD501 PC 1.1] (identify DR requirements per business needs) — AT1 Part B B1.</a:t>
+            </a:r>
+          </a:p>
+        </p:txBody>
+      </p:sp>
+      <p:sp>
+        <p:nvSpPr>
+          <p:cNvPr id="4" name="Slide Number Placeholder 3"/>
+          <p:cNvSpPr>
+            <a:spLocks noGrp="1"/>
+          </p:cNvSpPr>
+          <p:nvPr>
+            <p:ph type="sldNum" idx="5" sz="quarter"/>
+          </p:nvPr>
+        </p:nvSpPr>
+        <p:spPr/>
+      </p:sp>
+    </p:spTree>
+  </p:cSld>
+  <p:clrMapOvr>
+    <a:masterClrMapping/>
+  </p:clrMapOvr>
+</p:notes>
+</file>
+
+<file path=ppt/notesSlides/notesSlide4.xml><?xml version="1.0" encoding="utf-8"?>
+<p:notes xmlns:a="http://schemas.openxmlformats.org/drawingml/2006/main" xmlns:p="http://schemas.openxmlformats.org/presentationml/2006/main" xmlns:r="http://schemas.openxmlformats.org/officeDocument/2006/relationships">
+  <p:cSld>
+    <p:spTree>
+      <p:nvGrpSpPr>
+        <p:cNvPr id="1" name=""/>
+        <p:cNvGrpSpPr/>
+        <p:nvPr/>
+      </p:nvGrpSpPr>
+      <p:grpSpPr>
+        <a:xfrm>
+          <a:off x="0" y="0"/>
+          <a:ext cx="0" cy="0"/>
+          <a:chOff x="0" y="0"/>
+          <a:chExt cx="0" cy="0"/>
+        </a:xfrm>
+      </p:grpSpPr>
+      <p:sp>
+        <p:nvSpPr>
+          <p:cNvPr id="2" name="Slide Image Placeholder 1"/>
+          <p:cNvSpPr>
+            <a:spLocks noGrp="1"/>
+          </p:cNvSpPr>
+          <p:nvPr>
+            <p:ph type="sldImg" idx="2"/>
+          </p:nvPr>
+        </p:nvSpPr>
+        <p:spPr/>
+      </p:sp>
+      <p:sp>
+        <p:nvSpPr>
+          <p:cNvPr id="3" name="Notes Placeholder 2"/>
+          <p:cNvSpPr>
+            <a:spLocks noGrp="1"/>
+          </p:cNvSpPr>
+          <p:nvPr>
+            <p:ph type="body" idx="3" sz="quarter"/>
+          </p:nvPr>
+        </p:nvSpPr>
+        <p:spPr/>
+        <p:txBody>
+          <a:bodyPr/>
+          <a:lstStyle/>
+          <a:p>
+            <a:r>
+              <a:t>Teach the second and third C1 inputs — the CURRENT recovery position and the VENDOR's provisions. You design DR against a baseline, not a blank page.</a:t>
+            </a:r>
+          </a:p>
+          <a:p>
+            <a:r>
+              <a:t>• First bullet: determine the EXISTING organisational recovery arrangements — what's already in place, AND its gaps. You can only improve what you've first assessed.</a:t>
+            </a:r>
+          </a:p>
+          <a:p>
+            <a:r>
+              <a:t>• Second bullet: identify the cloud vendor's DR provisions and SLAs — what the provider GUARANTEES versus what YOU must add. Draw the line explicitly; it's the shared-responsibility idea applied to recovery.</a:t>
+            </a:r>
+          </a:p>
+          <a:p>
+            <a:r>
+              <a:t>• Third bullet (accent it): the plan BUILDS ON the vendor's native durability — it doesn't REINVENT it. Re-implementing what the provider already guarantees is wasted effort and often less reliable.</a:t>
+            </a:r>
+          </a:p>
+          <a:p>
+            <a:r>
+              <a:t>Misconception to pre-empt: "we must build all recovery ourselves." No — much durability is native (managed-service backups, cross-region copy); your plan sequences and governs it, filling only the gaps the SLA leaves.</a:t>
+            </a:r>
+          </a:p>
+          <a:p>
+            <a:r>
+              <a:t>Question to pose: "The managed database already keeps automated backups — so what's left for YOUR plan to add?" (orchestration, priorities, the parts the SLA doesn't cover, and meeting a tighter RTO/RPO than the default).</a:t>
+            </a:r>
+          </a:p>
+          <a:p>
+            <a:r>
+              <a:t>UoC/AT1 tie: [ICTCLD501 PC 1.2] (determine existing recovery plans) + [ICTCLD501 PC 1.3] (identify vendor DR plan and SLAs) — AT1 Part B B2.</a:t>
+            </a:r>
+          </a:p>
+        </p:txBody>
+      </p:sp>
+      <p:sp>
+        <p:nvSpPr>
+          <p:cNvPr id="4" name="Slide Number Placeholder 3"/>
+          <p:cNvSpPr>
+            <a:spLocks noGrp="1"/>
+          </p:cNvSpPr>
+          <p:nvPr>
+            <p:ph type="sldNum" idx="5" sz="quarter"/>
+          </p:nvPr>
+        </p:nvSpPr>
+        <p:spPr/>
+      </p:sp>
+    </p:spTree>
+  </p:cSld>
+  <p:clrMapOvr>
+    <a:masterClrMapping/>
+  </p:clrMapOvr>
+</p:notes>
+</file>
+
+<file path=ppt/notesSlides/notesSlide5.xml><?xml version="1.0" encoding="utf-8"?>
+<p:notes xmlns:a="http://schemas.openxmlformats.org/drawingml/2006/main" xmlns:p="http://schemas.openxmlformats.org/presentationml/2006/main" xmlns:r="http://schemas.openxmlformats.org/officeDocument/2006/relationships">
+  <p:cSld>
+    <p:spTree>
+      <p:nvGrpSpPr>
+        <p:cNvPr id="1" name=""/>
+        <p:cNvGrpSpPr/>
+        <p:nvPr/>
+      </p:nvGrpSpPr>
+      <p:grpSpPr>
+        <a:xfrm>
+          <a:off x="0" y="0"/>
+          <a:ext cx="0" cy="0"/>
+          <a:chOff x="0" y="0"/>
+          <a:chExt cx="0" cy="0"/>
+        </a:xfrm>
+      </p:grpSpPr>
+      <p:sp>
+        <p:nvSpPr>
+          <p:cNvPr id="2" name="Slide Image Placeholder 1"/>
+          <p:cNvSpPr>
+            <a:spLocks noGrp="1"/>
+          </p:cNvSpPr>
+          <p:nvPr>
+            <p:ph type="sldImg" idx="2"/>
+          </p:nvPr>
+        </p:nvSpPr>
+        <p:spPr/>
+      </p:sp>
+      <p:sp>
+        <p:nvSpPr>
+          <p:cNvPr id="3" name="Notes Placeholder 2"/>
+          <p:cNvSpPr>
+            <a:spLocks noGrp="1"/>
+          </p:cNvSpPr>
+          <p:nvPr>
+            <p:ph type="body" idx="3" sz="quarter"/>
+          </p:nvPr>
+        </p:nvSpPr>
+        <p:spPr/>
+        <p:txBody>
+          <a:bodyPr/>
+          <a:lstStyle/>
+          <a:p>
+            <a:r>
+              <a:t>Facilitation — the C1 practice: gather requirements + the current recovery position on the PRACTICE scenario. Rehearses AT1 Part B B1–B2.</a:t>
+            </a:r>
+          </a:p>
+          <a:p>
+            <a:r>
+              <a:t>Tell students: "On the practice scenario, list the DR requirements that come from the business needs — testable ones — then record what recovery is already in place and the relevant vendor DR provisions and SLAs."</a:t>
+            </a:r>
+          </a:p>
+          <a:p>
+            <a:r>
+              <a:t>Steps (put on the board):</a:t>
+            </a:r>
+          </a:p>
+          <a:p>
+            <a:r>
+              <a:t>1. From the brief, list the DR requirements per business need — each stated so it can be TESTED (a measurable target, a named stakeholder).</a:t>
+            </a:r>
+          </a:p>
+          <a:p>
+            <a:r>
+              <a:t>2. Record the current recovery arrangements — what's in place and its gaps.</a:t>
+            </a:r>
+          </a:p>
+          <a:p>
+            <a:r>
+              <a:t>3. Note the vendor's DR provisions/SLAs — what's guaranteed vs what you must add.</a:t>
+            </a:r>
+          </a:p>
+          <a:p>
+            <a:r>
+              <a:t>Must produce: a testable requirements list plus a short current-position note (existing arrangements + vendor SLAs).</a:t>
+            </a:r>
+          </a:p>
+          <a:p>
+            <a:r>
+              <a:t>Timing: ~20 min. Where they get stuck: they write vague requirements ("be reliable") — push measurable, testable statements; and they skip the vendor SLAs (remind them the plan builds on native durability).</a:t>
+            </a:r>
+          </a:p>
+          <a:p>
+            <a:r>
+              <a:t>Share-back prompt: "Give me one requirement and how you'd TEST a plan against it" — listen for testability.</a:t>
+            </a:r>
+          </a:p>
+          <a:p>
+            <a:r>
+              <a:t>No-leakage note: this runs on the PRACTICE scenario (comparable, not identical); AT1 evidences the same requirements-gathering skill on the assessed system — keep them on the practice brief.</a:t>
+            </a:r>
+          </a:p>
+          <a:p>
+            <a:r>
+              <a:t>UoC/AT1 tie: [ICTCLD501 PC 1.1] · [ICTCLD501 PC 1.2] · [ICTCLD501 PC 1.3] — the requirements + current-position pair that opens AT1 Part B.</a:t>
+            </a:r>
+          </a:p>
+        </p:txBody>
+      </p:sp>
+      <p:sp>
+        <p:nvSpPr>
+          <p:cNvPr id="4" name="Slide Number Placeholder 3"/>
+          <p:cNvSpPr>
+            <a:spLocks noGrp="1"/>
+          </p:cNvSpPr>
+          <p:nvPr>
+            <p:ph type="sldNum" idx="5" sz="quarter"/>
+          </p:nvPr>
+        </p:nvSpPr>
+        <p:spPr/>
+      </p:sp>
+    </p:spTree>
+  </p:cSld>
+  <p:clrMapOvr>
+    <a:masterClrMapping/>
+  </p:clrMapOvr>
+</p:notes>
+</file>
+
+<file path=ppt/notesSlides/notesSlide6.xml><?xml version="1.0" encoding="utf-8"?>
+<p:notes xmlns:a="http://schemas.openxmlformats.org/drawingml/2006/main" xmlns:p="http://schemas.openxmlformats.org/presentationml/2006/main" xmlns:r="http://schemas.openxmlformats.org/officeDocument/2006/relationships">
+  <p:cSld>
+    <p:spTree>
+      <p:nvGrpSpPr>
+        <p:cNvPr id="1" name=""/>
+        <p:cNvGrpSpPr/>
+        <p:nvPr/>
+      </p:nvGrpSpPr>
+      <p:grpSpPr>
+        <a:xfrm>
+          <a:off x="0" y="0"/>
+          <a:ext cx="0" cy="0"/>
+          <a:chOff x="0" y="0"/>
+          <a:chExt cx="0" cy="0"/>
+        </a:xfrm>
+      </p:grpSpPr>
+      <p:sp>
+        <p:nvSpPr>
+          <p:cNvPr id="2" name="Slide Image Placeholder 1"/>
+          <p:cNvSpPr>
+            <a:spLocks noGrp="1"/>
+          </p:cNvSpPr>
+          <p:nvPr>
+            <p:ph type="sldImg" idx="2"/>
+          </p:nvPr>
+        </p:nvSpPr>
+        <p:spPr/>
+      </p:sp>
+      <p:sp>
+        <p:nvSpPr>
+          <p:cNvPr id="3" name="Notes Placeholder 2"/>
+          <p:cNvSpPr>
+            <a:spLocks noGrp="1"/>
+          </p:cNvSpPr>
+          <p:nvPr>
+            <p:ph type="body" idx="3" sz="quarter"/>
+          </p:nvPr>
+        </p:nvSpPr>
+        <p:spPr/>
+        <p:txBody>
+          <a:bodyPr/>
+          <a:lstStyle/>
+          <a:p>
+            <a:r>
+              <a:t>The two most important terms in DR — teach RTO and RPO on the timeline diagram; students routinely confuse them, so nail the distinction with the picture.</a:t>
+            </a:r>
+          </a:p>
+          <a:p>
+            <a:r>
+              <a:t>• Use the diagram's timeline: the disaster is the point in the middle. RTO measures FORWARD (how long until service is back); RPO measures BACKWARD (how much recent data is lost between the last good copy and the disaster).</a:t>
+            </a:r>
+          </a:p>
+          <a:p>
+            <a:r>
+              <a:t>• RTO (first bullet): how long you can be DOWN before it hurts too much — a TIME target for restoration.</a:t>
+            </a:r>
+          </a:p>
+          <a:p>
+            <a:r>
+              <a:t>• RPO (second bullet): how much recent DATA you can afford to lose — a target for the gap back to the last recoverable point.</a:t>
+            </a:r>
+          </a:p>
+          <a:p>
+            <a:r>
+              <a:t>• Third bullet (accent it): both are BUSINESS decisions expressed as TIME; every DR choice traces back to them. The strategy in Topic 4 is chosen to hit these numbers.</a:t>
+            </a:r>
+          </a:p>
+          <a:p>
+            <a:r>
+              <a:t>Misconception to pre-empt: students swap them constantly. Anchor it: RTO = TIME to recover (forward); RPO = data you can lose (backward). Point at the two arrows on the diagram every time you say the words.</a:t>
+            </a:r>
+          </a:p>
+          <a:p>
+            <a:r>
+              <a:t>Question to pose: "A one-hour RPO — what does that actually mean happened to the last hour of data after a failure?" (up to an hour of the most recent data may be lost; backups/replication must be at least that frequent).</a:t>
+            </a:r>
+          </a:p>
+          <a:p>
+            <a:r>
+              <a:t>UoC/AT1 tie: [ICTCLD501 KE 5] (RTO/RPO standards and techniques) + [ICTCLD501 PC 2.1] (determine RTO/RPO to business needs) — AT1 Part B B3 and the KE appendix.</a:t>
+            </a:r>
+          </a:p>
+        </p:txBody>
+      </p:sp>
+      <p:sp>
+        <p:nvSpPr>
+          <p:cNvPr id="4" name="Slide Number Placeholder 3"/>
+          <p:cNvSpPr>
+            <a:spLocks noGrp="1"/>
+          </p:cNvSpPr>
+          <p:nvPr>
+            <p:ph type="sldNum" idx="5" sz="quarter"/>
+          </p:nvPr>
+        </p:nvSpPr>
+        <p:spPr/>
+      </p:sp>
+    </p:spTree>
+  </p:cSld>
+  <p:clrMapOvr>
+    <a:masterClrMapping/>
+  </p:clrMapOvr>
+</p:notes>
+</file>
+
+<file path=ppt/notesSlides/notesSlide7.xml><?xml version="1.0" encoding="utf-8"?>
+<p:notes xmlns:a="http://schemas.openxmlformats.org/drawingml/2006/main" xmlns:p="http://schemas.openxmlformats.org/presentationml/2006/main" xmlns:r="http://schemas.openxmlformats.org/officeDocument/2006/relationships">
+  <p:cSld>
+    <p:spTree>
+      <p:nvGrpSpPr>
+        <p:cNvPr id="1" name=""/>
+        <p:cNvGrpSpPr/>
+        <p:nvPr/>
+      </p:nvGrpSpPr>
+      <p:grpSpPr>
+        <a:xfrm>
+          <a:off x="0" y="0"/>
+          <a:ext cx="0" cy="0"/>
+          <a:chOff x="0" y="0"/>
+          <a:chExt cx="0" cy="0"/>
+        </a:xfrm>
+      </p:grpSpPr>
+      <p:sp>
+        <p:nvSpPr>
+          <p:cNvPr id="2" name="Slide Image Placeholder 1"/>
+          <p:cNvSpPr>
+            <a:spLocks noGrp="1"/>
+          </p:cNvSpPr>
+          <p:nvPr>
+            <p:ph type="sldImg" idx="2"/>
+          </p:nvPr>
+        </p:nvSpPr>
+        <p:spPr/>
+      </p:sp>
+      <p:sp>
+        <p:nvSpPr>
+          <p:cNvPr id="3" name="Notes Placeholder 2"/>
+          <p:cNvSpPr>
+            <a:spLocks noGrp="1"/>
+          </p:cNvSpPr>
+          <p:nvPr>
+            <p:ph type="body" idx="3" sz="quarter"/>
+          </p:nvPr>
+        </p:nvSpPr>
+        <p:spPr/>
+        <p:txBody>
+          <a:bodyPr/>
+          <a:lstStyle/>
+          <a:p>
+            <a:r>
+              <a:t>Apply RTO/RPO to THIS engagement — derive the numbers from the requirements, not from a wish for zero. This is where the concept becomes a design decision.</a:t>
+            </a:r>
+          </a:p>
+          <a:p>
+            <a:r>
+              <a:t>• First bullet: DERIVE RTO/RPO from the requirements — worked contrast: the enrolment FRONT DOOR tolerates little DOWNTIME (tight RTO); FINANCIAL RECORDS tolerate little DATA LOSS (tight RPO). Different systems, different pressures — set each independently.</a:t>
+            </a:r>
+          </a:p>
+          <a:p>
+            <a:r>
+              <a:t>• Second bullet: EXPLAIN each target by the business CONSEQUENCE it avoids — "RTO one hour because a longer outage loses enrolments during the campaign." The justification is assessable, not just the number.</a:t>
+            </a:r>
+          </a:p>
+          <a:p>
+            <a:r>
+              <a:t>• Third bullet (accent it): TIGHTER targets COST MORE — set them to the NEED, not the maximum. Everyone wants near-zero; the skill is matching the target to the tolerance, not gold-plating.</a:t>
+            </a:r>
+          </a:p>
+          <a:p>
+            <a:r>
+              <a:t>Misconception to pre-empt: "set RTO/RPO as low as possible to be safe." No — near-zero targets force expensive active-active designs; over-specifying is a marked-down failure to match need to cost.</a:t>
+            </a:r>
+          </a:p>
+          <a:p>
+            <a:r>
+              <a:t>Question to pose: "Why might the financial-records system have a TIGHT RPO but a LOOSER RTO than the public front door?" (losing financial data is intolerable; being briefly offline is survivable — the two objectives decouple).</a:t>
+            </a:r>
+          </a:p>
+          <a:p>
+            <a:r>
+              <a:t>UoC/AT1 tie: [ICTCLD501 PC 2.1] (determine and explain RTO/RPO to business needs) — AT1 Part B B3; the explanation is what earns the criterion.</a:t>
+            </a:r>
+          </a:p>
+        </p:txBody>
+      </p:sp>
+      <p:sp>
+        <p:nvSpPr>
+          <p:cNvPr id="4" name="Slide Number Placeholder 3"/>
+          <p:cNvSpPr>
+            <a:spLocks noGrp="1"/>
+          </p:cNvSpPr>
+          <p:nvPr>
+            <p:ph type="sldNum" idx="5" sz="quarter"/>
+          </p:nvPr>
+        </p:nvSpPr>
+        <p:spPr/>
+      </p:sp>
+    </p:spTree>
+  </p:cSld>
+  <p:clrMapOvr>
+    <a:masterClrMapping/>
+  </p:clrMapOvr>
+</p:notes>
+</file>
+
+<file path=ppt/notesSlides/notesSlide8.xml><?xml version="1.0" encoding="utf-8"?>
+<p:notes xmlns:a="http://schemas.openxmlformats.org/drawingml/2006/main" xmlns:p="http://schemas.openxmlformats.org/presentationml/2006/main" xmlns:r="http://schemas.openxmlformats.org/officeDocument/2006/relationships">
+  <p:cSld>
+    <p:spTree>
+      <p:nvGrpSpPr>
+        <p:cNvPr id="1" name=""/>
+        <p:cNvGrpSpPr/>
+        <p:nvPr/>
+      </p:nvGrpSpPr>
+      <p:grpSpPr>
+        <a:xfrm>
+          <a:off x="0" y="0"/>
+          <a:ext cx="0" cy="0"/>
+          <a:chOff x="0" y="0"/>
+          <a:chExt cx="0" cy="0"/>
+        </a:xfrm>
+      </p:grpSpPr>
+      <p:sp>
+        <p:nvSpPr>
+          <p:cNvPr id="2" name="Slide Image Placeholder 1"/>
+          <p:cNvSpPr>
+            <a:spLocks noGrp="1"/>
+          </p:cNvSpPr>
+          <p:nvPr>
+            <p:ph type="sldImg" idx="2"/>
+          </p:nvPr>
+        </p:nvSpPr>
+        <p:spPr/>
+      </p:sp>
+      <p:sp>
+        <p:nvSpPr>
+          <p:cNvPr id="3" name="Notes Placeholder 2"/>
+          <p:cNvSpPr>
+            <a:spLocks noGrp="1"/>
+          </p:cNvSpPr>
+          <p:nvPr>
+            <p:ph type="body" idx="3" sz="quarter"/>
+          </p:nvPr>
+        </p:nvSpPr>
+        <p:spPr/>
+        <p:txBody>
+          <a:bodyPr/>
+          <a:lstStyle/>
+          <a:p>
+            <a:r>
+              <a:t>Teach the DATA-managed estimate — the second C2 output. Recovery is shaped by how much data there is and how sensitive it is.</a:t>
+            </a:r>
+          </a:p>
+          <a:p>
+            <a:r>
+              <a:t>• First bullet: ESTIMATE the amount of data the plan must protect and recover. Volume affects how long a restore takes — it feeds directly into whether an RTO is achievable.</a:t>
+            </a:r>
+          </a:p>
+          <a:p>
+            <a:r>
+              <a:t>• Second bullet: CLASSIFY its security level — personal, financial, operational — which drives HANDLING and RESIDENCY. India-cohort personal data carries residency obligations; classification isn't academic.</a:t>
+            </a:r>
+          </a:p>
+          <a:p>
+            <a:r>
+              <a:t>• Third bullet (accent it): VOLUME and SENSITIVITY shape both the RPO and the recovery METHOD — big/sensitive data changes both how recent your copy must be and where/how you're allowed to keep it.</a:t>
+            </a:r>
+          </a:p>
+          <a:p>
+            <a:r>
+              <a:t>Misconception to pre-empt: "the data estimate is just a size in GB." No — it's amount AND security level; the classification drives residency and handling rules that constrain the whole recovery method, not just storage cost.</a:t>
+            </a:r>
+          </a:p>
+          <a:p>
+            <a:r>
+              <a:t>Question to pose: "You have 2 TB of India-cohort personal data — name two things that estimate constrains in the plan." (restore time vs RTO, and where copies may legally live — residency).</a:t>
+            </a:r>
+          </a:p>
+          <a:p>
+            <a:r>
+              <a:t>UoC/AT1 tie: [ICTCLD501 PC 2.3] (estimate amount and security level of data managed) — AT1 Part B B4.</a:t>
+            </a:r>
+          </a:p>
+        </p:txBody>
+      </p:sp>
+      <p:sp>
+        <p:nvSpPr>
+          <p:cNvPr id="4" name="Slide Number Placeholder 3"/>
+          <p:cNvSpPr>
+            <a:spLocks noGrp="1"/>
+          </p:cNvSpPr>
+          <p:nvPr>
+            <p:ph type="sldNum" idx="5" sz="quarter"/>
+          </p:nvPr>
+        </p:nvSpPr>
+        <p:spPr/>
+      </p:sp>
+    </p:spTree>
+  </p:cSld>
+  <p:clrMapOvr>
+    <a:masterClrMapping/>
+  </p:clrMapOvr>
+</p:notes>
+</file>
+
+<file path=ppt/notesSlides/notesSlide9.xml><?xml version="1.0" encoding="utf-8"?>
+<p:notes xmlns:a="http://schemas.openxmlformats.org/drawingml/2006/main" xmlns:p="http://schemas.openxmlformats.org/presentationml/2006/main" xmlns:r="http://schemas.openxmlformats.org/officeDocument/2006/relationships">
+  <p:cSld>
+    <p:spTree>
+      <p:nvGrpSpPr>
+        <p:cNvPr id="1" name=""/>
+        <p:cNvGrpSpPr/>
+        <p:nvPr/>
+      </p:nvGrpSpPr>
+      <p:grpSpPr>
+        <a:xfrm>
+          <a:off x="0" y="0"/>
+          <a:ext cx="0" cy="0"/>
+          <a:chOff x="0" y="0"/>
+          <a:chExt cx="0" cy="0"/>
+        </a:xfrm>
+      </p:grpSpPr>
+      <p:sp>
+        <p:nvSpPr>
+          <p:cNvPr id="2" name="Slide Image Placeholder 1"/>
+          <p:cNvSpPr>
+            <a:spLocks noGrp="1"/>
+          </p:cNvSpPr>
+          <p:nvPr>
+            <p:ph type="sldImg" idx="2"/>
+          </p:nvPr>
+        </p:nvSpPr>
+        <p:spPr/>
+      </p:sp>
+      <p:sp>
+        <p:nvSpPr>
+          <p:cNvPr id="3" name="Notes Placeholder 2"/>
+          <p:cNvSpPr>
+            <a:spLocks noGrp="1"/>
+          </p:cNvSpPr>
+          <p:nvPr>
+            <p:ph type="body" idx="3" sz="quarter"/>
+          </p:nvPr>
+        </p:nvSpPr>
+        <p:spPr/>
+        <p:txBody>
+          <a:bodyPr/>
+          <a:lstStyle/>
+          <a:p>
+            <a:r>
+              <a:t>Facilitation — the C2 practice: set and EXPLAIN RTO/RPO and estimate the data on the PRACTICE scenario. Rehearses AT1 Part B B3–B4.</a:t>
+            </a:r>
+          </a:p>
+          <a:p>
+            <a:r>
+              <a:t>Tell students: "For the practice scenario, determine RTO and RPO for the critical systems and EXPLAIN each to the business need. Then estimate the amount and security level of the data the plan manages."</a:t>
+            </a:r>
+          </a:p>
+          <a:p>
+            <a:r>
+              <a:t>Steps (put on the board):</a:t>
+            </a:r>
+          </a:p>
+          <a:p>
+            <a:r>
+              <a:t>1. For each critical system, set an RTO and an RPO — and write the business consequence each target avoids.</a:t>
+            </a:r>
+          </a:p>
+          <a:p>
+            <a:r>
+              <a:t>2. Match the target to the need — don't default to near-zero; note the cost trade-off.</a:t>
+            </a:r>
+          </a:p>
+          <a:p>
+            <a:r>
+              <a:t>3. Estimate the data managed: amount, and security classification (personal/financial/operational) with its residency implication.</a:t>
+            </a:r>
+          </a:p>
+          <a:p>
+            <a:r>
+              <a:t>Must produce: RTO/RPO per critical system WITH explanations, plus a data estimate (amount + classification).</a:t>
+            </a:r>
+          </a:p>
+          <a:p>
+            <a:r>
+              <a:t>Timing: ~20 min. Where they get stuck: they give numbers with no justification (the explanation is the mark), and they set everything to near-zero (push them to match target to tolerance and note cost).</a:t>
+            </a:r>
+          </a:p>
+          <a:p>
+            <a:r>
+              <a:t>Share-back prompt: "Give me one RTO and the business consequence it's set to avoid" — listen for the justification, not just the number.</a:t>
+            </a:r>
+          </a:p>
+          <a:p>
+            <a:r>
+              <a:t>No-leakage note: practice scenario only (comparable, not identical); AT1 evidences the same objectives-and-data skill on the assessed system — keep them on the practice brief.</a:t>
+            </a:r>
+          </a:p>
+          <a:p>
+            <a:r>
+              <a:t>UoC/AT1 tie: [ICTCLD501 PC 2.1] · [ICTCLD501 PC 2.3] · [ICTCLD501 KE 5] — recovery objectives + data managed (AT1 Part B B3–B4).</a:t>
+            </a:r>
+          </a:p>
+        </p:txBody>
+      </p:sp>
+      <p:sp>
+        <p:nvSpPr>
+          <p:cNvPr id="4" name="Slide Number Placeholder 3"/>
+          <p:cNvSpPr>
+            <a:spLocks noGrp="1"/>
+          </p:cNvSpPr>
+          <p:nvPr>
+            <p:ph type="sldNum" idx="5" sz="quarter"/>
+          </p:nvPr>
+        </p:nvSpPr>
+        <p:spPr/>
+      </p:sp>
+    </p:spTree>
+  </p:cSld>
+  <p:clrMapOvr>
+    <a:masterClrMapping/>
+  </p:clrMapOvr>
+</p:notes>
 </file>
 
 <file path=ppt/slideLayouts/slideLayout1.xml><?xml version="1.0" encoding="utf-8"?>
@@ -10849,4 +12574,324 @@
   </a:objectDefaults>
   <a:extraClrSchemeLst/>
 </a:theme>
+</file>
+
+<file path=ppt/theme/theme2.xml><?xml version="1.0" encoding="utf-8"?>
+<a:theme xmlns:a="http://schemas.openxmlformats.org/drawingml/2006/main" name="Office Theme">
+  <a:themeElements>
+    <a:clrScheme name="Office">
+      <a:dk1>
+        <a:sysClr val="windowText" lastClr="000000"/>
+      </a:dk1>
+      <a:lt1>
+        <a:sysClr val="window" lastClr="FFFFFF"/>
+      </a:lt1>
+      <a:dk2>
+        <a:srgbClr val="1F497D"/>
+      </a:dk2>
+      <a:lt2>
+        <a:srgbClr val="EEECE1"/>
+      </a:lt2>
+      <a:accent1>
+        <a:srgbClr val="4F81BD"/>
+      </a:accent1>
+      <a:accent2>
+        <a:srgbClr val="C0504D"/>
+      </a:accent2>
+      <a:accent3>
+        <a:srgbClr val="9BBB59"/>
+      </a:accent3>
+      <a:accent4>
+        <a:srgbClr val="8064A2"/>
+      </a:accent4>
+      <a:accent5>
+        <a:srgbClr val="4BACC6"/>
+      </a:accent5>
+      <a:accent6>
+        <a:srgbClr val="F79646"/>
+      </a:accent6>
+      <a:hlink>
+        <a:srgbClr val="0000FF"/>
+      </a:hlink>
+      <a:folHlink>
+        <a:srgbClr val="800080"/>
+      </a:folHlink>
+    </a:clrScheme>
+    <a:fontScheme name="Office">
+      <a:majorFont>
+        <a:latin typeface="Calibri"/>
+        <a:ea typeface=""/>
+        <a:cs typeface=""/>
+        <a:font script="Jpan" typeface="ＭＳ Ｐゴシック"/>
+        <a:font script="Hang" typeface="맑은 고딕"/>
+        <a:font script="Hans" typeface="宋体"/>
+        <a:font script="Hant" typeface="新細明體"/>
+        <a:font script="Arab" typeface="Times New Roman"/>
+        <a:font script="Hebr" typeface="Times New Roman"/>
+        <a:font script="Thai" typeface="Angsana New"/>
+        <a:font script="Ethi" typeface="Nyala"/>
+        <a:font script="Beng" typeface="Vrinda"/>
+        <a:font script="Gujr" typeface="Shruti"/>
+        <a:font script="Khmr" typeface="MoolBoran"/>
+        <a:font script="Knda" typeface="Tunga"/>
+        <a:font script="Guru" typeface="Raavi"/>
+        <a:font script="Cans" typeface="Euphemia"/>
+        <a:font script="Cher" typeface="Plantagenet Cherokee"/>
+        <a:font script="Yiii" typeface="Microsoft Yi Baiti"/>
+        <a:font script="Tibt" typeface="Microsoft Himalaya"/>
+        <a:font script="Thaa" typeface="MV Boli"/>
+        <a:font script="Deva" typeface="Mangal"/>
+        <a:font script="Telu" typeface="Gautami"/>
+        <a:font script="Taml" typeface="Latha"/>
+        <a:font script="Syrc" typeface="Estrangelo Edessa"/>
+        <a:font script="Orya" typeface="Kalinga"/>
+        <a:font script="Mlym" typeface="Kartika"/>
+        <a:font script="Laoo" typeface="DokChampa"/>
+        <a:font script="Sinh" typeface="Iskoola Pota"/>
+        <a:font script="Mong" typeface="Mongolian Baiti"/>
+        <a:font script="Viet" typeface="Times New Roman"/>
+        <a:font script="Uigh" typeface="Microsoft Uighur"/>
+        <a:font script="Geor" typeface="Sylfaen"/>
+      </a:majorFont>
+      <a:minorFont>
+        <a:latin typeface="Calibri"/>
+        <a:ea typeface=""/>
+        <a:cs typeface=""/>
+        <a:font script="Jpan" typeface="ＭＳ Ｐゴシック"/>
+        <a:font script="Hang" typeface="맑은 고딕"/>
+        <a:font script="Hans" typeface="宋体"/>
+        <a:font script="Hant" typeface="新細明體"/>
+        <a:font script="Arab" typeface="Arial"/>
+        <a:font script="Hebr" typeface="Arial"/>
+        <a:font script="Thai" typeface="Cordia New"/>
+        <a:font script="Ethi" typeface="Nyala"/>
+        <a:font script="Beng" typeface="Vrinda"/>
+        <a:font script="Gujr" typeface="Shruti"/>
+        <a:font script="Khmr" typeface="DaunPenh"/>
+        <a:font script="Knda" typeface="Tunga"/>
+        <a:font script="Guru" typeface="Raavi"/>
+        <a:font script="Cans" typeface="Euphemia"/>
+        <a:font script="Cher" typeface="Plantagenet Cherokee"/>
+        <a:font script="Yiii" typeface="Microsoft Yi Baiti"/>
+        <a:font script="Tibt" typeface="Microsoft Himalaya"/>
+        <a:font script="Thaa" typeface="MV Boli"/>
+        <a:font script="Deva" typeface="Mangal"/>
+        <a:font script="Telu" typeface="Gautami"/>
+        <a:font script="Taml" typeface="Latha"/>
+        <a:font script="Syrc" typeface="Estrangelo Edessa"/>
+        <a:font script="Orya" typeface="Kalinga"/>
+        <a:font script="Mlym" typeface="Kartika"/>
+        <a:font script="Laoo" typeface="DokChampa"/>
+        <a:font script="Sinh" typeface="Iskoola Pota"/>
+        <a:font script="Mong" typeface="Mongolian Baiti"/>
+        <a:font script="Viet" typeface="Arial"/>
+        <a:font script="Uigh" typeface="Microsoft Uighur"/>
+        <a:font script="Geor" typeface="Sylfaen"/>
+      </a:minorFont>
+    </a:fontScheme>
+    <a:fmtScheme name="Office">
+      <a:fillStyleLst>
+        <a:solidFill>
+          <a:schemeClr val="phClr"/>
+        </a:solidFill>
+        <a:gradFill rotWithShape="1">
+          <a:gsLst>
+            <a:gs pos="0">
+              <a:schemeClr val="phClr">
+                <a:tint val="50000"/>
+                <a:satMod val="300000"/>
+              </a:schemeClr>
+            </a:gs>
+            <a:gs pos="35000">
+              <a:schemeClr val="phClr">
+                <a:tint val="37000"/>
+                <a:satMod val="300000"/>
+              </a:schemeClr>
+            </a:gs>
+            <a:gs pos="100000">
+              <a:schemeClr val="phClr">
+                <a:tint val="15000"/>
+                <a:satMod val="350000"/>
+              </a:schemeClr>
+            </a:gs>
+          </a:gsLst>
+          <a:lin ang="16200000" scaled="1"/>
+        </a:gradFill>
+        <a:gradFill rotWithShape="1">
+          <a:gsLst>
+            <a:gs pos="0">
+              <a:schemeClr val="phClr">
+                <a:tint val="100000"/>
+                <a:shade val="100000"/>
+                <a:satMod val="130000"/>
+              </a:schemeClr>
+            </a:gs>
+            <a:gs pos="100000">
+              <a:schemeClr val="phClr">
+                <a:tint val="50000"/>
+                <a:shade val="100000"/>
+                <a:satMod val="350000"/>
+              </a:schemeClr>
+            </a:gs>
+          </a:gsLst>
+          <a:lin ang="16200000" scaled="0"/>
+        </a:gradFill>
+      </a:fillStyleLst>
+      <a:lnStyleLst>
+        <a:ln w="9525" cap="flat" cmpd="sng" algn="ctr">
+          <a:solidFill>
+            <a:schemeClr val="phClr">
+              <a:shade val="95000"/>
+              <a:satMod val="105000"/>
+            </a:schemeClr>
+          </a:solidFill>
+          <a:prstDash val="solid"/>
+        </a:ln>
+        <a:ln w="25400" cap="flat" cmpd="sng" algn="ctr">
+          <a:solidFill>
+            <a:schemeClr val="phClr"/>
+          </a:solidFill>
+          <a:prstDash val="solid"/>
+        </a:ln>
+        <a:ln w="38100" cap="flat" cmpd="sng" algn="ctr">
+          <a:solidFill>
+            <a:schemeClr val="phClr"/>
+          </a:solidFill>
+          <a:prstDash val="solid"/>
+        </a:ln>
+      </a:lnStyleLst>
+      <a:effectStyleLst>
+        <a:effectStyle>
+          <a:effectLst>
+            <a:outerShdw blurRad="40000" dist="20000" dir="5400000" rotWithShape="0">
+              <a:srgbClr val="000000">
+                <a:alpha val="38000"/>
+              </a:srgbClr>
+            </a:outerShdw>
+          </a:effectLst>
+        </a:effectStyle>
+        <a:effectStyle>
+          <a:effectLst>
+            <a:outerShdw blurRad="40000" dist="23000" dir="5400000" rotWithShape="0">
+              <a:srgbClr val="000000">
+                <a:alpha val="35000"/>
+              </a:srgbClr>
+            </a:outerShdw>
+          </a:effectLst>
+        </a:effectStyle>
+        <a:effectStyle>
+          <a:effectLst>
+            <a:outerShdw blurRad="40000" dist="23000" dir="5400000" rotWithShape="0">
+              <a:srgbClr val="000000">
+                <a:alpha val="35000"/>
+              </a:srgbClr>
+            </a:outerShdw>
+          </a:effectLst>
+          <a:scene3d>
+            <a:camera prst="orthographicFront">
+              <a:rot lat="0" lon="0" rev="0"/>
+            </a:camera>
+            <a:lightRig rig="threePt" dir="t">
+              <a:rot lat="0" lon="0" rev="1200000"/>
+            </a:lightRig>
+          </a:scene3d>
+          <a:sp3d>
+            <a:bevelT w="63500" h="25400"/>
+          </a:sp3d>
+        </a:effectStyle>
+      </a:effectStyleLst>
+      <a:bgFillStyleLst>
+        <a:solidFill>
+          <a:schemeClr val="phClr"/>
+        </a:solidFill>
+        <a:gradFill rotWithShape="1">
+          <a:gsLst>
+            <a:gs pos="0">
+              <a:schemeClr val="phClr">
+                <a:tint val="40000"/>
+                <a:satMod val="350000"/>
+              </a:schemeClr>
+            </a:gs>
+            <a:gs pos="40000">
+              <a:schemeClr val="phClr">
+                <a:tint val="45000"/>
+                <a:shade val="99000"/>
+                <a:satMod val="350000"/>
+              </a:schemeClr>
+            </a:gs>
+            <a:gs pos="100000">
+              <a:schemeClr val="phClr">
+                <a:shade val="20000"/>
+                <a:satMod val="255000"/>
+              </a:schemeClr>
+            </a:gs>
+          </a:gsLst>
+          <a:path path="circle">
+            <a:fillToRect l="50000" t="-80000" r="50000" b="180000"/>
+          </a:path>
+        </a:gradFill>
+        <a:gradFill rotWithShape="1">
+          <a:gsLst>
+            <a:gs pos="0">
+              <a:schemeClr val="phClr">
+                <a:tint val="80000"/>
+                <a:satMod val="300000"/>
+              </a:schemeClr>
+            </a:gs>
+            <a:gs pos="100000">
+              <a:schemeClr val="phClr">
+                <a:shade val="30000"/>
+                <a:satMod val="200000"/>
+              </a:schemeClr>
+            </a:gs>
+          </a:gsLst>
+          <a:path path="circle">
+            <a:fillToRect l="50000" t="50000" r="50000" b="50000"/>
+          </a:path>
+        </a:gradFill>
+      </a:bgFillStyleLst>
+    </a:fmtScheme>
+  </a:themeElements>
+  <a:objectDefaults>
+    <a:spDef>
+      <a:spPr/>
+      <a:bodyPr/>
+      <a:lstStyle/>
+      <a:style>
+        <a:lnRef idx="1">
+          <a:schemeClr val="accent1"/>
+        </a:lnRef>
+        <a:fillRef idx="3">
+          <a:schemeClr val="accent1"/>
+        </a:fillRef>
+        <a:effectRef idx="2">
+          <a:schemeClr val="accent1"/>
+        </a:effectRef>
+        <a:fontRef idx="minor">
+          <a:schemeClr val="lt1"/>
+        </a:fontRef>
+      </a:style>
+    </a:spDef>
+    <a:lnDef>
+      <a:spPr/>
+      <a:bodyPr/>
+      <a:lstStyle/>
+      <a:style>
+        <a:lnRef idx="2">
+          <a:schemeClr val="accent1"/>
+        </a:lnRef>
+        <a:fillRef idx="0">
+          <a:schemeClr val="accent1"/>
+        </a:fillRef>
+        <a:effectRef idx="1">
+          <a:schemeClr val="accent1"/>
+        </a:effectRef>
+        <a:fontRef idx="minor">
+          <a:schemeClr val="tx1"/>
+        </a:fontRef>
+      </a:style>
+    </a:lnDef>
+  </a:objectDefaults>
+  <a:extraClrSchemeLst/>
+</a:theme>
 </file>
--- a/S1-CL2-Cloud-Disaster-Recovery/delivery/topic_03/Topic_03_Slides.pptx
+++ b/S1-CL2-Cloud-Disaster-Recovery/delivery/topic_03/Topic_03_Slides.pptx
@@ -25,6 +25,9 @@
     <p:sldId id="273" r:id="rId25"/>
     <p:sldId id="274" r:id="rId26"/>
     <p:sldId id="275" r:id="rId27"/>
+    <p:sldId id="276" r:id="rId28"/>
+    <p:sldId id="277" r:id="rId29"/>
+    <p:sldId id="278" r:id="rId30"/>
   </p:sldIdLst>
   <p:sldSz cx="12191695" cy="6858000" type="screen4x3"/>
   <p:notesSz cx="6858000" cy="9144000"/>
@@ -521,42 +524,17 @@
           <a:lstStyle/>
           <a:p>
             <a:r>
-              <a:t>Frame the pivot — from designing the system (Topics 1–2) to protecting it. This is the front half of the DR lifecycle; set the two moves and the boundary.</a:t>
-            </a:r>
-          </a:p>
-          <a:p>
-            <a:r>
-              <a:t>• First bullet: Topics 1–2 built the system; Topic 3 asks what happens when part of it FAILS. The question flips from "how does it run?" to "how does it recover?"</a:t>
-            </a:r>
-          </a:p>
-          <a:p>
-            <a:r>
-              <a:t>• Second bullet: locate the Topic — this is the FRONT HALF of the DR plan: the requirements and the impact analysis. The back half (strategy + written plan) is Topic 4.</a:t>
-            </a:r>
-          </a:p>
-          <a:p>
-            <a:r>
-              <a:t>• Third bullet: name the two moves — establish what recovery must ACHIEVE (requirements + objectives), then analyse the RISKS that threaten it (impact analysis). In that order; you can't analyse risk against targets you haven't set.</a:t>
-            </a:r>
-          </a:p>
-          <a:p>
-            <a:r>
-              <a:t>• Hold the boundary (last bullet): ANALYSIS ONLY — the strategy and the written plan are Topic 4; recovery is never executed here.</a:t>
-            </a:r>
-          </a:p>
-          <a:p>
-            <a:r>
-              <a:t>Misconception to pre-empt: "DR is about backups/technology." No — it starts with BUSINESS requirements and risk analysis; the technology choice comes later (Topic 4). Lead with the business, not the tool.</a:t>
-            </a:r>
-          </a:p>
-          <a:p>
-            <a:r>
-              <a:t>Question to pose: "Before you can say how to recover a system, what two things must you establish first?" (what recovery must achieve — the requirements/objectives — and what threatens it — the risks).</a:t>
-            </a:r>
-          </a:p>
-          <a:p>
-            <a:r>
-              <a:t>UoC/AT1 tie: this Topic develops [ICTCLD501 PC 1.1]–[ICTCLD501 PC 1.3], [ICTCLD501 PC 2.1]–[ICTCLD501 PC 2.5], [ICTCLD501 PE 2] and [ICTCLD501 KE 1]/[ICTCLD501 KE 2]/[ICTCLD501 KE 5], evidenced in AT1 Part B §1–2 and the Part B KE appendix.</a:t>
+              <a:t>The pivot from designing the system to protecting it — today runs workbook tasks 20 to 27 in order.</a:t>
+            </a:r>
+          </a:p>
+          <a:p>
+            <a:r>
+              <a:t>Misconception: DR starts with backups. It starts with business requirements; technology comes in Topic 4.</a:t>
+            </a:r>
+          </a:p>
+          <a:p>
+            <a:r>
+              <a:t>You can't analyse risk against targets you haven't set — that's why the order is fixed.</a:t>
             </a:r>
           </a:p>
         </p:txBody>
@@ -626,37 +604,12 @@
           <a:lstStyle/>
           <a:p>
             <a:r>
-              <a:t>Open C3 — the risk half. Teach WHAT can go wrong in the cloud and the METHOD for analysing it consistently. Vendor-neutral; sets up the assessment activity.</a:t>
-            </a:r>
-          </a:p>
-          <a:p>
-            <a:r>
-              <a:t>• First bullet: name the cloud RISK ENVIRONMENT — region/AZ outages, misconfiguration, dependency failure, human error, malicious action. Note most real incidents are NOT dramatic region outages; misconfiguration and human error dominate.</a:t>
-            </a:r>
-          </a:p>
-          <a:p>
-            <a:r>
-              <a:t>• Second bullet: a DATA-ANALYSIS METHODOLOGY turns those into a COMPARABLE picture — likelihood and impact scored CONSISTENTLY, so events can be ranked against each other.</a:t>
-            </a:r>
-          </a:p>
-          <a:p>
-            <a:r>
-              <a:t>• Third bullet (accent it): risk analysis is SYSTEMATIC, not a guess — the SAME scale for every event. Consistency is what makes the ranking meaningful.</a:t>
-            </a:r>
-          </a:p>
-          <a:p>
-            <a:r>
-              <a:t>Misconception to pre-empt: "the big risk is a data-centre disaster." No — the common risks are misconfiguration and human error; a plan that only guards against region outages misses where incidents actually come from.</a:t>
-            </a:r>
-          </a:p>
-          <a:p>
-            <a:r>
-              <a:t>Question to pose: "Two people score the same risk 'high' and 'medium' — what's missing that would make them agree?" (a defined, shared scale — the methodology; without it the scores aren't comparable).</a:t>
-            </a:r>
-          </a:p>
-          <a:p>
-            <a:r>
-              <a:t>UoC/AT1 tie: [ICTCLD501 KE 1] (cloud risk environments) + [ICTCLD501 KE 2] (data-analysis methodologies) — the foundation for the risk assessment (PC 2.2/2.4/2.5, PE 2) in AT1 Part B.</a:t>
+              <a:t>The examinable pair: what's distinctive about cloud risk, and the method used to rate it — both come back as knowledge questions.</a:t>
+            </a:r>
+          </a:p>
+          <a:p>
+            <a:r>
+              <a:t>The method matters more than the ratings; a defensible ranking beats a "right" one.</a:t>
             </a:r>
           </a:p>
         </p:txBody>
@@ -726,37 +679,12 @@
           <a:lstStyle/>
           <a:p>
             <a:r>
-              <a:t>Teach the risk ASSESSMENT itself — the mechanical heart of the impact analysis. This defines exactly what the activity produces.</a:t>
-            </a:r>
-          </a:p>
-          <a:p>
-            <a:r>
-              <a:t>• First bullet: assess at least THREE major risk events — for each, its LIKELIHOOD and its IMPACT scored on the shared scale. Three is the assessed minimum (PE 2), not a target to stop at.</a:t>
-            </a:r>
-          </a:p>
-          <a:p>
-            <a:r>
-              <a:t>• Second bullet: SEVERITY = likelihood × impact; RANK the events so the plan can PRIORITISE. The ranking is the whole point — it tells Topic 4 what to protect first.</a:t>
-            </a:r>
-          </a:p>
-          <a:p>
-            <a:r>
-              <a:t>• Third bullet (accent it): record plan EXCLUSIONS — the risks the plan deliberately does NOT cover, and WHY. Naming what's out of scope, with justification, is a mark of a mature plan, not a gap in it.</a:t>
-            </a:r>
-          </a:p>
-          <a:p>
-            <a:r>
-              <a:t>Misconception to pre-empt: "more risks listed = better." No — three well-analysed, ranked risks beat a long unscored list; and a plan with NO stated exclusions is naive, not thorough.</a:t>
-            </a:r>
-          </a:p>
-          <a:p>
-            <a:r>
-              <a:t>Question to pose: "A low-likelihood, high-impact event vs a high-likelihood, low-impact one — how does severity = likelihood × impact help you rank them?" (it forces a single comparable score; discuss where they land).</a:t>
-            </a:r>
-          </a:p>
-          <a:p>
-            <a:r>
-              <a:t>UoC/AT1 tie: [ICTCLD501 PC 2.2] (assess risks + plan exclusions) + [ICTCLD501 PE 2] (determine likelihood and impact for the DR plan) — AT1 Part B B5.</a:t>
+              <a:t>Workbook task 25 — the register itself. The rank ordering is the output that drives everything in Topic 4.</a:t>
+            </a:r>
+          </a:p>
+          <a:p>
+            <a:r>
+              <a:t>Watch for all-high ratings; force the relative judgement.</a:t>
             </a:r>
           </a:p>
         </p:txBody>
@@ -826,37 +754,12 @@
           <a:lstStyle/>
           <a:p>
             <a:r>
-              <a:t>Teach the last C3 step — evaluate the business impact and DOCUMENT the outcomes properly. This closes the front half and feeds Topic 4.</a:t>
-            </a:r>
-          </a:p>
-          <a:p>
-            <a:r>
-              <a:t>• First bullet: EVALUATE the severity of IMPACT and DISRUPTION of each event ON THE BUSINESS — translate the score into business terms (lost enrolments, breached obligation), not just "high".</a:t>
-            </a:r>
-          </a:p>
-          <a:p>
-            <a:r>
-              <a:t>• Second bullet: DOCUMENT the impact-analysis outcomes per ORGANISATIONAL POLICIES and procedures — the write-up has a required form; documenting to policy is itself assessed (PC 2.5).</a:t>
-            </a:r>
-          </a:p>
-          <a:p>
-            <a:r>
-              <a:t>• Third bullet (accent it): the documented analysis is the INPUT the Topic 4 recovery plan is BUILT FROM — this isn't busywork; the ranked, documented risks directly drive the plan's priorities.</a:t>
-            </a:r>
-          </a:p>
-          <a:p>
-            <a:r>
-              <a:t>Misconception to pre-empt: "documenting is just tidying up the notes." No — documenting to organisational policy is an assessed step (PC 2.5), and it's the artefact Topic 4 consumes; sloppy documentation breaks the next stage.</a:t>
-            </a:r>
-          </a:p>
-          <a:p>
-            <a:r>
-              <a:t>Question to pose: "Your top risk is documented — how will Topic 4's plan use that exact document?" (it sets the recovery priority order and the targets the plan must meet).</a:t>
-            </a:r>
-          </a:p>
-          <a:p>
-            <a:r>
-              <a:t>UoC/AT1 tie: [ICTCLD501 PC 2.4] (evaluate severity of impact/disruption) + [ICTCLD501 PC 2.5] (document outcomes per policies) — AT1 Part B B6–B7.</a:t>
+              <a:t>Workbook task 26 — exclusions as deliberate decisions, recorded with reasons.</a:t>
+            </a:r>
+          </a:p>
+          <a:p>
+            <a:r>
+              <a:t>This is the slide that stops "the plan covers everything" — nothing does.</a:t>
             </a:r>
           </a:p>
         </p:txBody>
@@ -926,62 +829,87 @@
           <a:lstStyle/>
           <a:p>
             <a:r>
-              <a:t>Facilitation — the biggest activity in the Topic: students produce the impact analysis for the practice scenario. The core AT1 Part B §2 rehearsal; the worked risk-register table on the next slide is their shape.</a:t>
-            </a:r>
-          </a:p>
-          <a:p>
-            <a:r>
-              <a:t>Tell students: "For the practice scenario, assess at least THREE major risk events — score each for likelihood and impact on one scale, compute severity, rank them, and note what the plan excludes. Then document the outcomes."</a:t>
-            </a:r>
-          </a:p>
-          <a:p>
-            <a:r>
-              <a:t>Steps (put on the board):</a:t>
-            </a:r>
-          </a:p>
-          <a:p>
-            <a:r>
-              <a:t>1. Pick ≥3 major risk events from the cloud risk environment (don't just list region outages — include misconfiguration/human error).</a:t>
-            </a:r>
-          </a:p>
-          <a:p>
-            <a:r>
-              <a:t>2. Score each: likelihood × impact = severity, all on the SAME scale; rank them.</a:t>
-            </a:r>
-          </a:p>
-          <a:p>
-            <a:r>
-              <a:t>3. Note plan exclusions — what's deliberately out, and why.</a:t>
-            </a:r>
-          </a:p>
-          <a:p>
-            <a:r>
-              <a:t>4. Document the outcomes in business terms (what the impact means for the organisation).</a:t>
-            </a:r>
-          </a:p>
-          <a:p>
-            <a:r>
-              <a:t>Must produce: a ranked risk register (≥3 events, likelihood/impact/severity), stated exclusions, and a short documented impact write-up.</a:t>
-            </a:r>
-          </a:p>
-          <a:p>
-            <a:r>
-              <a:t>Timing: ~30 min. Where they get stuck: they list risks without scoring on a consistent scale (make them fix one scale first), and they skip exclusions (prompt "what did you decide NOT to cover, and why?").</a:t>
-            </a:r>
-          </a:p>
-          <a:p>
-            <a:r>
-              <a:t>Share-back prompt: "Give me your top-ranked risk and the score behind it" — check the scale is applied consistently.</a:t>
-            </a:r>
-          </a:p>
-          <a:p>
-            <a:r>
-              <a:t>No-leakage note: practice scenario only (comparable, not identical); AT1 evidences the same risk-and-impact skill on the assessed system — keep them on the practice brief.</a:t>
-            </a:r>
-          </a:p>
-          <a:p>
-            <a:r>
-              <a:t>UoC/AT1 tie: [ICTCLD501 PC 2.2] · [ICTCLD501 PC 2.4] · [ICTCLD501 PC 2.5] · [ICTCLD501 PE 2] — the impact-analysis core of AT1 Part B §2.</a:t>
+              <a:t>Workbook task 27 closes the analysis. Business terms are the discipline — "the database is down" is not an impact, "enrolments stop" is.</a:t>
+            </a:r>
+          </a:p>
+        </p:txBody>
+      </p:sp>
+      <p:sp>
+        <p:nvSpPr>
+          <p:cNvPr id="4" name="Slide Number Placeholder 3"/>
+          <p:cNvSpPr>
+            <a:spLocks noGrp="1"/>
+          </p:cNvSpPr>
+          <p:nvPr>
+            <p:ph type="sldNum" idx="5" sz="quarter"/>
+          </p:nvPr>
+        </p:nvSpPr>
+        <p:spPr/>
+      </p:sp>
+    </p:spTree>
+  </p:cSld>
+  <p:clrMapOvr>
+    <a:masterClrMapping/>
+  </p:clrMapOvr>
+</p:notes>
+</file>
+
+<file path=ppt/notesSlides/notesSlide14.xml><?xml version="1.0" encoding="utf-8"?>
+<p:notes xmlns:a="http://schemas.openxmlformats.org/drawingml/2006/main" xmlns:p="http://schemas.openxmlformats.org/presentationml/2006/main" xmlns:r="http://schemas.openxmlformats.org/officeDocument/2006/relationships">
+  <p:cSld>
+    <p:spTree>
+      <p:nvGrpSpPr>
+        <p:cNvPr id="1" name=""/>
+        <p:cNvGrpSpPr/>
+        <p:nvPr/>
+      </p:nvGrpSpPr>
+      <p:grpSpPr>
+        <a:xfrm>
+          <a:off x="0" y="0"/>
+          <a:ext cx="0" cy="0"/>
+          <a:chOff x="0" y="0"/>
+          <a:chExt cx="0" cy="0"/>
+        </a:xfrm>
+      </p:grpSpPr>
+      <p:sp>
+        <p:nvSpPr>
+          <p:cNvPr id="2" name="Slide Image Placeholder 1"/>
+          <p:cNvSpPr>
+            <a:spLocks noGrp="1"/>
+          </p:cNvSpPr>
+          <p:nvPr>
+            <p:ph type="sldImg" idx="2"/>
+          </p:nvPr>
+        </p:nvSpPr>
+        <p:spPr/>
+      </p:sp>
+      <p:sp>
+        <p:nvSpPr>
+          <p:cNvPr id="3" name="Notes Placeholder 2"/>
+          <p:cNvSpPr>
+            <a:spLocks noGrp="1"/>
+          </p:cNvSpPr>
+          <p:nvPr>
+            <p:ph type="body" idx="3" sz="quarter"/>
+          </p:nvPr>
+        </p:nvSpPr>
+        <p:spPr/>
+        <p:txBody>
+          <a:bodyPr/>
+          <a:lstStyle/>
+          <a:p>
+            <a:r>
+              <a:t>Activity = practice workbook tasks 25–27, then assessment Q5–Q6 rehearsed from their own register.</a:t>
+            </a:r>
+          </a:p>
+          <a:p>
+            <a:r>
+              <a:t>The practice workbook carries no questions — use the assessment's, answered from the work just done.</a:t>
+            </a:r>
+          </a:p>
+          <a:p>
+            <a:r>
+              <a:t>Press the method question: "how did you rate these, and why that way?"</a:t>
             </a:r>
           </a:p>
         </p:txBody>
@@ -1051,37 +979,12 @@
           <a:lstStyle/>
           <a:p>
             <a:r>
-              <a:t>Install the purpose of a DR plan — vendor-neutral. Keep it tight; it sets the "requirements before technology" discipline for the whole Topic.</a:t>
-            </a:r>
-          </a:p>
-          <a:p>
-            <a:r>
-              <a:t>• First bullet: a DR plan RESTORES service after a disruptive event, to AGREED targets. "Agreed" matters — recovery is measured against targets the business signed off, not best effort.</a:t>
-            </a:r>
-          </a:p>
-          <a:p>
-            <a:r>
-              <a:t>• Second bullet: it's driven by BUSINESS NEEDS — what the organisation can and cannot tolerate losing. The business sets the tolerance; the plan serves it.</a:t>
-            </a:r>
-          </a:p>
-          <a:p>
-            <a:r>
-              <a:t>• Third bullet (accent it): START by writing down the REQUIREMENTS, not by picking a technology. Leading with "we'll use backups" is the classic mistake — requirements first.</a:t>
-            </a:r>
-          </a:p>
-          <a:p>
-            <a:r>
-              <a:t>Misconception to pre-empt: "DR planning = choosing a backup product." No — that's the last step; you first establish what must recover, how fast, and against which risks. Technology is chosen to meet requirements, not the reverse.</a:t>
-            </a:r>
-          </a:p>
-          <a:p>
-            <a:r>
-              <a:t>Question to pose: "Two systems both go down — why might one need recovery in minutes and the other can wait a day?" (business tolerance differs; the requirement, not the tech, decides).</a:t>
-            </a:r>
-          </a:p>
-          <a:p>
-            <a:r>
-              <a:t>UoC/AT1 tie: [ICTCLD501 PC 1.1] (identify DR requirements per business needs) — the requirements-first mindset AT1 Part B §1 rewards.</a:t>
+              <a:t>Requirements-first is the discipline of the whole Topic. "Agreed" matters — recovery is measured against signed-off targets, not best effort.</a:t>
+            </a:r>
+          </a:p>
+          <a:p>
+            <a:r>
+              <a:t>Question to pose: two systems go down — why can one wait a day and the other can't? (business tolerance, not technology).</a:t>
             </a:r>
           </a:p>
         </p:txBody>
@@ -1151,37 +1054,12 @@
           <a:lstStyle/>
           <a:p>
             <a:r>
-              <a:t>Teach how to ELICIT the DR requirements from the brief — the first concrete C1 skill. A consultant reads the brief; they don't guess.</a:t>
-            </a:r>
-          </a:p>
-          <a:p>
-            <a:r>
-              <a:t>• First bullet: read the engagement brief — which systems are business-CRITICAL, and TO WHOM. Criticality is relative to a stakeholder; name both.</a:t>
-            </a:r>
-          </a:p>
-          <a:p>
-            <a:r>
-              <a:t>• Second bullet: requirements come from the BUSINESS — worked examples: enrolment front-door uptime, financial-record integrity, residency. Note the mix of availability, integrity and compliance requirements.</a:t>
-            </a:r>
-          </a:p>
-          <a:p>
-            <a:r>
-              <a:t>• Third bullet (accent it): STATE each requirement so it can later be TESTED against a proposed plan. A requirement you can't test is a wish — make it checkable ("front door available 99.5%", not "highly available").</a:t>
-            </a:r>
-          </a:p>
-          <a:p>
-            <a:r>
-              <a:t>Misconception to pre-empt: "all systems are equally critical." No — DR is about PRIORITISATION; some systems justify expensive fast recovery, others don't. Naming criticality per stakeholder is the analytical work.</a:t>
-            </a:r>
-          </a:p>
-          <a:p>
-            <a:r>
-              <a:t>Question to pose: "'The system should be reliable' — why is that useless as a DR requirement, and how would you fix it?" (untestable; restate as a measurable target the plan can be checked against).</a:t>
-            </a:r>
-          </a:p>
-          <a:p>
-            <a:r>
-              <a:t>UoC/AT1 tie: [ICTCLD501 PC 1.1] (identify DR requirements per business needs) — AT1 Part B B1.</a:t>
+              <a:t>Workbook task 20's skill. A requirement you can't test is a wish — "highly available" fails, a stated target passes.</a:t>
+            </a:r>
+          </a:p>
+          <a:p>
+            <a:r>
+              <a:t>Criticality is relative to a stakeholder; have them name both halves.</a:t>
             </a:r>
           </a:p>
         </p:txBody>
@@ -1251,37 +1129,12 @@
           <a:lstStyle/>
           <a:p>
             <a:r>
-              <a:t>Teach the second and third C1 inputs — the CURRENT recovery position and the VENDOR's provisions. You design DR against a baseline, not a blank page.</a:t>
-            </a:r>
-          </a:p>
-          <a:p>
-            <a:r>
-              <a:t>• First bullet: determine the EXISTING organisational recovery arrangements — what's already in place, AND its gaps. You can only improve what you've first assessed.</a:t>
-            </a:r>
-          </a:p>
-          <a:p>
-            <a:r>
-              <a:t>• Second bullet: identify the cloud vendor's DR provisions and SLAs — what the provider GUARANTEES versus what YOU must add. Draw the line explicitly; it's the shared-responsibility idea applied to recovery.</a:t>
-            </a:r>
-          </a:p>
-          <a:p>
-            <a:r>
-              <a:t>• Third bullet (accent it): the plan BUILDS ON the vendor's native durability — it doesn't REINVENT it. Re-implementing what the provider already guarantees is wasted effort and often less reliable.</a:t>
-            </a:r>
-          </a:p>
-          <a:p>
-            <a:r>
-              <a:t>Misconception to pre-empt: "we must build all recovery ourselves." No — much durability is native (managed-service backups, cross-region copy); your plan sequences and governs it, filling only the gaps the SLA leaves.</a:t>
-            </a:r>
-          </a:p>
-          <a:p>
-            <a:r>
-              <a:t>Question to pose: "The managed database already keeps automated backups — so what's left for YOUR plan to add?" (orchestration, priorities, the parts the SLA doesn't cover, and meeting a tighter RTO/RPO than the default).</a:t>
-            </a:r>
-          </a:p>
-          <a:p>
-            <a:r>
-              <a:t>UoC/AT1 tie: [ICTCLD501 PC 1.2] (determine existing recovery plans) + [ICTCLD501 PC 1.3] (identify vendor DR plan and SLAs) — AT1 Part B B2.</a:t>
+              <a:t>Tasks 21 and 22 — you design DR against a baseline, not a blank page.</a:t>
+            </a:r>
+          </a:p>
+          <a:p>
+            <a:r>
+              <a:t>Question to pose: the managed database already keeps backups — what's left for your plan to add? (orchestration, priorities, the gaps the SLA leaves).</a:t>
             </a:r>
           </a:p>
         </p:txBody>
@@ -1351,57 +1204,12 @@
           <a:lstStyle/>
           <a:p>
             <a:r>
-              <a:t>Facilitation — the C1 practice: gather requirements + the current recovery position on the PRACTICE scenario. Rehearses AT1 Part B B1–B2.</a:t>
-            </a:r>
-          </a:p>
-          <a:p>
-            <a:r>
-              <a:t>Tell students: "On the practice scenario, list the DR requirements that come from the business needs — testable ones — then record what recovery is already in place and the relevant vendor DR provisions and SLAs."</a:t>
-            </a:r>
-          </a:p>
-          <a:p>
-            <a:r>
-              <a:t>Steps (put on the board):</a:t>
-            </a:r>
-          </a:p>
-          <a:p>
-            <a:r>
-              <a:t>1. From the brief, list the DR requirements per business need — each stated so it can be TESTED (a measurable target, a named stakeholder).</a:t>
-            </a:r>
-          </a:p>
-          <a:p>
-            <a:r>
-              <a:t>2. Record the current recovery arrangements — what's in place and its gaps.</a:t>
-            </a:r>
-          </a:p>
-          <a:p>
-            <a:r>
-              <a:t>3. Note the vendor's DR provisions/SLAs — what's guaranteed vs what you must add.</a:t>
-            </a:r>
-          </a:p>
-          <a:p>
-            <a:r>
-              <a:t>Must produce: a testable requirements list plus a short current-position note (existing arrangements + vendor SLAs).</a:t>
-            </a:r>
-          </a:p>
-          <a:p>
-            <a:r>
-              <a:t>Timing: ~20 min. Where they get stuck: they write vague requirements ("be reliable") — push measurable, testable statements; and they skip the vendor SLAs (remind them the plan builds on native durability).</a:t>
-            </a:r>
-          </a:p>
-          <a:p>
-            <a:r>
-              <a:t>Share-back prompt: "Give me one requirement and how you'd TEST a plan against it" — listen for testability.</a:t>
-            </a:r>
-          </a:p>
-          <a:p>
-            <a:r>
-              <a:t>No-leakage note: this runs on the PRACTICE scenario (comparable, not identical); AT1 evidences the same requirements-gathering skill on the assessed system — keep them on the practice brief.</a:t>
-            </a:r>
-          </a:p>
-          <a:p>
-            <a:r>
-              <a:t>UoC/AT1 tie: [ICTCLD501 PC 1.1] · [ICTCLD501 PC 1.2] · [ICTCLD501 PC 1.3] — the requirements + current-position pair that opens AT1 Part B.</a:t>
+              <a:t>Activity = practice workbook tasks 20–22.</a:t>
+            </a:r>
+          </a:p>
+          <a:p>
+            <a:r>
+              <a:t>The common misses: untestable requirements, and skipping the vendor SLAs entirely.</a:t>
             </a:r>
           </a:p>
         </p:txBody>
@@ -1471,42 +1279,12 @@
           <a:lstStyle/>
           <a:p>
             <a:r>
-              <a:t>The two most important terms in DR — teach RTO and RPO on the timeline diagram; students routinely confuse them, so nail the distinction with the picture.</a:t>
-            </a:r>
-          </a:p>
-          <a:p>
-            <a:r>
-              <a:t>• Use the diagram's timeline: the disaster is the point in the middle. RTO measures FORWARD (how long until service is back); RPO measures BACKWARD (how much recent data is lost between the last good copy and the disaster).</a:t>
-            </a:r>
-          </a:p>
-          <a:p>
-            <a:r>
-              <a:t>• RTO (first bullet): how long you can be DOWN before it hurts too much — a TIME target for restoration.</a:t>
-            </a:r>
-          </a:p>
-          <a:p>
-            <a:r>
-              <a:t>• RPO (second bullet): how much recent DATA you can afford to lose — a target for the gap back to the last recoverable point.</a:t>
-            </a:r>
-          </a:p>
-          <a:p>
-            <a:r>
-              <a:t>• Third bullet (accent it): both are BUSINESS decisions expressed as TIME; every DR choice traces back to them. The strategy in Topic 4 is chosen to hit these numbers.</a:t>
-            </a:r>
-          </a:p>
-          <a:p>
-            <a:r>
-              <a:t>Misconception to pre-empt: students swap them constantly. Anchor it: RTO = TIME to recover (forward); RPO = data you can lose (backward). Point at the two arrows on the diagram every time you say the words.</a:t>
-            </a:r>
-          </a:p>
-          <a:p>
-            <a:r>
-              <a:t>Question to pose: "A one-hour RPO — what does that actually mean happened to the last hour of data after a failure?" (up to an hour of the most recent data may be lost; backups/replication must be at least that frequent).</a:t>
-            </a:r>
-          </a:p>
-          <a:p>
-            <a:r>
-              <a:t>UoC/AT1 tie: [ICTCLD501 KE 5] (RTO/RPO standards and techniques) + [ICTCLD501 PC 2.1] (determine RTO/RPO to business needs) — AT1 Part B B3 and the KE appendix.</a:t>
+              <a:t>The two numbers everything downstream hangs off. Test the distinction with an example — "back in ten minutes but missing the last hour" is a good RTO and a poor RPO.</a:t>
+            </a:r>
+          </a:p>
+          <a:p>
+            <a:r>
+              <a:t>Tighter targets cost more; the trade-off is the teaching point.</a:t>
             </a:r>
           </a:p>
         </p:txBody>
@@ -1576,37 +1354,12 @@
           <a:lstStyle/>
           <a:p>
             <a:r>
-              <a:t>Apply RTO/RPO to THIS engagement — derive the numbers from the requirements, not from a wish for zero. This is where the concept becomes a design decision.</a:t>
-            </a:r>
-          </a:p>
-          <a:p>
-            <a:r>
-              <a:t>• First bullet: DERIVE RTO/RPO from the requirements — worked contrast: the enrolment FRONT DOOR tolerates little DOWNTIME (tight RTO); FINANCIAL RECORDS tolerate little DATA LOSS (tight RPO). Different systems, different pressures — set each independently.</a:t>
-            </a:r>
-          </a:p>
-          <a:p>
-            <a:r>
-              <a:t>• Second bullet: EXPLAIN each target by the business CONSEQUENCE it avoids — "RTO one hour because a longer outage loses enrolments during the campaign." The justification is assessable, not just the number.</a:t>
-            </a:r>
-          </a:p>
-          <a:p>
-            <a:r>
-              <a:t>• Third bullet (accent it): TIGHTER targets COST MORE — set them to the NEED, not the maximum. Everyone wants near-zero; the skill is matching the target to the tolerance, not gold-plating.</a:t>
-            </a:r>
-          </a:p>
-          <a:p>
-            <a:r>
-              <a:t>Misconception to pre-empt: "set RTO/RPO as low as possible to be safe." No — near-zero targets force expensive active-active designs; over-specifying is a marked-down failure to match need to cost.</a:t>
-            </a:r>
-          </a:p>
-          <a:p>
-            <a:r>
-              <a:t>Question to pose: "Why might the financial-records system have a TIGHT RPO but a LOOSER RTO than the public front door?" (losing financial data is intolerable; being briefly offline is survivable — the two objectives decouple).</a:t>
-            </a:r>
-          </a:p>
-          <a:p>
-            <a:r>
-              <a:t>UoC/AT1 tie: [ICTCLD501 PC 2.1] (determine and explain RTO/RPO to business needs) — AT1 Part B B3; the explanation is what earns the criterion.</a:t>
+              <a:t>Workbook task 23. The traceability is the mark: objective beside the business need that set it.</a:t>
+            </a:r>
+          </a:p>
+          <a:p>
+            <a:r>
+              <a:t>Push back on round numbers with no source — "why one hour and not four?"</a:t>
             </a:r>
           </a:p>
         </p:txBody>
@@ -1676,37 +1429,12 @@
           <a:lstStyle/>
           <a:p>
             <a:r>
-              <a:t>Teach the DATA-managed estimate — the second C2 output. Recovery is shaped by how much data there is and how sensitive it is.</a:t>
-            </a:r>
-          </a:p>
-          <a:p>
-            <a:r>
-              <a:t>• First bullet: ESTIMATE the amount of data the plan must protect and recover. Volume affects how long a restore takes — it feeds directly into whether an RTO is achievable.</a:t>
-            </a:r>
-          </a:p>
-          <a:p>
-            <a:r>
-              <a:t>• Second bullet: CLASSIFY its security level — personal, financial, operational — which drives HANDLING and RESIDENCY. India-cohort personal data carries residency obligations; classification isn't academic.</a:t>
-            </a:r>
-          </a:p>
-          <a:p>
-            <a:r>
-              <a:t>• Third bullet (accent it): VOLUME and SENSITIVITY shape both the RPO and the recovery METHOD — big/sensitive data changes both how recent your copy must be and where/how you're allowed to keep it.</a:t>
-            </a:r>
-          </a:p>
-          <a:p>
-            <a:r>
-              <a:t>Misconception to pre-empt: "the data estimate is just a size in GB." No — it's amount AND security level; the classification drives residency and handling rules that constrain the whole recovery method, not just storage cost.</a:t>
-            </a:r>
-          </a:p>
-          <a:p>
-            <a:r>
-              <a:t>Question to pose: "You have 2 TB of India-cohort personal data — name two things that estimate constrains in the plan." (restore time vs RTO, and where copies may legally live — residency).</a:t>
-            </a:r>
-          </a:p>
-          <a:p>
-            <a:r>
-              <a:t>UoC/AT1 tie: [ICTCLD501 PC 2.3] (estimate amount and security level of data managed) — AT1 Part B B4.</a:t>
+              <a:t>Workbook task 24 — the data inventory. Volume and growth turn an abstract plan into a sized one.</a:t>
+            </a:r>
+          </a:p>
+          <a:p>
+            <a:r>
+              <a:t>The "what state is it in" column surfaces the unprotected data — that's the finding.</a:t>
             </a:r>
           </a:p>
         </p:txBody>
@@ -1776,57 +1504,12 @@
           <a:lstStyle/>
           <a:p>
             <a:r>
-              <a:t>Facilitation — the C2 practice: set and EXPLAIN RTO/RPO and estimate the data on the PRACTICE scenario. Rehearses AT1 Part B B3–B4.</a:t>
-            </a:r>
-          </a:p>
-          <a:p>
-            <a:r>
-              <a:t>Tell students: "For the practice scenario, determine RTO and RPO for the critical systems and EXPLAIN each to the business need. Then estimate the amount and security level of the data the plan manages."</a:t>
-            </a:r>
-          </a:p>
-          <a:p>
-            <a:r>
-              <a:t>Steps (put on the board):</a:t>
-            </a:r>
-          </a:p>
-          <a:p>
-            <a:r>
-              <a:t>1. For each critical system, set an RTO and an RPO — and write the business consequence each target avoids.</a:t>
-            </a:r>
-          </a:p>
-          <a:p>
-            <a:r>
-              <a:t>2. Match the target to the need — don't default to near-zero; note the cost trade-off.</a:t>
-            </a:r>
-          </a:p>
-          <a:p>
-            <a:r>
-              <a:t>3. Estimate the data managed: amount, and security classification (personal/financial/operational) with its residency implication.</a:t>
-            </a:r>
-          </a:p>
-          <a:p>
-            <a:r>
-              <a:t>Must produce: RTO/RPO per critical system WITH explanations, plus a data estimate (amount + classification).</a:t>
-            </a:r>
-          </a:p>
-          <a:p>
-            <a:r>
-              <a:t>Timing: ~20 min. Where they get stuck: they give numbers with no justification (the explanation is the mark), and they set everything to near-zero (push them to match target to tolerance and note cost).</a:t>
-            </a:r>
-          </a:p>
-          <a:p>
-            <a:r>
-              <a:t>Share-back prompt: "Give me one RTO and the business consequence it's set to avoid" — listen for the justification, not just the number.</a:t>
-            </a:r>
-          </a:p>
-          <a:p>
-            <a:r>
-              <a:t>No-leakage note: practice scenario only (comparable, not identical); AT1 evidences the same objectives-and-data skill on the assessed system — keep them on the practice brief.</a:t>
-            </a:r>
-          </a:p>
-          <a:p>
-            <a:r>
-              <a:t>UoC/AT1 tie: [ICTCLD501 PC 2.1] · [ICTCLD501 PC 2.3] · [ICTCLD501 KE 5] — recovery objectives + data managed (AT1 Part B B3–B4).</a:t>
+              <a:t>Activity = practice workbook tasks 23–24.</a:t>
+            </a:r>
+          </a:p>
+          <a:p>
+            <a:r>
+              <a:t>Insist every objective cites the business need that set it.</a:t>
             </a:r>
           </a:p>
         </p:txBody>
@@ -5048,7 +4731,7 @@
                 </a:solidFill>
                 <a:latin typeface="Roboto"/>
               </a:rPr>
-              <a:t>Set the objectives to business needs</a:t>
+              <a:t>RTO and RPO</a:t>
             </a:r>
           </a:p>
         </p:txBody>
@@ -5105,8 +4788,8 @@
         </p:nvSpPr>
         <p:spPr>
           <a:xfrm>
-            <a:off x="658368" y="1691640"/>
-            <a:ext cx="10881360" cy="4480560"/>
+            <a:off x="658368" y="1737360"/>
+            <a:ext cx="5486400" cy="4297680"/>
           </a:xfrm>
           <a:prstGeom prst="rect">
             <a:avLst/>
@@ -5114,7 +4797,7 @@
           <a:noFill/>
         </p:spPr>
         <p:txBody>
-          <a:bodyPr wrap="square" anchor="ctr" lIns="0" rIns="0" tIns="0" bIns="0">
+          <a:bodyPr wrap="square" anchor="t" lIns="0" rIns="0" tIns="0" bIns="0">
             <a:spAutoFit/>
           </a:bodyPr>
           <a:lstStyle/>
@@ -5131,7 +4814,7 @@
               </a:spcAft>
             </a:pPr>
             <a:r>
-              <a:rPr sz="2400" b="1" i="0">
+              <a:rPr sz="1700" b="1" i="0">
                 <a:solidFill>
                   <a:srgbClr val="EDAB0C"/>
                 </a:solidFill>
@@ -5140,13 +4823,13 @@
               <a:t>■  </a:t>
             </a:r>
             <a:r>
-              <a:rPr sz="2400" b="0" i="0">
+              <a:rPr sz="1700" b="0" i="0">
                 <a:solidFill>
                   <a:srgbClr val="2A2929"/>
                 </a:solidFill>
                 <a:latin typeface="Roboto"/>
               </a:rPr>
-              <a:t>Derive RTO/RPO from the requirements — the front door tolerates little downtime; financial records tolerate little data loss.</a:t>
+              <a:t>Recovery Time Objective: how long until service is back.</a:t>
             </a:r>
           </a:p>
           <a:p>
@@ -5162,7 +4845,7 @@
               </a:spcAft>
             </a:pPr>
             <a:r>
-              <a:rPr sz="2400" b="1" i="0">
+              <a:rPr sz="1700" b="1" i="0">
                 <a:solidFill>
                   <a:srgbClr val="EDAB0C"/>
                 </a:solidFill>
@@ -5171,13 +4854,13 @@
               <a:t>■  </a:t>
             </a:r>
             <a:r>
-              <a:rPr sz="2400" b="0" i="0">
+              <a:rPr sz="1700" b="0" i="0">
                 <a:solidFill>
                   <a:srgbClr val="2A2929"/>
                 </a:solidFill>
                 <a:latin typeface="Roboto"/>
               </a:rPr>
-              <a:t>Explain each: what business consequence the target avoids.</a:t>
+              <a:t>Recovery Point Objective: how much data you can afford to lose.</a:t>
             </a:r>
           </a:p>
           <a:p>
@@ -5193,7 +4876,7 @@
               </a:spcAft>
             </a:pPr>
             <a:r>
-              <a:rPr sz="2400" b="1" i="0">
+              <a:rPr sz="1700" b="1" i="0">
                 <a:solidFill>
                   <a:srgbClr val="EDAB0C"/>
                 </a:solidFill>
@@ -5202,20 +4885,44 @@
               <a:t>■  </a:t>
             </a:r>
             <a:r>
-              <a:rPr sz="2400" b="0" i="0">
+              <a:rPr sz="1700" b="0" i="0">
                 <a:solidFill>
                   <a:srgbClr val="2A2929"/>
                 </a:solidFill>
                 <a:latin typeface="Roboto"/>
               </a:rPr>
-              <a:t>Tighter targets cost more — set them to the need, not to the maximum.</a:t>
-            </a:r>
-          </a:p>
-        </p:txBody>
-      </p:sp>
-      <p:sp>
-        <p:nvSpPr>
-          <p:cNvPr id="5" name="Rectangle 4"/>
+              <a:t>Two different clocks — a system can be back fast yet have lost hours of data, or the reverse.</a:t>
+            </a:r>
+          </a:p>
+        </p:txBody>
+      </p:sp>
+      <p:pic>
+        <p:nvPicPr>
+          <p:cNvPr id="5" name="Picture 4" descr="rto-rpo-timeline.png"/>
+          <p:cNvPicPr>
+            <a:picLocks noChangeAspect="1"/>
+          </p:cNvPicPr>
+          <p:nvPr/>
+        </p:nvPicPr>
+        <p:blipFill>
+          <a:blip r:embed="rId2"/>
+          <a:stretch>
+            <a:fillRect/>
+          </a:stretch>
+        </p:blipFill>
+        <p:spPr>
+          <a:xfrm>
+            <a:off x="6400800" y="3337560"/>
+            <a:ext cx="5120640" cy="914400"/>
+          </a:xfrm>
+          <a:prstGeom prst="rect">
+            <a:avLst/>
+          </a:prstGeom>
+        </p:spPr>
+      </p:pic>
+      <p:sp>
+        <p:nvSpPr>
+          <p:cNvPr id="6" name="Rectangle 5"/>
           <p:cNvSpPr/>
           <p:nvPr/>
         </p:nvSpPr>
@@ -5259,7 +4966,7 @@
       </p:sp>
       <p:sp>
         <p:nvSpPr>
-          <p:cNvPr id="6" name="TextBox 5"/>
+          <p:cNvPr id="7" name="TextBox 6"/>
           <p:cNvSpPr txBox="1"/>
           <p:nvPr/>
         </p:nvSpPr>
@@ -5302,7 +5009,7 @@
       </p:sp>
       <p:sp>
         <p:nvSpPr>
-          <p:cNvPr id="7" name="TextBox 6"/>
+          <p:cNvPr id="8" name="TextBox 7"/>
           <p:cNvSpPr txBox="1"/>
           <p:nvPr/>
         </p:nvSpPr>
@@ -5390,7 +5097,7 @@
                 </a:solidFill>
                 <a:latin typeface="Roboto"/>
               </a:rPr>
-              <a:t>Estimate the data managed</a:t>
+              <a:t>Set the objectives to business needs</a:t>
             </a:r>
           </a:p>
         </p:txBody>
@@ -5488,7 +5195,7 @@
                 </a:solidFill>
                 <a:latin typeface="Roboto"/>
               </a:rPr>
-              <a:t>Estimate the amount of data the plan must protect and recover.</a:t>
+              <a:t>Each objective comes from a business tolerance, not from what the technology happens to offer.</a:t>
             </a:r>
           </a:p>
           <a:p>
@@ -5519,7 +5226,7 @@
                 </a:solidFill>
                 <a:latin typeface="Roboto"/>
               </a:rPr>
-              <a:t>Classify its security level — personal, financial, operational — which drives handling and residency.</a:t>
+              <a:t>Different systems get different objectives — one blanket target over-spends on some and under-protects others.</a:t>
             </a:r>
           </a:p>
           <a:p>
@@ -5550,7 +5257,7 @@
                 </a:solidFill>
                 <a:latin typeface="Roboto"/>
               </a:rPr>
-              <a:t>The volume and sensitivity shape both RPO and the recovery method.</a:t>
+              <a:t>Write the objective next to the requirement that produced it.</a:t>
             </a:r>
           </a:p>
         </p:txBody>
@@ -5705,14 +5412,48 @@
       <p:grpSpPr/>
       <p:sp>
         <p:nvSpPr>
-          <p:cNvPr id="2" name="Rectangle 1"/>
+          <p:cNvPr id="2" name="TextBox 1"/>
+          <p:cNvSpPr txBox="1"/>
+          <p:nvPr/>
+        </p:nvSpPr>
+        <p:spPr>
+          <a:xfrm>
+            <a:off x="640080" y="457200"/>
+            <a:ext cx="10881360" cy="960120"/>
+          </a:xfrm>
+          <a:prstGeom prst="rect">
+            <a:avLst/>
+          </a:prstGeom>
+          <a:noFill/>
+        </p:spPr>
+        <p:txBody>
+          <a:bodyPr wrap="square" anchor="t" lIns="0" rIns="0" tIns="0" bIns="0">
+            <a:spAutoFit/>
+          </a:bodyPr>
+          <a:lstStyle/>
+          <a:p>
+            <a:r>
+              <a:rPr sz="2800" b="1" i="0">
+                <a:solidFill>
+                  <a:srgbClr val="2A2929"/>
+                </a:solidFill>
+                <a:latin typeface="Roboto"/>
+              </a:rPr>
+              <a:t>Estimate the data you are protecting</a:t>
+            </a:r>
+          </a:p>
+        </p:txBody>
+      </p:sp>
+      <p:sp>
+        <p:nvSpPr>
+          <p:cNvPr id="3" name="Rectangle 2"/>
           <p:cNvSpPr/>
           <p:nvPr/>
         </p:nvSpPr>
         <p:spPr>
           <a:xfrm>
-            <a:off x="0" y="0"/>
-            <a:ext cx="12191695" cy="1234440"/>
+            <a:off x="658368" y="1371600"/>
+            <a:ext cx="1463040" cy="50800"/>
           </a:xfrm>
           <a:prstGeom prst="rect">
             <a:avLst/>
@@ -5749,67 +5490,14 @@
       </p:sp>
       <p:sp>
         <p:nvSpPr>
-          <p:cNvPr id="3" name="Rounded Rectangle 2"/>
-          <p:cNvSpPr/>
-          <p:nvPr/>
-        </p:nvSpPr>
-        <p:spPr>
-          <a:xfrm>
-            <a:off x="640080" y="384048"/>
-            <a:ext cx="1691640" cy="457200"/>
-          </a:xfrm>
-          <a:prstGeom prst="roundRect">
-            <a:avLst/>
-          </a:prstGeom>
-          <a:solidFill>
-            <a:srgbClr val="2A2929"/>
-          </a:solidFill>
-          <a:ln>
-            <a:noFill/>
-          </a:ln>
-          <a:effectLst/>
-        </p:spPr>
-        <p:style>
-          <a:lnRef idx="1">
-            <a:schemeClr val="accent1"/>
-          </a:lnRef>
-          <a:fillRef idx="3">
-            <a:schemeClr val="accent1"/>
-          </a:fillRef>
-          <a:effectRef idx="2">
-            <a:schemeClr val="accent1"/>
-          </a:effectRef>
-          <a:fontRef idx="minor">
-            <a:schemeClr val="lt1"/>
-          </a:fontRef>
-        </p:style>
-        <p:txBody>
-          <a:bodyPr rtlCol="0" anchor="ctr"/>
-          <a:lstStyle/>
-          <a:p>
-            <a:pPr algn="ctr"/>
-            <a:r>
-              <a:rPr sz="1400" b="1" i="0">
-                <a:solidFill>
-                  <a:srgbClr val="FBB900"/>
-                </a:solidFill>
-                <a:latin typeface="Roboto"/>
-              </a:rPr>
-              <a:t>ACTIVITY</a:t>
-            </a:r>
-          </a:p>
-        </p:txBody>
-      </p:sp>
-      <p:sp>
-        <p:nvSpPr>
           <p:cNvPr id="4" name="TextBox 3"/>
           <p:cNvSpPr txBox="1"/>
           <p:nvPr/>
         </p:nvSpPr>
         <p:spPr>
           <a:xfrm>
-            <a:off x="2560320" y="310896"/>
-            <a:ext cx="8961120" cy="685800"/>
+            <a:off x="658368" y="1691640"/>
+            <a:ext cx="10881360" cy="4480560"/>
           </a:xfrm>
           <a:prstGeom prst="rect">
             <a:avLst/>
@@ -5818,40 +5506,6 @@
         </p:spPr>
         <p:txBody>
           <a:bodyPr wrap="square" anchor="ctr" lIns="0" rIns="0" tIns="0" bIns="0">
-            <a:spAutoFit/>
-          </a:bodyPr>
-          <a:lstStyle/>
-          <a:p>
-            <a:r>
-              <a:rPr sz="2600" b="1" i="0">
-                <a:solidFill>
-                  <a:srgbClr val="FFFFFF"/>
-                </a:solidFill>
-                <a:latin typeface="Roboto"/>
-              </a:rPr>
-              <a:t>Determine RTO/RPO &amp; data managed</a:t>
-            </a:r>
-          </a:p>
-        </p:txBody>
-      </p:sp>
-      <p:sp>
-        <p:nvSpPr>
-          <p:cNvPr id="5" name="TextBox 4"/>
-          <p:cNvSpPr txBox="1"/>
-          <p:nvPr/>
-        </p:nvSpPr>
-        <p:spPr>
-          <a:xfrm>
-            <a:off x="658368" y="1554480"/>
-            <a:ext cx="10881360" cy="4297680"/>
-          </a:xfrm>
-          <a:prstGeom prst="rect">
-            <a:avLst/>
-          </a:prstGeom>
-          <a:noFill/>
-        </p:spPr>
-        <p:txBody>
-          <a:bodyPr wrap="square" anchor="t" lIns="0" rIns="0" tIns="0" bIns="0">
             <a:spAutoFit/>
           </a:bodyPr>
           <a:lstStyle/>
@@ -5868,7 +5522,7 @@
               </a:spcAft>
             </a:pPr>
             <a:r>
-              <a:rPr sz="1700" b="1" i="0">
+              <a:rPr sz="2400" b="1" i="0">
                 <a:solidFill>
                   <a:srgbClr val="EDAB0C"/>
                 </a:solidFill>
@@ -5877,13 +5531,13 @@
               <a:t>■  </a:t>
             </a:r>
             <a:r>
-              <a:rPr sz="1700" b="0" i="0">
+              <a:rPr sz="2400" b="0" i="0">
                 <a:solidFill>
                   <a:srgbClr val="2A2929"/>
                 </a:solidFill>
                 <a:latin typeface="Roboto"/>
               </a:rPr>
-              <a:t>For the practice scenario, determine and explain RTO and RPO to the business needs.</a:t>
+              <a:t>What data, how much of it, and how fast it grows — the plan protects a quantity, not an idea.</a:t>
             </a:r>
           </a:p>
           <a:p>
@@ -5899,7 +5553,7 @@
               </a:spcAft>
             </a:pPr>
             <a:r>
-              <a:rPr sz="1700" b="1" i="0">
+              <a:rPr sz="2400" b="1" i="0">
                 <a:solidFill>
                   <a:srgbClr val="EDAB0C"/>
                 </a:solidFill>
@@ -5908,100 +5562,51 @@
               <a:t>■  </a:t>
             </a:r>
             <a:r>
-              <a:rPr sz="1700" b="0" i="0">
+              <a:rPr sz="2400" b="0" i="0">
                 <a:solidFill>
                   <a:srgbClr val="2A2929"/>
                 </a:solidFill>
                 <a:latin typeface="Roboto"/>
               </a:rPr>
-              <a:t>Estimate the amount and security level of the data managed.</a:t>
-            </a:r>
-          </a:p>
-        </p:txBody>
-      </p:sp>
-      <p:sp>
-        <p:nvSpPr>
-          <p:cNvPr id="6" name="Rounded Rectangle 5"/>
-          <p:cNvSpPr/>
-          <p:nvPr/>
-        </p:nvSpPr>
-        <p:spPr>
-          <a:xfrm>
-            <a:off x="640080" y="5897880"/>
-            <a:ext cx="4023360" cy="457200"/>
-          </a:xfrm>
-          <a:prstGeom prst="roundRect">
-            <a:avLst/>
-          </a:prstGeom>
-          <a:solidFill>
-            <a:srgbClr val="F9F9F9"/>
-          </a:solidFill>
-          <a:ln w="12700">
-            <a:solidFill>
-              <a:srgbClr val="CCCCCC"/>
-            </a:solidFill>
-          </a:ln>
-          <a:effectLst/>
-        </p:spPr>
-        <p:style>
-          <a:lnRef idx="1">
-            <a:schemeClr val="accent1"/>
-          </a:lnRef>
-          <a:fillRef idx="3">
-            <a:schemeClr val="accent1"/>
-          </a:fillRef>
-          <a:effectRef idx="2">
-            <a:schemeClr val="accent1"/>
-          </a:effectRef>
-          <a:fontRef idx="minor">
-            <a:schemeClr val="lt1"/>
-          </a:fontRef>
-        </p:style>
-        <p:txBody>
-          <a:bodyPr rtlCol="0" anchor="ctr"/>
-          <a:lstStyle/>
-          <a:p>
-            <a:pPr algn="ctr"/>
-          </a:p>
-        </p:txBody>
-      </p:sp>
-      <p:sp>
-        <p:nvSpPr>
-          <p:cNvPr id="7" name="TextBox 6"/>
-          <p:cNvSpPr txBox="1"/>
-          <p:nvPr/>
-        </p:nvSpPr>
-        <p:spPr>
-          <a:xfrm>
-            <a:off x="822960" y="5943600"/>
-            <a:ext cx="3657600" cy="365760"/>
-          </a:xfrm>
-          <a:prstGeom prst="rect">
-            <a:avLst/>
-          </a:prstGeom>
-          <a:noFill/>
-        </p:spPr>
-        <p:txBody>
-          <a:bodyPr wrap="square" anchor="ctr" lIns="0" rIns="0" tIns="0" bIns="0">
-            <a:spAutoFit/>
-          </a:bodyPr>
-          <a:lstStyle/>
-          <a:p>
-            <a:r>
-              <a:rPr sz="1500" b="1" i="0">
+              <a:t>Where it lives, and what state it is in: live, backed up, replicated, or none of these.</a:t>
+            </a:r>
+          </a:p>
+          <a:p>
+            <a:pPr marL="0" indent="0">
+              <a:lnSpc>
+                <a:spcPct val="105000"/>
+              </a:lnSpc>
+              <a:spcBef>
+                <a:spcPts val="0"/>
+              </a:spcBef>
+              <a:spcAft>
+                <a:spcPts val="1000"/>
+              </a:spcAft>
+            </a:pPr>
+            <a:r>
+              <a:rPr sz="2400" b="1" i="0">
+                <a:solidFill>
+                  <a:srgbClr val="EDAB0C"/>
+                </a:solidFill>
+                <a:latin typeface="Roboto"/>
+              </a:rPr>
+              <a:t>■  </a:t>
+            </a:r>
+            <a:r>
+              <a:rPr sz="2400" b="0" i="0">
                 <a:solidFill>
                   <a:srgbClr val="2A2929"/>
                 </a:solidFill>
                 <a:latin typeface="Roboto"/>
               </a:rPr>
-              <a:t>⏱  ~20 min</a:t>
-            </a:r>
-          </a:p>
-        </p:txBody>
-      </p:sp>
-      <p:sp>
-        <p:nvSpPr>
-          <p:cNvPr id="8" name="Rectangle 7"/>
+              <a:t>The estimate sizes the recovery: restoring a gigabyte and a terabyte are different plans.</a:t>
+            </a:r>
+          </a:p>
+        </p:txBody>
+      </p:sp>
+      <p:sp>
+        <p:nvSpPr>
+          <p:cNvPr id="5" name="Rectangle 4"/>
           <p:cNvSpPr/>
           <p:nvPr/>
         </p:nvSpPr>
@@ -6045,7 +5650,7 @@
       </p:sp>
       <p:sp>
         <p:nvSpPr>
-          <p:cNvPr id="9" name="TextBox 8"/>
+          <p:cNvPr id="6" name="TextBox 5"/>
           <p:cNvSpPr txBox="1"/>
           <p:nvPr/>
         </p:nvSpPr>
@@ -6088,7 +5693,7 @@
       </p:sp>
       <p:sp>
         <p:nvSpPr>
-          <p:cNvPr id="10" name="TextBox 9"/>
+          <p:cNvPr id="7" name="TextBox 6"/>
           <p:cNvSpPr txBox="1"/>
           <p:nvPr/>
         </p:nvSpPr>
@@ -6156,13 +5761,13 @@
         <p:spPr>
           <a:xfrm>
             <a:off x="0" y="0"/>
-            <a:ext cx="3931920" cy="6858000"/>
+            <a:ext cx="12191695" cy="1234440"/>
           </a:xfrm>
           <a:prstGeom prst="rect">
             <a:avLst/>
           </a:prstGeom>
           <a:solidFill>
-            <a:srgbClr val="205F61"/>
+            <a:srgbClr val="27B5CE"/>
           </a:solidFill>
           <a:ln>
             <a:noFill/>
@@ -6193,120 +5798,20 @@
       </p:sp>
       <p:sp>
         <p:nvSpPr>
-          <p:cNvPr id="3" name="TextBox 2"/>
-          <p:cNvSpPr txBox="1"/>
-          <p:nvPr/>
-        </p:nvSpPr>
-        <p:spPr>
-          <a:xfrm>
-            <a:off x="365760" y="2103120"/>
-            <a:ext cx="3291840" cy="2194560"/>
-          </a:xfrm>
-          <a:prstGeom prst="rect">
-            <a:avLst/>
-          </a:prstGeom>
-          <a:noFill/>
-        </p:spPr>
-        <p:txBody>
-          <a:bodyPr wrap="square" anchor="t" lIns="0" rIns="0" tIns="0" bIns="0">
-            <a:spAutoFit/>
-          </a:bodyPr>
-          <a:lstStyle/>
-          <a:p>
-            <a:r>
-              <a:rPr sz="13000" b="1" i="0">
-                <a:solidFill>
-                  <a:srgbClr val="FFFFFF"/>
-                </a:solidFill>
-                <a:latin typeface="Roboto"/>
-              </a:rPr>
-              <a:t>03</a:t>
-            </a:r>
-          </a:p>
-        </p:txBody>
-      </p:sp>
-      <p:sp>
-        <p:nvSpPr>
-          <p:cNvPr id="4" name="TextBox 3"/>
-          <p:cNvSpPr txBox="1"/>
-          <p:nvPr/>
-        </p:nvSpPr>
-        <p:spPr>
-          <a:xfrm>
-            <a:off x="4480560" y="2468880"/>
-            <a:ext cx="7132320" cy="2194560"/>
-          </a:xfrm>
-          <a:prstGeom prst="rect">
-            <a:avLst/>
-          </a:prstGeom>
-          <a:noFill/>
-        </p:spPr>
-        <p:txBody>
-          <a:bodyPr wrap="square" anchor="t" lIns="0" rIns="0" tIns="0" bIns="0">
-            <a:spAutoFit/>
-          </a:bodyPr>
-          <a:lstStyle/>
-          <a:p>
-            <a:r>
-              <a:rPr sz="1600" b="1" i="0">
-                <a:solidFill>
-                  <a:srgbClr val="205F61"/>
-                </a:solidFill>
-                <a:latin typeface="Roboto"/>
-              </a:rPr>
-              <a:t>SECTION</a:t>
-            </a:r>
-          </a:p>
-          <a:p>
-            <a:pPr>
-              <a:spcBef>
-                <a:spcPts val="600"/>
-              </a:spcBef>
-            </a:pPr>
-            <a:r>
-              <a:rPr sz="3800" b="1" i="0">
-                <a:solidFill>
-                  <a:srgbClr val="2A2929"/>
-                </a:solidFill>
-                <a:latin typeface="Roboto"/>
-              </a:rPr>
-              <a:t>Risk &amp; impact analysis</a:t>
-            </a:r>
-          </a:p>
-          <a:p>
-            <a:pPr>
-              <a:spcBef>
-                <a:spcPts val="1000"/>
-              </a:spcBef>
-            </a:pPr>
-            <a:r>
-              <a:rPr sz="2000" b="0" i="1">
-                <a:solidFill>
-                  <a:srgbClr val="484848"/>
-                </a:solidFill>
-                <a:latin typeface="Roboto Light"/>
-              </a:rPr>
-              <a:t>likelihood times impact equals severity</a:t>
-            </a:r>
-          </a:p>
-        </p:txBody>
-      </p:sp>
-      <p:sp>
-        <p:nvSpPr>
-          <p:cNvPr id="5" name="Rectangle 4"/>
+          <p:cNvPr id="3" name="Rounded Rectangle 2"/>
           <p:cNvSpPr/>
           <p:nvPr/>
         </p:nvSpPr>
         <p:spPr>
           <a:xfrm>
-            <a:off x="0" y="6565392"/>
-            <a:ext cx="12191695" cy="38100"/>
-          </a:xfrm>
-          <a:prstGeom prst="rect">
+            <a:off x="640080" y="384048"/>
+            <a:ext cx="1691640" cy="457200"/>
+          </a:xfrm>
+          <a:prstGeom prst="roundRect">
             <a:avLst/>
           </a:prstGeom>
           <a:solidFill>
-            <a:srgbClr val="205F61"/>
+            <a:srgbClr val="2A2929"/>
           </a:solidFill>
           <a:ln>
             <a:noFill/>
@@ -6332,19 +5837,62 @@
           <a:lstStyle/>
           <a:p>
             <a:pPr algn="ctr"/>
-          </a:p>
-        </p:txBody>
-      </p:sp>
-      <p:sp>
-        <p:nvSpPr>
-          <p:cNvPr id="6" name="TextBox 5"/>
+            <a:r>
+              <a:rPr sz="1400" b="1" i="0">
+                <a:solidFill>
+                  <a:srgbClr val="FBB900"/>
+                </a:solidFill>
+                <a:latin typeface="Roboto"/>
+              </a:rPr>
+              <a:t>ACTIVITY</a:t>
+            </a:r>
+          </a:p>
+        </p:txBody>
+      </p:sp>
+      <p:sp>
+        <p:nvSpPr>
+          <p:cNvPr id="4" name="TextBox 3"/>
           <p:cNvSpPr txBox="1"/>
           <p:nvPr/>
         </p:nvSpPr>
         <p:spPr>
           <a:xfrm>
-            <a:off x="502920" y="6400800"/>
-            <a:ext cx="5486400" cy="320040"/>
+            <a:off x="2560320" y="310896"/>
+            <a:ext cx="8961120" cy="685800"/>
+          </a:xfrm>
+          <a:prstGeom prst="rect">
+            <a:avLst/>
+          </a:prstGeom>
+          <a:noFill/>
+        </p:spPr>
+        <p:txBody>
+          <a:bodyPr wrap="square" anchor="ctr" lIns="0" rIns="0" tIns="0" bIns="0">
+            <a:spAutoFit/>
+          </a:bodyPr>
+          <a:lstStyle/>
+          <a:p>
+            <a:r>
+              <a:rPr sz="2600" b="1" i="0">
+                <a:solidFill>
+                  <a:srgbClr val="FFFFFF"/>
+                </a:solidFill>
+                <a:latin typeface="Roboto"/>
+              </a:rPr>
+              <a:t>Objectives and data</a:t>
+            </a:r>
+          </a:p>
+        </p:txBody>
+      </p:sp>
+      <p:sp>
+        <p:nvSpPr>
+          <p:cNvPr id="5" name="TextBox 4"/>
+          <p:cNvSpPr txBox="1"/>
+          <p:nvPr/>
+        </p:nvSpPr>
+        <p:spPr>
+          <a:xfrm>
+            <a:off x="658368" y="1554480"/>
+            <a:ext cx="10881360" cy="4297680"/>
           </a:xfrm>
           <a:prstGeom prst="rect">
             <a:avLst/>
@@ -6357,24 +5905,112 @@
           </a:bodyPr>
           <a:lstStyle/>
           <a:p>
-            <a:r>
-              <a:rPr sz="1100" b="1" i="0">
+            <a:pPr marL="0" indent="0">
+              <a:lnSpc>
+                <a:spcPct val="105000"/>
+              </a:lnSpc>
+              <a:spcBef>
+                <a:spcPts val="0"/>
+              </a:spcBef>
+              <a:spcAft>
+                <a:spcPts val="1000"/>
+              </a:spcAft>
+            </a:pPr>
+            <a:r>
+              <a:rPr sz="1700" b="1" i="0">
+                <a:solidFill>
+                  <a:srgbClr val="EDAB0C"/>
+                </a:solidFill>
+                <a:latin typeface="Roboto"/>
+              </a:rPr>
+              <a:t>■  </a:t>
+            </a:r>
+            <a:r>
+              <a:rPr sz="1700" b="0" i="0">
                 <a:solidFill>
                   <a:srgbClr val="2A2929"/>
                 </a:solidFill>
                 <a:latin typeface="Roboto"/>
               </a:rPr>
-              <a:t>Kangan </a:t>
-            </a:r>
-            <a:r>
-              <a:rPr sz="1100" b="1" i="0">
-                <a:solidFill>
-                  <a:srgbClr val="D68E10"/>
-                </a:solidFill>
-                <a:latin typeface="Roboto"/>
-              </a:rPr>
-              <a:t>Institute</a:t>
-            </a:r>
+              <a:t>Workbook — tasks 23 and 24.</a:t>
+            </a:r>
+          </a:p>
+          <a:p>
+            <a:pPr marL="0" indent="0">
+              <a:lnSpc>
+                <a:spcPct val="105000"/>
+              </a:lnSpc>
+              <a:spcBef>
+                <a:spcPts val="0"/>
+              </a:spcBef>
+              <a:spcAft>
+                <a:spcPts val="1000"/>
+              </a:spcAft>
+            </a:pPr>
+            <a:r>
+              <a:rPr sz="1700" b="1" i="0">
+                <a:solidFill>
+                  <a:srgbClr val="EDAB0C"/>
+                </a:solidFill>
+                <a:latin typeface="Roboto"/>
+              </a:rPr>
+              <a:t>■  </a:t>
+            </a:r>
+            <a:r>
+              <a:rPr sz="1700" b="0" i="0">
+                <a:solidFill>
+                  <a:srgbClr val="2A2929"/>
+                </a:solidFill>
+                <a:latin typeface="Roboto"/>
+              </a:rPr>
+              <a:t>Set the recovery objectives against the business needs, then estimate the data being protected — what, how much, where, and its current state.</a:t>
+            </a:r>
+          </a:p>
+        </p:txBody>
+      </p:sp>
+      <p:sp>
+        <p:nvSpPr>
+          <p:cNvPr id="6" name="Rounded Rectangle 5"/>
+          <p:cNvSpPr/>
+          <p:nvPr/>
+        </p:nvSpPr>
+        <p:spPr>
+          <a:xfrm>
+            <a:off x="640080" y="5897880"/>
+            <a:ext cx="4023360" cy="457200"/>
+          </a:xfrm>
+          <a:prstGeom prst="roundRect">
+            <a:avLst/>
+          </a:prstGeom>
+          <a:solidFill>
+            <a:srgbClr val="F9F9F9"/>
+          </a:solidFill>
+          <a:ln w="12700">
+            <a:solidFill>
+              <a:srgbClr val="CCCCCC"/>
+            </a:solidFill>
+          </a:ln>
+          <a:effectLst/>
+        </p:spPr>
+        <p:style>
+          <a:lnRef idx="1">
+            <a:schemeClr val="accent1"/>
+          </a:lnRef>
+          <a:fillRef idx="3">
+            <a:schemeClr val="accent1"/>
+          </a:fillRef>
+          <a:effectRef idx="2">
+            <a:schemeClr val="accent1"/>
+          </a:effectRef>
+          <a:fontRef idx="minor">
+            <a:schemeClr val="lt1"/>
+          </a:fontRef>
+        </p:style>
+        <p:txBody>
+          <a:bodyPr rtlCol="0" anchor="ctr"/>
+          <a:lstStyle/>
+          <a:p>
+            <a:pPr algn="ctr"/>
           </a:p>
         </p:txBody>
       </p:sp>
@@ -6386,8 +6022,86 @@
         </p:nvSpPr>
         <p:spPr>
           <a:xfrm>
-            <a:off x="10515600" y="6400800"/>
-            <a:ext cx="1188720" cy="320040"/>
+            <a:off x="822960" y="5943600"/>
+            <a:ext cx="3657600" cy="365760"/>
+          </a:xfrm>
+          <a:prstGeom prst="rect">
+            <a:avLst/>
+          </a:prstGeom>
+          <a:noFill/>
+        </p:spPr>
+        <p:txBody>
+          <a:bodyPr wrap="square" anchor="ctr" lIns="0" rIns="0" tIns="0" bIns="0">
+            <a:spAutoFit/>
+          </a:bodyPr>
+          <a:lstStyle/>
+          <a:p>
+            <a:r>
+              <a:rPr sz="1500" b="1" i="0">
+                <a:solidFill>
+                  <a:srgbClr val="2A2929"/>
+                </a:solidFill>
+                <a:latin typeface="Roboto"/>
+              </a:rPr>
+              <a:t>⏱  ~25 min</a:t>
+            </a:r>
+          </a:p>
+        </p:txBody>
+      </p:sp>
+      <p:sp>
+        <p:nvSpPr>
+          <p:cNvPr id="8" name="Rectangle 7"/>
+          <p:cNvSpPr/>
+          <p:nvPr/>
+        </p:nvSpPr>
+        <p:spPr>
+          <a:xfrm>
+            <a:off x="0" y="6565392"/>
+            <a:ext cx="12191695" cy="38100"/>
+          </a:xfrm>
+          <a:prstGeom prst="rect">
+            <a:avLst/>
+          </a:prstGeom>
+          <a:solidFill>
+            <a:srgbClr val="27B5CE"/>
+          </a:solidFill>
+          <a:ln>
+            <a:noFill/>
+          </a:ln>
+          <a:effectLst/>
+        </p:spPr>
+        <p:style>
+          <a:lnRef idx="1">
+            <a:schemeClr val="accent1"/>
+          </a:lnRef>
+          <a:fillRef idx="3">
+            <a:schemeClr val="accent1"/>
+          </a:fillRef>
+          <a:effectRef idx="2">
+            <a:schemeClr val="accent1"/>
+          </a:effectRef>
+          <a:fontRef idx="minor">
+            <a:schemeClr val="lt1"/>
+          </a:fontRef>
+        </p:style>
+        <p:txBody>
+          <a:bodyPr rtlCol="0" anchor="ctr"/>
+          <a:lstStyle/>
+          <a:p>
+            <a:pPr algn="ctr"/>
+          </a:p>
+        </p:txBody>
+      </p:sp>
+      <p:sp>
+        <p:nvSpPr>
+          <p:cNvPr id="9" name="TextBox 8"/>
+          <p:cNvSpPr txBox="1"/>
+          <p:nvPr/>
+        </p:nvSpPr>
+        <p:spPr>
+          <a:xfrm>
+            <a:off x="502920" y="6400800"/>
+            <a:ext cx="5486400" cy="320040"/>
           </a:xfrm>
           <a:prstGeom prst="rect">
             <a:avLst/>
@@ -6400,6 +6114,49 @@
           </a:bodyPr>
           <a:lstStyle/>
           <a:p>
+            <a:r>
+              <a:rPr sz="1100" b="1" i="0">
+                <a:solidFill>
+                  <a:srgbClr val="2A2929"/>
+                </a:solidFill>
+                <a:latin typeface="Roboto"/>
+              </a:rPr>
+              <a:t>Kangan </a:t>
+            </a:r>
+            <a:r>
+              <a:rPr sz="1100" b="1" i="0">
+                <a:solidFill>
+                  <a:srgbClr val="D68E10"/>
+                </a:solidFill>
+                <a:latin typeface="Roboto"/>
+              </a:rPr>
+              <a:t>Institute</a:t>
+            </a:r>
+          </a:p>
+        </p:txBody>
+      </p:sp>
+      <p:sp>
+        <p:nvSpPr>
+          <p:cNvPr id="10" name="TextBox 9"/>
+          <p:cNvSpPr txBox="1"/>
+          <p:nvPr/>
+        </p:nvSpPr>
+        <p:spPr>
+          <a:xfrm>
+            <a:off x="10515600" y="6400800"/>
+            <a:ext cx="1188720" cy="320040"/>
+          </a:xfrm>
+          <a:prstGeom prst="rect">
+            <a:avLst/>
+          </a:prstGeom>
+          <a:noFill/>
+        </p:spPr>
+        <p:txBody>
+          <a:bodyPr wrap="square" anchor="t" lIns="0" rIns="0" tIns="0" bIns="0">
+            <a:spAutoFit/>
+          </a:bodyPr>
+          <a:lstStyle/>
+          <a:p>
             <a:pPr algn="r"/>
             <a:r>
               <a:rPr sz="1100" b="0" i="0">
@@ -6408,7 +6165,7 @@
                 </a:solidFill>
                 <a:latin typeface="Roboto"/>
               </a:rPr>
-              <a:t/>
+              <a:t>10</a:t>
             </a:r>
           </a:p>
         </p:txBody>
@@ -6427,7 +6184,7 @@
     <p:bg>
       <p:bgPr>
         <a:solidFill>
-          <a:srgbClr val="FFFFFF"/>
+          <a:srgbClr val="F9F9F9"/>
         </a:solidFill>
         <a:effectLst/>
       </p:bgPr>
@@ -6447,8 +6204,8 @@
         </p:nvSpPr>
         <p:spPr>
           <a:xfrm>
-            <a:off x="640080" y="457200"/>
-            <a:ext cx="10881360" cy="960120"/>
+            <a:off x="640080" y="548640"/>
+            <a:ext cx="10881360" cy="1097280"/>
           </a:xfrm>
           <a:prstGeom prst="rect">
             <a:avLst/>
@@ -6462,13 +6219,29 @@
           <a:lstStyle/>
           <a:p>
             <a:r>
-              <a:rPr sz="2800" b="1" i="0">
+              <a:rPr sz="3200" b="1" i="0">
                 <a:solidFill>
                   <a:srgbClr val="2A2929"/>
                 </a:solidFill>
                 <a:latin typeface="Roboto"/>
               </a:rPr>
-              <a:t>The cloud risk environment &amp; analysis method</a:t>
+              <a:t>Key takeaways</a:t>
+            </a:r>
+          </a:p>
+          <a:p>
+            <a:pPr>
+              <a:spcBef>
+                <a:spcPts val="200"/>
+              </a:spcBef>
+            </a:pPr>
+            <a:r>
+              <a:rPr sz="1800" b="1" i="0">
+                <a:solidFill>
+                  <a:srgbClr val="27B5CE"/>
+                </a:solidFill>
+                <a:latin typeface="Roboto"/>
+              </a:rPr>
+              <a:t>Section 2 · The targets</a:t>
             </a:r>
           </a:p>
         </p:txBody>
@@ -6481,14 +6254,14 @@
         </p:nvSpPr>
         <p:spPr>
           <a:xfrm>
-            <a:off x="658368" y="1371600"/>
+            <a:off x="658368" y="1600200"/>
             <a:ext cx="1463040" cy="50800"/>
           </a:xfrm>
           <a:prstGeom prst="rect">
             <a:avLst/>
           </a:prstGeom>
           <a:solidFill>
-            <a:srgbClr val="205F61"/>
+            <a:srgbClr val="27B5CE"/>
           </a:solidFill>
           <a:ln>
             <a:noFill/>
@@ -6519,117 +6292,47 @@
       </p:sp>
       <p:sp>
         <p:nvSpPr>
-          <p:cNvPr id="4" name="TextBox 3"/>
-          <p:cNvSpPr txBox="1"/>
-          <p:nvPr/>
-        </p:nvSpPr>
-        <p:spPr>
-          <a:xfrm>
-            <a:off x="658368" y="1691640"/>
-            <a:ext cx="10881360" cy="4480560"/>
-          </a:xfrm>
-          <a:prstGeom prst="rect">
-            <a:avLst/>
-          </a:prstGeom>
-          <a:noFill/>
-        </p:spPr>
-        <p:txBody>
-          <a:bodyPr wrap="square" anchor="ctr" lIns="0" rIns="0" tIns="0" bIns="0">
-            <a:spAutoFit/>
-          </a:bodyPr>
-          <a:lstStyle/>
-          <a:p>
-            <a:pPr marL="0" indent="0">
-              <a:lnSpc>
-                <a:spcPct val="105000"/>
-              </a:lnSpc>
-              <a:spcBef>
-                <a:spcPts val="0"/>
-              </a:spcBef>
-              <a:spcAft>
-                <a:spcPts val="1000"/>
-              </a:spcAft>
-            </a:pPr>
-            <a:r>
-              <a:rPr sz="2400" b="1" i="0">
-                <a:solidFill>
-                  <a:srgbClr val="EDAB0C"/>
-                </a:solidFill>
-                <a:latin typeface="Roboto"/>
-              </a:rPr>
-              <a:t>■  </a:t>
-            </a:r>
-            <a:r>
-              <a:rPr sz="2400" b="0" i="0">
-                <a:solidFill>
-                  <a:srgbClr val="2A2929"/>
-                </a:solidFill>
-                <a:latin typeface="Roboto"/>
-              </a:rPr>
-              <a:t>The cloud risk environment: region/AZ outages, misconfiguration, dependency failure, human error, malicious action.</a:t>
-            </a:r>
-          </a:p>
-          <a:p>
-            <a:pPr marL="0" indent="0">
-              <a:lnSpc>
-                <a:spcPct val="105000"/>
-              </a:lnSpc>
-              <a:spcBef>
-                <a:spcPts val="0"/>
-              </a:spcBef>
-              <a:spcAft>
-                <a:spcPts val="1000"/>
-              </a:spcAft>
-            </a:pPr>
-            <a:r>
-              <a:rPr sz="2400" b="1" i="0">
-                <a:solidFill>
-                  <a:srgbClr val="EDAB0C"/>
-                </a:solidFill>
-                <a:latin typeface="Roboto"/>
-              </a:rPr>
-              <a:t>■  </a:t>
-            </a:r>
-            <a:r>
-              <a:rPr sz="2400" b="0" i="0">
-                <a:solidFill>
-                  <a:srgbClr val="2A2929"/>
-                </a:solidFill>
-                <a:latin typeface="Roboto"/>
-              </a:rPr>
-              <a:t>A data-analysis methodology turns those into a comparable picture — likelihood and impact scored consistently.</a:t>
-            </a:r>
-          </a:p>
-          <a:p>
-            <a:pPr marL="0" indent="0">
-              <a:lnSpc>
-                <a:spcPct val="105000"/>
-              </a:lnSpc>
-              <a:spcBef>
-                <a:spcPts val="0"/>
-              </a:spcBef>
-              <a:spcAft>
-                <a:spcPts val="1000"/>
-              </a:spcAft>
-            </a:pPr>
-            <a:r>
-              <a:rPr sz="2400" b="1" i="0">
-                <a:solidFill>
-                  <a:srgbClr val="EDAB0C"/>
-                </a:solidFill>
-                <a:latin typeface="Roboto"/>
-              </a:rPr>
-              <a:t>■  </a:t>
-            </a:r>
-            <a:r>
-              <a:rPr sz="2400" b="0" i="0">
-                <a:solidFill>
-                  <a:srgbClr val="2A2929"/>
-                </a:solidFill>
-                <a:latin typeface="Roboto"/>
-              </a:rPr>
-              <a:t>Risk analysis is systematic, not a guess: same scale for every event.</a:t>
-            </a:r>
+          <p:cNvPr id="4" name="Rectangle 3"/>
+          <p:cNvSpPr/>
+          <p:nvPr/>
+        </p:nvSpPr>
+        <p:spPr>
+          <a:xfrm>
+            <a:off x="640080" y="1965960"/>
+            <a:ext cx="10927080" cy="841248"/>
+          </a:xfrm>
+          <a:prstGeom prst="rect">
+            <a:avLst/>
+          </a:prstGeom>
+          <a:solidFill>
+            <a:srgbClr val="FFFFFF"/>
+          </a:solidFill>
+          <a:ln w="12700">
+            <a:solidFill>
+              <a:srgbClr val="CCCCCC"/>
+            </a:solidFill>
+          </a:ln>
+          <a:effectLst/>
+        </p:spPr>
+        <p:style>
+          <a:lnRef idx="1">
+            <a:schemeClr val="accent1"/>
+          </a:lnRef>
+          <a:fillRef idx="3">
+            <a:schemeClr val="accent1"/>
+          </a:fillRef>
+          <a:effectRef idx="2">
+            <a:schemeClr val="accent1"/>
+          </a:effectRef>
+          <a:fontRef idx="minor">
+            <a:schemeClr val="lt1"/>
+          </a:fontRef>
+        </p:style>
+        <p:txBody>
+          <a:bodyPr rtlCol="0" anchor="ctr"/>
+          <a:lstStyle/>
+          <a:p>
+            <a:pPr algn="ctr"/>
           </a:p>
         </p:txBody>
       </p:sp>
@@ -6641,14 +6344,14 @@
         </p:nvSpPr>
         <p:spPr>
           <a:xfrm>
-            <a:off x="0" y="6565392"/>
-            <a:ext cx="12191695" cy="38100"/>
+            <a:off x="640080" y="1965960"/>
+            <a:ext cx="109728" cy="841248"/>
           </a:xfrm>
           <a:prstGeom prst="rect">
             <a:avLst/>
           </a:prstGeom>
           <a:solidFill>
-            <a:srgbClr val="205F61"/>
+            <a:srgbClr val="27B5CE"/>
           </a:solidFill>
           <a:ln>
             <a:noFill/>
@@ -6685,6 +6388,347 @@
         </p:nvSpPr>
         <p:spPr>
           <a:xfrm>
+            <a:off x="960120" y="1965960"/>
+            <a:ext cx="10424160" cy="841248"/>
+          </a:xfrm>
+          <a:prstGeom prst="rect">
+            <a:avLst/>
+          </a:prstGeom>
+          <a:noFill/>
+        </p:spPr>
+        <p:txBody>
+          <a:bodyPr wrap="square" anchor="ctr" lIns="0" rIns="0" tIns="0" bIns="0">
+            <a:spAutoFit/>
+          </a:bodyPr>
+          <a:lstStyle/>
+          <a:p>
+            <a:pPr>
+              <a:lnSpc>
+                <a:spcPct val="100000"/>
+              </a:lnSpc>
+            </a:pPr>
+            <a:r>
+              <a:rPr sz="1700" b="0" i="0">
+                <a:solidFill>
+                  <a:srgbClr val="2A2929"/>
+                </a:solidFill>
+                <a:latin typeface="Roboto"/>
+              </a:rPr>
+              <a:t>RTO and RPO are two different clocks.</a:t>
+            </a:r>
+          </a:p>
+        </p:txBody>
+      </p:sp>
+      <p:sp>
+        <p:nvSpPr>
+          <p:cNvPr id="7" name="Rectangle 6"/>
+          <p:cNvSpPr/>
+          <p:nvPr/>
+        </p:nvSpPr>
+        <p:spPr>
+          <a:xfrm>
+            <a:off x="640080" y="2916936"/>
+            <a:ext cx="10927080" cy="841248"/>
+          </a:xfrm>
+          <a:prstGeom prst="rect">
+            <a:avLst/>
+          </a:prstGeom>
+          <a:solidFill>
+            <a:srgbClr val="FFFFFF"/>
+          </a:solidFill>
+          <a:ln w="12700">
+            <a:solidFill>
+              <a:srgbClr val="CCCCCC"/>
+            </a:solidFill>
+          </a:ln>
+          <a:effectLst/>
+        </p:spPr>
+        <p:style>
+          <a:lnRef idx="1">
+            <a:schemeClr val="accent1"/>
+          </a:lnRef>
+          <a:fillRef idx="3">
+            <a:schemeClr val="accent1"/>
+          </a:fillRef>
+          <a:effectRef idx="2">
+            <a:schemeClr val="accent1"/>
+          </a:effectRef>
+          <a:fontRef idx="minor">
+            <a:schemeClr val="lt1"/>
+          </a:fontRef>
+        </p:style>
+        <p:txBody>
+          <a:bodyPr rtlCol="0" anchor="ctr"/>
+          <a:lstStyle/>
+          <a:p>
+            <a:pPr algn="ctr"/>
+          </a:p>
+        </p:txBody>
+      </p:sp>
+      <p:sp>
+        <p:nvSpPr>
+          <p:cNvPr id="8" name="Rectangle 7"/>
+          <p:cNvSpPr/>
+          <p:nvPr/>
+        </p:nvSpPr>
+        <p:spPr>
+          <a:xfrm>
+            <a:off x="640080" y="2916936"/>
+            <a:ext cx="109728" cy="841248"/>
+          </a:xfrm>
+          <a:prstGeom prst="rect">
+            <a:avLst/>
+          </a:prstGeom>
+          <a:solidFill>
+            <a:srgbClr val="27B5CE"/>
+          </a:solidFill>
+          <a:ln>
+            <a:noFill/>
+          </a:ln>
+          <a:effectLst/>
+        </p:spPr>
+        <p:style>
+          <a:lnRef idx="1">
+            <a:schemeClr val="accent1"/>
+          </a:lnRef>
+          <a:fillRef idx="3">
+            <a:schemeClr val="accent1"/>
+          </a:fillRef>
+          <a:effectRef idx="2">
+            <a:schemeClr val="accent1"/>
+          </a:effectRef>
+          <a:fontRef idx="minor">
+            <a:schemeClr val="lt1"/>
+          </a:fontRef>
+        </p:style>
+        <p:txBody>
+          <a:bodyPr rtlCol="0" anchor="ctr"/>
+          <a:lstStyle/>
+          <a:p>
+            <a:pPr algn="ctr"/>
+          </a:p>
+        </p:txBody>
+      </p:sp>
+      <p:sp>
+        <p:nvSpPr>
+          <p:cNvPr id="9" name="TextBox 8"/>
+          <p:cNvSpPr txBox="1"/>
+          <p:nvPr/>
+        </p:nvSpPr>
+        <p:spPr>
+          <a:xfrm>
+            <a:off x="960120" y="2916936"/>
+            <a:ext cx="10424160" cy="841248"/>
+          </a:xfrm>
+          <a:prstGeom prst="rect">
+            <a:avLst/>
+          </a:prstGeom>
+          <a:noFill/>
+        </p:spPr>
+        <p:txBody>
+          <a:bodyPr wrap="square" anchor="ctr" lIns="0" rIns="0" tIns="0" bIns="0">
+            <a:spAutoFit/>
+          </a:bodyPr>
+          <a:lstStyle/>
+          <a:p>
+            <a:pPr>
+              <a:lnSpc>
+                <a:spcPct val="100000"/>
+              </a:lnSpc>
+            </a:pPr>
+            <a:r>
+              <a:rPr sz="1700" b="0" i="0">
+                <a:solidFill>
+                  <a:srgbClr val="2A2929"/>
+                </a:solidFill>
+                <a:latin typeface="Roboto"/>
+              </a:rPr>
+              <a:t>Objectives come from business tolerances, per system.</a:t>
+            </a:r>
+          </a:p>
+        </p:txBody>
+      </p:sp>
+      <p:sp>
+        <p:nvSpPr>
+          <p:cNvPr id="10" name="Rectangle 9"/>
+          <p:cNvSpPr/>
+          <p:nvPr/>
+        </p:nvSpPr>
+        <p:spPr>
+          <a:xfrm>
+            <a:off x="640080" y="3867912"/>
+            <a:ext cx="10927080" cy="841248"/>
+          </a:xfrm>
+          <a:prstGeom prst="rect">
+            <a:avLst/>
+          </a:prstGeom>
+          <a:solidFill>
+            <a:srgbClr val="FFFFFF"/>
+          </a:solidFill>
+          <a:ln w="12700">
+            <a:solidFill>
+              <a:srgbClr val="CCCCCC"/>
+            </a:solidFill>
+          </a:ln>
+          <a:effectLst/>
+        </p:spPr>
+        <p:style>
+          <a:lnRef idx="1">
+            <a:schemeClr val="accent1"/>
+          </a:lnRef>
+          <a:fillRef idx="3">
+            <a:schemeClr val="accent1"/>
+          </a:fillRef>
+          <a:effectRef idx="2">
+            <a:schemeClr val="accent1"/>
+          </a:effectRef>
+          <a:fontRef idx="minor">
+            <a:schemeClr val="lt1"/>
+          </a:fontRef>
+        </p:style>
+        <p:txBody>
+          <a:bodyPr rtlCol="0" anchor="ctr"/>
+          <a:lstStyle/>
+          <a:p>
+            <a:pPr algn="ctr"/>
+          </a:p>
+        </p:txBody>
+      </p:sp>
+      <p:sp>
+        <p:nvSpPr>
+          <p:cNvPr id="11" name="Rectangle 10"/>
+          <p:cNvSpPr/>
+          <p:nvPr/>
+        </p:nvSpPr>
+        <p:spPr>
+          <a:xfrm>
+            <a:off x="640080" y="3867912"/>
+            <a:ext cx="109728" cy="841248"/>
+          </a:xfrm>
+          <a:prstGeom prst="rect">
+            <a:avLst/>
+          </a:prstGeom>
+          <a:solidFill>
+            <a:srgbClr val="27B5CE"/>
+          </a:solidFill>
+          <a:ln>
+            <a:noFill/>
+          </a:ln>
+          <a:effectLst/>
+        </p:spPr>
+        <p:style>
+          <a:lnRef idx="1">
+            <a:schemeClr val="accent1"/>
+          </a:lnRef>
+          <a:fillRef idx="3">
+            <a:schemeClr val="accent1"/>
+          </a:fillRef>
+          <a:effectRef idx="2">
+            <a:schemeClr val="accent1"/>
+          </a:effectRef>
+          <a:fontRef idx="minor">
+            <a:schemeClr val="lt1"/>
+          </a:fontRef>
+        </p:style>
+        <p:txBody>
+          <a:bodyPr rtlCol="0" anchor="ctr"/>
+          <a:lstStyle/>
+          <a:p>
+            <a:pPr algn="ctr"/>
+          </a:p>
+        </p:txBody>
+      </p:sp>
+      <p:sp>
+        <p:nvSpPr>
+          <p:cNvPr id="12" name="TextBox 11"/>
+          <p:cNvSpPr txBox="1"/>
+          <p:nvPr/>
+        </p:nvSpPr>
+        <p:spPr>
+          <a:xfrm>
+            <a:off x="960120" y="3867912"/>
+            <a:ext cx="10424160" cy="841248"/>
+          </a:xfrm>
+          <a:prstGeom prst="rect">
+            <a:avLst/>
+          </a:prstGeom>
+          <a:noFill/>
+        </p:spPr>
+        <p:txBody>
+          <a:bodyPr wrap="square" anchor="ctr" lIns="0" rIns="0" tIns="0" bIns="0">
+            <a:spAutoFit/>
+          </a:bodyPr>
+          <a:lstStyle/>
+          <a:p>
+            <a:pPr>
+              <a:lnSpc>
+                <a:spcPct val="100000"/>
+              </a:lnSpc>
+            </a:pPr>
+            <a:r>
+              <a:rPr sz="1700" b="0" i="0">
+                <a:solidFill>
+                  <a:srgbClr val="2A2929"/>
+                </a:solidFill>
+                <a:latin typeface="Roboto"/>
+              </a:rPr>
+              <a:t>The plan protects a measured quantity of data.</a:t>
+            </a:r>
+          </a:p>
+        </p:txBody>
+      </p:sp>
+      <p:sp>
+        <p:nvSpPr>
+          <p:cNvPr id="13" name="Rectangle 12"/>
+          <p:cNvSpPr/>
+          <p:nvPr/>
+        </p:nvSpPr>
+        <p:spPr>
+          <a:xfrm>
+            <a:off x="0" y="6565392"/>
+            <a:ext cx="12191695" cy="38100"/>
+          </a:xfrm>
+          <a:prstGeom prst="rect">
+            <a:avLst/>
+          </a:prstGeom>
+          <a:solidFill>
+            <a:srgbClr val="27B5CE"/>
+          </a:solidFill>
+          <a:ln>
+            <a:noFill/>
+          </a:ln>
+          <a:effectLst/>
+        </p:spPr>
+        <p:style>
+          <a:lnRef idx="1">
+            <a:schemeClr val="accent1"/>
+          </a:lnRef>
+          <a:fillRef idx="3">
+            <a:schemeClr val="accent1"/>
+          </a:fillRef>
+          <a:effectRef idx="2">
+            <a:schemeClr val="accent1"/>
+          </a:effectRef>
+          <a:fontRef idx="minor">
+            <a:schemeClr val="lt1"/>
+          </a:fontRef>
+        </p:style>
+        <p:txBody>
+          <a:bodyPr rtlCol="0" anchor="ctr"/>
+          <a:lstStyle/>
+          <a:p>
+            <a:pPr algn="ctr"/>
+          </a:p>
+        </p:txBody>
+      </p:sp>
+      <p:sp>
+        <p:nvSpPr>
+          <p:cNvPr id="14" name="TextBox 13"/>
+          <p:cNvSpPr txBox="1"/>
+          <p:nvPr/>
+        </p:nvSpPr>
+        <p:spPr>
+          <a:xfrm>
             <a:off x="502920" y="6400800"/>
             <a:ext cx="5486400" cy="320040"/>
           </a:xfrm>
@@ -6722,7 +6766,7 @@
       </p:sp>
       <p:sp>
         <p:nvSpPr>
-          <p:cNvPr id="7" name="TextBox 6"/>
+          <p:cNvPr id="15" name="TextBox 14"/>
           <p:cNvSpPr txBox="1"/>
           <p:nvPr/>
         </p:nvSpPr>
@@ -6750,7 +6794,7 @@
                 </a:solidFill>
                 <a:latin typeface="Roboto"/>
               </a:rPr>
-              <a:t>10</a:t>
+              <a:t>11</a:t>
             </a:r>
           </a:p>
         </p:txBody>
@@ -6783,48 +6827,14 @@
       <p:grpSpPr/>
       <p:sp>
         <p:nvSpPr>
-          <p:cNvPr id="2" name="TextBox 1"/>
-          <p:cNvSpPr txBox="1"/>
-          <p:nvPr/>
-        </p:nvSpPr>
-        <p:spPr>
-          <a:xfrm>
-            <a:off x="640080" y="457200"/>
-            <a:ext cx="10881360" cy="960120"/>
-          </a:xfrm>
-          <a:prstGeom prst="rect">
-            <a:avLst/>
-          </a:prstGeom>
-          <a:noFill/>
-        </p:spPr>
-        <p:txBody>
-          <a:bodyPr wrap="square" anchor="t" lIns="0" rIns="0" tIns="0" bIns="0">
-            <a:spAutoFit/>
-          </a:bodyPr>
-          <a:lstStyle/>
-          <a:p>
-            <a:r>
-              <a:rPr sz="2800" b="1" i="0">
-                <a:solidFill>
-                  <a:srgbClr val="2A2929"/>
-                </a:solidFill>
-                <a:latin typeface="Roboto"/>
-              </a:rPr>
-              <a:t>Assess the major risk events</a:t>
-            </a:r>
-          </a:p>
-        </p:txBody>
-      </p:sp>
-      <p:sp>
-        <p:nvSpPr>
-          <p:cNvPr id="3" name="Rectangle 2"/>
+          <p:cNvPr id="2" name="Rectangle 1"/>
           <p:cNvSpPr/>
           <p:nvPr/>
         </p:nvSpPr>
         <p:spPr>
           <a:xfrm>
-            <a:off x="658368" y="1371600"/>
-            <a:ext cx="1463040" cy="50800"/>
+            <a:off x="0" y="0"/>
+            <a:ext cx="3931920" cy="6858000"/>
           </a:xfrm>
           <a:prstGeom prst="rect">
             <a:avLst/>
@@ -6861,14 +6871,48 @@
       </p:sp>
       <p:sp>
         <p:nvSpPr>
+          <p:cNvPr id="3" name="TextBox 2"/>
+          <p:cNvSpPr txBox="1"/>
+          <p:nvPr/>
+        </p:nvSpPr>
+        <p:spPr>
+          <a:xfrm>
+            <a:off x="365760" y="2103120"/>
+            <a:ext cx="3291840" cy="2194560"/>
+          </a:xfrm>
+          <a:prstGeom prst="rect">
+            <a:avLst/>
+          </a:prstGeom>
+          <a:noFill/>
+        </p:spPr>
+        <p:txBody>
+          <a:bodyPr wrap="square" anchor="t" lIns="0" rIns="0" tIns="0" bIns="0">
+            <a:spAutoFit/>
+          </a:bodyPr>
+          <a:lstStyle/>
+          <a:p>
+            <a:r>
+              <a:rPr sz="13000" b="1" i="0">
+                <a:solidFill>
+                  <a:srgbClr val="FFFFFF"/>
+                </a:solidFill>
+                <a:latin typeface="Roboto"/>
+              </a:rPr>
+              <a:t>03</a:t>
+            </a:r>
+          </a:p>
+        </p:txBody>
+      </p:sp>
+      <p:sp>
+        <p:nvSpPr>
           <p:cNvPr id="4" name="TextBox 3"/>
           <p:cNvSpPr txBox="1"/>
           <p:nvPr/>
         </p:nvSpPr>
         <p:spPr>
           <a:xfrm>
-            <a:off x="658368" y="1691640"/>
-            <a:ext cx="10881360" cy="4480560"/>
+            <a:off x="4480560" y="2468880"/>
+            <a:ext cx="7132320" cy="2194560"/>
           </a:xfrm>
           <a:prstGeom prst="rect">
             <a:avLst/>
@@ -6876,101 +6920,51 @@
           <a:noFill/>
         </p:spPr>
         <p:txBody>
-          <a:bodyPr wrap="square" anchor="ctr" lIns="0" rIns="0" tIns="0" bIns="0">
+          <a:bodyPr wrap="square" anchor="t" lIns="0" rIns="0" tIns="0" bIns="0">
             <a:spAutoFit/>
           </a:bodyPr>
           <a:lstStyle/>
           <a:p>
-            <a:pPr marL="0" indent="0">
-              <a:lnSpc>
-                <a:spcPct val="105000"/>
-              </a:lnSpc>
+            <a:r>
+              <a:rPr sz="1600" b="1" i="0">
+                <a:solidFill>
+                  <a:srgbClr val="205F61"/>
+                </a:solidFill>
+                <a:latin typeface="Roboto"/>
+              </a:rPr>
+              <a:t>SECTION</a:t>
+            </a:r>
+          </a:p>
+          <a:p>
+            <a:pPr>
               <a:spcBef>
-                <a:spcPts val="0"/>
+                <a:spcPts val="600"/>
               </a:spcBef>
-              <a:spcAft>
+            </a:pPr>
+            <a:r>
+              <a:rPr sz="3800" b="1" i="0">
+                <a:solidFill>
+                  <a:srgbClr val="2A2929"/>
+                </a:solidFill>
+                <a:latin typeface="Roboto"/>
+              </a:rPr>
+              <a:t>Risks, exclusions and impact</a:t>
+            </a:r>
+          </a:p>
+          <a:p>
+            <a:pPr>
+              <a:spcBef>
                 <a:spcPts val="1000"/>
-              </a:spcAft>
+              </a:spcBef>
             </a:pPr>
             <a:r>
-              <a:rPr sz="2400" b="1" i="0">
-                <a:solidFill>
-                  <a:srgbClr val="EDAB0C"/>
-                </a:solidFill>
-                <a:latin typeface="Roboto"/>
-              </a:rPr>
-              <a:t>■  </a:t>
-            </a:r>
-            <a:r>
-              <a:rPr sz="2400" b="0" i="0">
-                <a:solidFill>
-                  <a:srgbClr val="2A2929"/>
-                </a:solidFill>
-                <a:latin typeface="Roboto"/>
-              </a:rPr>
-              <a:t>Assess at least three major risk events: for each, its likelihood and its impact.</a:t>
-            </a:r>
-          </a:p>
-          <a:p>
-            <a:pPr marL="0" indent="0">
-              <a:lnSpc>
-                <a:spcPct val="105000"/>
-              </a:lnSpc>
-              <a:spcBef>
-                <a:spcPts val="0"/>
-              </a:spcBef>
-              <a:spcAft>
-                <a:spcPts val="1000"/>
-              </a:spcAft>
-            </a:pPr>
-            <a:r>
-              <a:rPr sz="2400" b="1" i="0">
-                <a:solidFill>
-                  <a:srgbClr val="EDAB0C"/>
-                </a:solidFill>
-                <a:latin typeface="Roboto"/>
-              </a:rPr>
-              <a:t>■  </a:t>
-            </a:r>
-            <a:r>
-              <a:rPr sz="2400" b="0" i="0">
-                <a:solidFill>
-                  <a:srgbClr val="2A2929"/>
-                </a:solidFill>
-                <a:latin typeface="Roboto"/>
-              </a:rPr>
-              <a:t>Severity = likelihood x impact; rank the events so the plan can prioritise.</a:t>
-            </a:r>
-          </a:p>
-          <a:p>
-            <a:pPr marL="0" indent="0">
-              <a:lnSpc>
-                <a:spcPct val="105000"/>
-              </a:lnSpc>
-              <a:spcBef>
-                <a:spcPts val="0"/>
-              </a:spcBef>
-              <a:spcAft>
-                <a:spcPts val="1000"/>
-              </a:spcAft>
-            </a:pPr>
-            <a:r>
-              <a:rPr sz="2400" b="1" i="0">
-                <a:solidFill>
-                  <a:srgbClr val="EDAB0C"/>
-                </a:solidFill>
-                <a:latin typeface="Roboto"/>
-              </a:rPr>
-              <a:t>■  </a:t>
-            </a:r>
-            <a:r>
-              <a:rPr sz="2400" b="0" i="0">
-                <a:solidFill>
-                  <a:srgbClr val="2A2929"/>
-                </a:solidFill>
-                <a:latin typeface="Roboto"/>
-              </a:rPr>
-              <a:t>Record plan exclusions — the risks the plan deliberately does not cover, and why.</a:t>
+              <a:rPr sz="2000" b="0" i="1">
+                <a:solidFill>
+                  <a:srgbClr val="484848"/>
+                </a:solidFill>
+                <a:latin typeface="Roboto Light"/>
+              </a:rPr>
+              <a:t>what threatens it, what's out, what it costs</a:t>
             </a:r>
           </a:p>
         </p:txBody>
@@ -7092,7 +7086,7 @@
                 </a:solidFill>
                 <a:latin typeface="Roboto"/>
               </a:rPr>
-              <a:t>11</a:t>
+              <a:t/>
             </a:r>
           </a:p>
         </p:txBody>
@@ -7152,7 +7146,7 @@
                 </a:solidFill>
                 <a:latin typeface="Roboto"/>
               </a:rPr>
-              <a:t>Evaluate impact &amp; document outcomes</a:t>
+              <a:t>The cloud risk environment, and a method</a:t>
             </a:r>
           </a:p>
         </p:txBody>
@@ -7250,7 +7244,7 @@
                 </a:solidFill>
                 <a:latin typeface="Roboto"/>
               </a:rPr>
-              <a:t>Evaluate the severity of impact and disruption of each event on the business.</a:t>
+              <a:t>The cloud changes the risks, it doesn't remove them: zone and region outages, misconfiguration, credential compromise, dependency failure.</a:t>
             </a:r>
           </a:p>
           <a:p>
@@ -7281,7 +7275,7 @@
                 </a:solidFill>
                 <a:latin typeface="Roboto"/>
               </a:rPr>
-              <a:t>Document the impact-analysis outcomes per organisational policies and procedures.</a:t>
+              <a:t>A public, internet-facing system adds its own class: volumetric attack and abuse.</a:t>
             </a:r>
           </a:p>
           <a:p>
@@ -7312,7 +7306,7 @@
                 </a:solidFill>
                 <a:latin typeface="Roboto"/>
               </a:rPr>
-              <a:t>The documented analysis is the input the Topic 4 recovery plan is built from.</a:t>
+              <a:t>Use a method: identify events, rate likelihood and impact, rank — the same way every time, so the ranking is defensible.</a:t>
             </a:r>
           </a:p>
         </p:txBody>
@@ -7467,14 +7461,48 @@
       <p:grpSpPr/>
       <p:sp>
         <p:nvSpPr>
-          <p:cNvPr id="2" name="Rectangle 1"/>
+          <p:cNvPr id="2" name="TextBox 1"/>
+          <p:cNvSpPr txBox="1"/>
+          <p:nvPr/>
+        </p:nvSpPr>
+        <p:spPr>
+          <a:xfrm>
+            <a:off x="640080" y="457200"/>
+            <a:ext cx="10881360" cy="960120"/>
+          </a:xfrm>
+          <a:prstGeom prst="rect">
+            <a:avLst/>
+          </a:prstGeom>
+          <a:noFill/>
+        </p:spPr>
+        <p:txBody>
+          <a:bodyPr wrap="square" anchor="t" lIns="0" rIns="0" tIns="0" bIns="0">
+            <a:spAutoFit/>
+          </a:bodyPr>
+          <a:lstStyle/>
+          <a:p>
+            <a:r>
+              <a:rPr sz="2800" b="1" i="0">
+                <a:solidFill>
+                  <a:srgbClr val="2A2929"/>
+                </a:solidFill>
+                <a:latin typeface="Roboto"/>
+              </a:rPr>
+              <a:t>Assess the major risk events</a:t>
+            </a:r>
+          </a:p>
+        </p:txBody>
+      </p:sp>
+      <p:sp>
+        <p:nvSpPr>
+          <p:cNvPr id="3" name="Rectangle 2"/>
           <p:cNvSpPr/>
           <p:nvPr/>
         </p:nvSpPr>
         <p:spPr>
           <a:xfrm>
-            <a:off x="0" y="0"/>
-            <a:ext cx="12191695" cy="1234440"/>
+            <a:off x="658368" y="1371600"/>
+            <a:ext cx="1463040" cy="50800"/>
           </a:xfrm>
           <a:prstGeom prst="rect">
             <a:avLst/>
@@ -7511,67 +7539,14 @@
       </p:sp>
       <p:sp>
         <p:nvSpPr>
-          <p:cNvPr id="3" name="Rounded Rectangle 2"/>
-          <p:cNvSpPr/>
-          <p:nvPr/>
-        </p:nvSpPr>
-        <p:spPr>
-          <a:xfrm>
-            <a:off x="640080" y="384048"/>
-            <a:ext cx="1691640" cy="457200"/>
-          </a:xfrm>
-          <a:prstGeom prst="roundRect">
-            <a:avLst/>
-          </a:prstGeom>
-          <a:solidFill>
-            <a:srgbClr val="2A2929"/>
-          </a:solidFill>
-          <a:ln>
-            <a:noFill/>
-          </a:ln>
-          <a:effectLst/>
-        </p:spPr>
-        <p:style>
-          <a:lnRef idx="1">
-            <a:schemeClr val="accent1"/>
-          </a:lnRef>
-          <a:fillRef idx="3">
-            <a:schemeClr val="accent1"/>
-          </a:fillRef>
-          <a:effectRef idx="2">
-            <a:schemeClr val="accent1"/>
-          </a:effectRef>
-          <a:fontRef idx="minor">
-            <a:schemeClr val="lt1"/>
-          </a:fontRef>
-        </p:style>
-        <p:txBody>
-          <a:bodyPr rtlCol="0" anchor="ctr"/>
-          <a:lstStyle/>
-          <a:p>
-            <a:pPr algn="ctr"/>
-            <a:r>
-              <a:rPr sz="1400" b="1" i="0">
-                <a:solidFill>
-                  <a:srgbClr val="FBB900"/>
-                </a:solidFill>
-                <a:latin typeface="Roboto"/>
-              </a:rPr>
-              <a:t>ACTIVITY</a:t>
-            </a:r>
-          </a:p>
-        </p:txBody>
-      </p:sp>
-      <p:sp>
-        <p:nvSpPr>
           <p:cNvPr id="4" name="TextBox 3"/>
           <p:cNvSpPr txBox="1"/>
           <p:nvPr/>
         </p:nvSpPr>
         <p:spPr>
           <a:xfrm>
-            <a:off x="2560320" y="310896"/>
-            <a:ext cx="8961120" cy="685800"/>
+            <a:off x="658368" y="1691640"/>
+            <a:ext cx="10881360" cy="4480560"/>
           </a:xfrm>
           <a:prstGeom prst="rect">
             <a:avLst/>
@@ -7580,40 +7555,6 @@
         </p:spPr>
         <p:txBody>
           <a:bodyPr wrap="square" anchor="ctr" lIns="0" rIns="0" tIns="0" bIns="0">
-            <a:spAutoFit/>
-          </a:bodyPr>
-          <a:lstStyle/>
-          <a:p>
-            <a:r>
-              <a:rPr sz="2600" b="1" i="0">
-                <a:solidFill>
-                  <a:srgbClr val="FFFFFF"/>
-                </a:solidFill>
-                <a:latin typeface="Roboto"/>
-              </a:rPr>
-              <a:t>Risk &amp; impact analysis</a:t>
-            </a:r>
-          </a:p>
-        </p:txBody>
-      </p:sp>
-      <p:sp>
-        <p:nvSpPr>
-          <p:cNvPr id="5" name="TextBox 4"/>
-          <p:cNvSpPr txBox="1"/>
-          <p:nvPr/>
-        </p:nvSpPr>
-        <p:spPr>
-          <a:xfrm>
-            <a:off x="658368" y="1554480"/>
-            <a:ext cx="10881360" cy="4297680"/>
-          </a:xfrm>
-          <a:prstGeom prst="rect">
-            <a:avLst/>
-          </a:prstGeom>
-          <a:noFill/>
-        </p:spPr>
-        <p:txBody>
-          <a:bodyPr wrap="square" anchor="t" lIns="0" rIns="0" tIns="0" bIns="0">
             <a:spAutoFit/>
           </a:bodyPr>
           <a:lstStyle/>
@@ -7630,7 +7571,7 @@
               </a:spcAft>
             </a:pPr>
             <a:r>
-              <a:rPr sz="1700" b="1" i="0">
+              <a:rPr sz="2400" b="1" i="0">
                 <a:solidFill>
                   <a:srgbClr val="EDAB0C"/>
                 </a:solidFill>
@@ -7639,13 +7580,13 @@
               <a:t>■  </a:t>
             </a:r>
             <a:r>
-              <a:rPr sz="1700" b="0" i="0">
+              <a:rPr sz="2400" b="0" i="0">
                 <a:solidFill>
                   <a:srgbClr val="2A2929"/>
                 </a:solidFill>
                 <a:latin typeface="Roboto"/>
               </a:rPr>
-              <a:t>For the practice scenario, assess at least three major risk events (likelihood, impact, severity) and note exclusions.</a:t>
+              <a:t>For each event: what happens, how likely, what it hits, and how hard.</a:t>
             </a:r>
           </a:p>
           <a:p>
@@ -7661,7 +7602,7 @@
               </a:spcAft>
             </a:pPr>
             <a:r>
-              <a:rPr sz="1700" b="1" i="0">
+              <a:rPr sz="2400" b="1" i="0">
                 <a:solidFill>
                   <a:srgbClr val="EDAB0C"/>
                 </a:solidFill>
@@ -7670,100 +7611,51 @@
               <a:t>■  </a:t>
             </a:r>
             <a:r>
-              <a:rPr sz="1700" b="0" i="0">
+              <a:rPr sz="2400" b="0" i="0">
                 <a:solidFill>
                   <a:srgbClr val="2A2929"/>
                 </a:solidFill>
                 <a:latin typeface="Roboto"/>
               </a:rPr>
-              <a:t>Document the impact-analysis outcomes.</a:t>
-            </a:r>
-          </a:p>
-        </p:txBody>
-      </p:sp>
-      <p:sp>
-        <p:nvSpPr>
-          <p:cNvPr id="6" name="Rounded Rectangle 5"/>
-          <p:cNvSpPr/>
-          <p:nvPr/>
-        </p:nvSpPr>
-        <p:spPr>
-          <a:xfrm>
-            <a:off x="640080" y="5897880"/>
-            <a:ext cx="4023360" cy="457200"/>
-          </a:xfrm>
-          <a:prstGeom prst="roundRect">
-            <a:avLst/>
-          </a:prstGeom>
-          <a:solidFill>
-            <a:srgbClr val="F9F9F9"/>
-          </a:solidFill>
-          <a:ln w="12700">
-            <a:solidFill>
-              <a:srgbClr val="CCCCCC"/>
-            </a:solidFill>
-          </a:ln>
-          <a:effectLst/>
-        </p:spPr>
-        <p:style>
-          <a:lnRef idx="1">
-            <a:schemeClr val="accent1"/>
-          </a:lnRef>
-          <a:fillRef idx="3">
-            <a:schemeClr val="accent1"/>
-          </a:fillRef>
-          <a:effectRef idx="2">
-            <a:schemeClr val="accent1"/>
-          </a:effectRef>
-          <a:fontRef idx="minor">
-            <a:schemeClr val="lt1"/>
-          </a:fontRef>
-        </p:style>
-        <p:txBody>
-          <a:bodyPr rtlCol="0" anchor="ctr"/>
-          <a:lstStyle/>
-          <a:p>
-            <a:pPr algn="ctr"/>
-          </a:p>
-        </p:txBody>
-      </p:sp>
-      <p:sp>
-        <p:nvSpPr>
-          <p:cNvPr id="7" name="TextBox 6"/>
-          <p:cNvSpPr txBox="1"/>
-          <p:nvPr/>
-        </p:nvSpPr>
-        <p:spPr>
-          <a:xfrm>
-            <a:off x="822960" y="5943600"/>
-            <a:ext cx="3657600" cy="365760"/>
-          </a:xfrm>
-          <a:prstGeom prst="rect">
-            <a:avLst/>
-          </a:prstGeom>
-          <a:noFill/>
-        </p:spPr>
-        <p:txBody>
-          <a:bodyPr wrap="square" anchor="ctr" lIns="0" rIns="0" tIns="0" bIns="0">
-            <a:spAutoFit/>
-          </a:bodyPr>
-          <a:lstStyle/>
-          <a:p>
-            <a:r>
-              <a:rPr sz="1500" b="1" i="0">
+              <a:t>Rate honestly — a register where everything is high tells the reader nothing.</a:t>
+            </a:r>
+          </a:p>
+          <a:p>
+            <a:pPr marL="0" indent="0">
+              <a:lnSpc>
+                <a:spcPct val="105000"/>
+              </a:lnSpc>
+              <a:spcBef>
+                <a:spcPts val="0"/>
+              </a:spcBef>
+              <a:spcAft>
+                <a:spcPts val="1000"/>
+              </a:spcAft>
+            </a:pPr>
+            <a:r>
+              <a:rPr sz="2400" b="1" i="0">
+                <a:solidFill>
+                  <a:srgbClr val="EDAB0C"/>
+                </a:solidFill>
+                <a:latin typeface="Roboto"/>
+              </a:rPr>
+              <a:t>■  </a:t>
+            </a:r>
+            <a:r>
+              <a:rPr sz="2400" b="0" i="0">
                 <a:solidFill>
                   <a:srgbClr val="2A2929"/>
                 </a:solidFill>
                 <a:latin typeface="Roboto"/>
               </a:rPr>
-              <a:t>⏱  ~30 min</a:t>
-            </a:r>
-          </a:p>
-        </p:txBody>
-      </p:sp>
-      <p:sp>
-        <p:nvSpPr>
-          <p:cNvPr id="8" name="Rectangle 7"/>
+              <a:t>The ranked list is what the strategy in Topic 4 answers, in priority order.</a:t>
+            </a:r>
+          </a:p>
+        </p:txBody>
+      </p:sp>
+      <p:sp>
+        <p:nvSpPr>
+          <p:cNvPr id="5" name="Rectangle 4"/>
           <p:cNvSpPr/>
           <p:nvPr/>
         </p:nvSpPr>
@@ -7807,7 +7699,7 @@
       </p:sp>
       <p:sp>
         <p:nvSpPr>
-          <p:cNvPr id="9" name="TextBox 8"/>
+          <p:cNvPr id="6" name="TextBox 5"/>
           <p:cNvSpPr txBox="1"/>
           <p:nvPr/>
         </p:nvSpPr>
@@ -7850,7 +7742,7 @@
       </p:sp>
       <p:sp>
         <p:nvSpPr>
-          <p:cNvPr id="10" name="TextBox 9"/>
+          <p:cNvPr id="7" name="TextBox 6"/>
           <p:cNvSpPr txBox="1"/>
           <p:nvPr/>
         </p:nvSpPr>
@@ -7938,7 +7830,7 @@
                 </a:solidFill>
                 <a:latin typeface="Roboto"/>
               </a:rPr>
-              <a:t>Risk register — worked shape</a:t>
+              <a:t>Say what the plan does not cover</a:t>
             </a:r>
           </a:p>
         </p:txBody>
@@ -7987,6 +7879,1087 @@
           </a:p>
         </p:txBody>
       </p:sp>
+      <p:sp>
+        <p:nvSpPr>
+          <p:cNvPr id="4" name="TextBox 3"/>
+          <p:cNvSpPr txBox="1"/>
+          <p:nvPr/>
+        </p:nvSpPr>
+        <p:spPr>
+          <a:xfrm>
+            <a:off x="658368" y="1691640"/>
+            <a:ext cx="10881360" cy="4480560"/>
+          </a:xfrm>
+          <a:prstGeom prst="rect">
+            <a:avLst/>
+          </a:prstGeom>
+          <a:noFill/>
+        </p:spPr>
+        <p:txBody>
+          <a:bodyPr wrap="square" anchor="ctr" lIns="0" rIns="0" tIns="0" bIns="0">
+            <a:spAutoFit/>
+          </a:bodyPr>
+          <a:lstStyle/>
+          <a:p>
+            <a:pPr marL="0" indent="0">
+              <a:lnSpc>
+                <a:spcPct val="105000"/>
+              </a:lnSpc>
+              <a:spcBef>
+                <a:spcPts val="0"/>
+              </a:spcBef>
+              <a:spcAft>
+                <a:spcPts val="1000"/>
+              </a:spcAft>
+            </a:pPr>
+            <a:r>
+              <a:rPr sz="2400" b="1" i="0">
+                <a:solidFill>
+                  <a:srgbClr val="EDAB0C"/>
+                </a:solidFill>
+                <a:latin typeface="Roboto"/>
+              </a:rPr>
+              <a:t>■  </a:t>
+            </a:r>
+            <a:r>
+              <a:rPr sz="2400" b="0" i="0">
+                <a:solidFill>
+                  <a:srgbClr val="2A2929"/>
+                </a:solidFill>
+                <a:latin typeface="Roboto"/>
+              </a:rPr>
+              <a:t>Every plan has edges: events out of scope, systems not covered, decisions deferred.</a:t>
+            </a:r>
+          </a:p>
+          <a:p>
+            <a:pPr marL="0" indent="0">
+              <a:lnSpc>
+                <a:spcPct val="105000"/>
+              </a:lnSpc>
+              <a:spcBef>
+                <a:spcPts val="0"/>
+              </a:spcBef>
+              <a:spcAft>
+                <a:spcPts val="1000"/>
+              </a:spcAft>
+            </a:pPr>
+            <a:r>
+              <a:rPr sz="2400" b="1" i="0">
+                <a:solidFill>
+                  <a:srgbClr val="EDAB0C"/>
+                </a:solidFill>
+                <a:latin typeface="Roboto"/>
+              </a:rPr>
+              <a:t>■  </a:t>
+            </a:r>
+            <a:r>
+              <a:rPr sz="2400" b="0" i="0">
+                <a:solidFill>
+                  <a:srgbClr val="2A2929"/>
+                </a:solidFill>
+                <a:latin typeface="Roboto"/>
+              </a:rPr>
+              <a:t>An exclusion stated is a decision; an exclusion discovered during a disaster is a failure.</a:t>
+            </a:r>
+          </a:p>
+          <a:p>
+            <a:pPr marL="0" indent="0">
+              <a:lnSpc>
+                <a:spcPct val="105000"/>
+              </a:lnSpc>
+              <a:spcBef>
+                <a:spcPts val="0"/>
+              </a:spcBef>
+              <a:spcAft>
+                <a:spcPts val="1000"/>
+              </a:spcAft>
+            </a:pPr>
+            <a:r>
+              <a:rPr sz="2400" b="1" i="0">
+                <a:solidFill>
+                  <a:srgbClr val="EDAB0C"/>
+                </a:solidFill>
+                <a:latin typeface="Roboto"/>
+              </a:rPr>
+              <a:t>■  </a:t>
+            </a:r>
+            <a:r>
+              <a:rPr sz="2400" b="0" i="0">
+                <a:solidFill>
+                  <a:srgbClr val="2A2929"/>
+                </a:solidFill>
+                <a:latin typeface="Roboto"/>
+              </a:rPr>
+              <a:t>Each exclusion carries a reason — cost, likelihood, or someone else's responsibility.</a:t>
+            </a:r>
+          </a:p>
+        </p:txBody>
+      </p:sp>
+      <p:sp>
+        <p:nvSpPr>
+          <p:cNvPr id="5" name="Rectangle 4"/>
+          <p:cNvSpPr/>
+          <p:nvPr/>
+        </p:nvSpPr>
+        <p:spPr>
+          <a:xfrm>
+            <a:off x="0" y="6565392"/>
+            <a:ext cx="12191695" cy="38100"/>
+          </a:xfrm>
+          <a:prstGeom prst="rect">
+            <a:avLst/>
+          </a:prstGeom>
+          <a:solidFill>
+            <a:srgbClr val="205F61"/>
+          </a:solidFill>
+          <a:ln>
+            <a:noFill/>
+          </a:ln>
+          <a:effectLst/>
+        </p:spPr>
+        <p:style>
+          <a:lnRef idx="1">
+            <a:schemeClr val="accent1"/>
+          </a:lnRef>
+          <a:fillRef idx="3">
+            <a:schemeClr val="accent1"/>
+          </a:fillRef>
+          <a:effectRef idx="2">
+            <a:schemeClr val="accent1"/>
+          </a:effectRef>
+          <a:fontRef idx="minor">
+            <a:schemeClr val="lt1"/>
+          </a:fontRef>
+        </p:style>
+        <p:txBody>
+          <a:bodyPr rtlCol="0" anchor="ctr"/>
+          <a:lstStyle/>
+          <a:p>
+            <a:pPr algn="ctr"/>
+          </a:p>
+        </p:txBody>
+      </p:sp>
+      <p:sp>
+        <p:nvSpPr>
+          <p:cNvPr id="6" name="TextBox 5"/>
+          <p:cNvSpPr txBox="1"/>
+          <p:nvPr/>
+        </p:nvSpPr>
+        <p:spPr>
+          <a:xfrm>
+            <a:off x="502920" y="6400800"/>
+            <a:ext cx="5486400" cy="320040"/>
+          </a:xfrm>
+          <a:prstGeom prst="rect">
+            <a:avLst/>
+          </a:prstGeom>
+          <a:noFill/>
+        </p:spPr>
+        <p:txBody>
+          <a:bodyPr wrap="square" anchor="t" lIns="0" rIns="0" tIns="0" bIns="0">
+            <a:spAutoFit/>
+          </a:bodyPr>
+          <a:lstStyle/>
+          <a:p>
+            <a:r>
+              <a:rPr sz="1100" b="1" i="0">
+                <a:solidFill>
+                  <a:srgbClr val="2A2929"/>
+                </a:solidFill>
+                <a:latin typeface="Roboto"/>
+              </a:rPr>
+              <a:t>Kangan </a:t>
+            </a:r>
+            <a:r>
+              <a:rPr sz="1100" b="1" i="0">
+                <a:solidFill>
+                  <a:srgbClr val="D68E10"/>
+                </a:solidFill>
+                <a:latin typeface="Roboto"/>
+              </a:rPr>
+              <a:t>Institute</a:t>
+            </a:r>
+          </a:p>
+        </p:txBody>
+      </p:sp>
+      <p:sp>
+        <p:nvSpPr>
+          <p:cNvPr id="7" name="TextBox 6"/>
+          <p:cNvSpPr txBox="1"/>
+          <p:nvPr/>
+        </p:nvSpPr>
+        <p:spPr>
+          <a:xfrm>
+            <a:off x="10515600" y="6400800"/>
+            <a:ext cx="1188720" cy="320040"/>
+          </a:xfrm>
+          <a:prstGeom prst="rect">
+            <a:avLst/>
+          </a:prstGeom>
+          <a:noFill/>
+        </p:spPr>
+        <p:txBody>
+          <a:bodyPr wrap="square" anchor="t" lIns="0" rIns="0" tIns="0" bIns="0">
+            <a:spAutoFit/>
+          </a:bodyPr>
+          <a:lstStyle/>
+          <a:p>
+            <a:pPr algn="r"/>
+            <a:r>
+              <a:rPr sz="1100" b="0" i="0">
+                <a:solidFill>
+                  <a:srgbClr val="7A7A7A"/>
+                </a:solidFill>
+                <a:latin typeface="Roboto"/>
+              </a:rPr>
+              <a:t>14</a:t>
+            </a:r>
+          </a:p>
+        </p:txBody>
+      </p:sp>
+    </p:spTree>
+  </p:cSld>
+  <p:clrMapOvr>
+    <a:masterClrMapping/>
+  </p:clrMapOvr>
+</p:sld>
+</file>
+
+<file path=ppt/slides/slide19.xml><?xml version="1.0" encoding="utf-8"?>
+<p:sld xmlns:a="http://schemas.openxmlformats.org/drawingml/2006/main" xmlns:p="http://schemas.openxmlformats.org/presentationml/2006/main" xmlns:r="http://schemas.openxmlformats.org/officeDocument/2006/relationships">
+  <p:cSld>
+    <p:bg>
+      <p:bgPr>
+        <a:solidFill>
+          <a:srgbClr val="FFFFFF"/>
+        </a:solidFill>
+        <a:effectLst/>
+      </p:bgPr>
+    </p:bg>
+    <p:spTree>
+      <p:nvGrpSpPr>
+        <p:cNvPr id="1" name=""/>
+        <p:cNvGrpSpPr/>
+        <p:nvPr/>
+      </p:nvGrpSpPr>
+      <p:grpSpPr/>
+      <p:sp>
+        <p:nvSpPr>
+          <p:cNvPr id="2" name="TextBox 1"/>
+          <p:cNvSpPr txBox="1"/>
+          <p:nvPr/>
+        </p:nvSpPr>
+        <p:spPr>
+          <a:xfrm>
+            <a:off x="640080" y="457200"/>
+            <a:ext cx="10881360" cy="960120"/>
+          </a:xfrm>
+          <a:prstGeom prst="rect">
+            <a:avLst/>
+          </a:prstGeom>
+          <a:noFill/>
+        </p:spPr>
+        <p:txBody>
+          <a:bodyPr wrap="square" anchor="t" lIns="0" rIns="0" tIns="0" bIns="0">
+            <a:spAutoFit/>
+          </a:bodyPr>
+          <a:lstStyle/>
+          <a:p>
+            <a:r>
+              <a:rPr sz="2800" b="1" i="0">
+                <a:solidFill>
+                  <a:srgbClr val="2A2929"/>
+                </a:solidFill>
+                <a:latin typeface="Roboto"/>
+              </a:rPr>
+              <a:t>Record the outcomes of the impact analysis</a:t>
+            </a:r>
+          </a:p>
+        </p:txBody>
+      </p:sp>
+      <p:sp>
+        <p:nvSpPr>
+          <p:cNvPr id="3" name="Rectangle 2"/>
+          <p:cNvSpPr/>
+          <p:nvPr/>
+        </p:nvSpPr>
+        <p:spPr>
+          <a:xfrm>
+            <a:off x="658368" y="1371600"/>
+            <a:ext cx="1463040" cy="50800"/>
+          </a:xfrm>
+          <a:prstGeom prst="rect">
+            <a:avLst/>
+          </a:prstGeom>
+          <a:solidFill>
+            <a:srgbClr val="205F61"/>
+          </a:solidFill>
+          <a:ln>
+            <a:noFill/>
+          </a:ln>
+          <a:effectLst/>
+        </p:spPr>
+        <p:style>
+          <a:lnRef idx="1">
+            <a:schemeClr val="accent1"/>
+          </a:lnRef>
+          <a:fillRef idx="3">
+            <a:schemeClr val="accent1"/>
+          </a:fillRef>
+          <a:effectRef idx="2">
+            <a:schemeClr val="accent1"/>
+          </a:effectRef>
+          <a:fontRef idx="minor">
+            <a:schemeClr val="lt1"/>
+          </a:fontRef>
+        </p:style>
+        <p:txBody>
+          <a:bodyPr rtlCol="0" anchor="ctr"/>
+          <a:lstStyle/>
+          <a:p>
+            <a:pPr algn="ctr"/>
+          </a:p>
+        </p:txBody>
+      </p:sp>
+      <p:sp>
+        <p:nvSpPr>
+          <p:cNvPr id="4" name="TextBox 3"/>
+          <p:cNvSpPr txBox="1"/>
+          <p:nvPr/>
+        </p:nvSpPr>
+        <p:spPr>
+          <a:xfrm>
+            <a:off x="658368" y="1691640"/>
+            <a:ext cx="10881360" cy="4480560"/>
+          </a:xfrm>
+          <a:prstGeom prst="rect">
+            <a:avLst/>
+          </a:prstGeom>
+          <a:noFill/>
+        </p:spPr>
+        <p:txBody>
+          <a:bodyPr wrap="square" anchor="ctr" lIns="0" rIns="0" tIns="0" bIns="0">
+            <a:spAutoFit/>
+          </a:bodyPr>
+          <a:lstStyle/>
+          <a:p>
+            <a:pPr marL="0" indent="0">
+              <a:lnSpc>
+                <a:spcPct val="105000"/>
+              </a:lnSpc>
+              <a:spcBef>
+                <a:spcPts val="0"/>
+              </a:spcBef>
+              <a:spcAft>
+                <a:spcPts val="1000"/>
+              </a:spcAft>
+            </a:pPr>
+            <a:r>
+              <a:rPr sz="2400" b="1" i="0">
+                <a:solidFill>
+                  <a:srgbClr val="EDAB0C"/>
+                </a:solidFill>
+                <a:latin typeface="Roboto"/>
+              </a:rPr>
+              <a:t>■  </a:t>
+            </a:r>
+            <a:r>
+              <a:rPr sz="2400" b="0" i="0">
+                <a:solidFill>
+                  <a:srgbClr val="2A2929"/>
+                </a:solidFill>
+                <a:latin typeface="Roboto"/>
+              </a:rPr>
+              <a:t>Bring it together: the events, their ratings, what each would cost the business, and the ranking.</a:t>
+            </a:r>
+          </a:p>
+          <a:p>
+            <a:pPr marL="0" indent="0">
+              <a:lnSpc>
+                <a:spcPct val="105000"/>
+              </a:lnSpc>
+              <a:spcBef>
+                <a:spcPts val="0"/>
+              </a:spcBef>
+              <a:spcAft>
+                <a:spcPts val="1000"/>
+              </a:spcAft>
+            </a:pPr>
+            <a:r>
+              <a:rPr sz="2400" b="1" i="0">
+                <a:solidFill>
+                  <a:srgbClr val="EDAB0C"/>
+                </a:solidFill>
+                <a:latin typeface="Roboto"/>
+              </a:rPr>
+              <a:t>■  </a:t>
+            </a:r>
+            <a:r>
+              <a:rPr sz="2400" b="0" i="0">
+                <a:solidFill>
+                  <a:srgbClr val="2A2929"/>
+                </a:solidFill>
+                <a:latin typeface="Roboto"/>
+              </a:rPr>
+              <a:t>The impact is stated in business terms — hours down, data lost, obligations breached — not in technology terms.</a:t>
+            </a:r>
+          </a:p>
+          <a:p>
+            <a:pPr marL="0" indent="0">
+              <a:lnSpc>
+                <a:spcPct val="105000"/>
+              </a:lnSpc>
+              <a:spcBef>
+                <a:spcPts val="0"/>
+              </a:spcBef>
+              <a:spcAft>
+                <a:spcPts val="1000"/>
+              </a:spcAft>
+            </a:pPr>
+            <a:r>
+              <a:rPr sz="2400" b="1" i="0">
+                <a:solidFill>
+                  <a:srgbClr val="EDAB0C"/>
+                </a:solidFill>
+                <a:latin typeface="Roboto"/>
+              </a:rPr>
+              <a:t>■  </a:t>
+            </a:r>
+            <a:r>
+              <a:rPr sz="2400" b="0" i="0">
+                <a:solidFill>
+                  <a:srgbClr val="2A2929"/>
+                </a:solidFill>
+                <a:latin typeface="Roboto"/>
+              </a:rPr>
+              <a:t>This record is the evidence the strategy is built on; it must be readable on its own.</a:t>
+            </a:r>
+          </a:p>
+        </p:txBody>
+      </p:sp>
+      <p:sp>
+        <p:nvSpPr>
+          <p:cNvPr id="5" name="Rectangle 4"/>
+          <p:cNvSpPr/>
+          <p:nvPr/>
+        </p:nvSpPr>
+        <p:spPr>
+          <a:xfrm>
+            <a:off x="0" y="6565392"/>
+            <a:ext cx="12191695" cy="38100"/>
+          </a:xfrm>
+          <a:prstGeom prst="rect">
+            <a:avLst/>
+          </a:prstGeom>
+          <a:solidFill>
+            <a:srgbClr val="205F61"/>
+          </a:solidFill>
+          <a:ln>
+            <a:noFill/>
+          </a:ln>
+          <a:effectLst/>
+        </p:spPr>
+        <p:style>
+          <a:lnRef idx="1">
+            <a:schemeClr val="accent1"/>
+          </a:lnRef>
+          <a:fillRef idx="3">
+            <a:schemeClr val="accent1"/>
+          </a:fillRef>
+          <a:effectRef idx="2">
+            <a:schemeClr val="accent1"/>
+          </a:effectRef>
+          <a:fontRef idx="minor">
+            <a:schemeClr val="lt1"/>
+          </a:fontRef>
+        </p:style>
+        <p:txBody>
+          <a:bodyPr rtlCol="0" anchor="ctr"/>
+          <a:lstStyle/>
+          <a:p>
+            <a:pPr algn="ctr"/>
+          </a:p>
+        </p:txBody>
+      </p:sp>
+      <p:sp>
+        <p:nvSpPr>
+          <p:cNvPr id="6" name="TextBox 5"/>
+          <p:cNvSpPr txBox="1"/>
+          <p:nvPr/>
+        </p:nvSpPr>
+        <p:spPr>
+          <a:xfrm>
+            <a:off x="502920" y="6400800"/>
+            <a:ext cx="5486400" cy="320040"/>
+          </a:xfrm>
+          <a:prstGeom prst="rect">
+            <a:avLst/>
+          </a:prstGeom>
+          <a:noFill/>
+        </p:spPr>
+        <p:txBody>
+          <a:bodyPr wrap="square" anchor="t" lIns="0" rIns="0" tIns="0" bIns="0">
+            <a:spAutoFit/>
+          </a:bodyPr>
+          <a:lstStyle/>
+          <a:p>
+            <a:r>
+              <a:rPr sz="1100" b="1" i="0">
+                <a:solidFill>
+                  <a:srgbClr val="2A2929"/>
+                </a:solidFill>
+                <a:latin typeface="Roboto"/>
+              </a:rPr>
+              <a:t>Kangan </a:t>
+            </a:r>
+            <a:r>
+              <a:rPr sz="1100" b="1" i="0">
+                <a:solidFill>
+                  <a:srgbClr val="D68E10"/>
+                </a:solidFill>
+                <a:latin typeface="Roboto"/>
+              </a:rPr>
+              <a:t>Institute</a:t>
+            </a:r>
+          </a:p>
+        </p:txBody>
+      </p:sp>
+      <p:sp>
+        <p:nvSpPr>
+          <p:cNvPr id="7" name="TextBox 6"/>
+          <p:cNvSpPr txBox="1"/>
+          <p:nvPr/>
+        </p:nvSpPr>
+        <p:spPr>
+          <a:xfrm>
+            <a:off x="10515600" y="6400800"/>
+            <a:ext cx="1188720" cy="320040"/>
+          </a:xfrm>
+          <a:prstGeom prst="rect">
+            <a:avLst/>
+          </a:prstGeom>
+          <a:noFill/>
+        </p:spPr>
+        <p:txBody>
+          <a:bodyPr wrap="square" anchor="t" lIns="0" rIns="0" tIns="0" bIns="0">
+            <a:spAutoFit/>
+          </a:bodyPr>
+          <a:lstStyle/>
+          <a:p>
+            <a:pPr algn="r"/>
+            <a:r>
+              <a:rPr sz="1100" b="0" i="0">
+                <a:solidFill>
+                  <a:srgbClr val="7A7A7A"/>
+                </a:solidFill>
+                <a:latin typeface="Roboto"/>
+              </a:rPr>
+              <a:t>15</a:t>
+            </a:r>
+          </a:p>
+        </p:txBody>
+      </p:sp>
+    </p:spTree>
+  </p:cSld>
+  <p:clrMapOvr>
+    <a:masterClrMapping/>
+  </p:clrMapOvr>
+</p:sld>
+</file>
+
+<file path=ppt/slides/slide2.xml><?xml version="1.0" encoding="utf-8"?>
+<p:sld xmlns:a="http://schemas.openxmlformats.org/drawingml/2006/main" xmlns:p="http://schemas.openxmlformats.org/presentationml/2006/main" xmlns:r="http://schemas.openxmlformats.org/officeDocument/2006/relationships">
+  <p:cSld>
+    <p:bg>
+      <p:bgPr>
+        <a:solidFill>
+          <a:srgbClr val="FFFFFF"/>
+        </a:solidFill>
+        <a:effectLst/>
+      </p:bgPr>
+    </p:bg>
+    <p:spTree>
+      <p:nvGrpSpPr>
+        <p:cNvPr id="1" name=""/>
+        <p:cNvGrpSpPr/>
+        <p:nvPr/>
+      </p:nvGrpSpPr>
+      <p:grpSpPr/>
+      <p:sp>
+        <p:nvSpPr>
+          <p:cNvPr id="2" name="TextBox 1"/>
+          <p:cNvSpPr txBox="1"/>
+          <p:nvPr/>
+        </p:nvSpPr>
+        <p:spPr>
+          <a:xfrm>
+            <a:off x="640080" y="457200"/>
+            <a:ext cx="10881360" cy="960120"/>
+          </a:xfrm>
+          <a:prstGeom prst="rect">
+            <a:avLst/>
+          </a:prstGeom>
+          <a:noFill/>
+        </p:spPr>
+        <p:txBody>
+          <a:bodyPr wrap="square" anchor="t" lIns="0" rIns="0" tIns="0" bIns="0">
+            <a:spAutoFit/>
+          </a:bodyPr>
+          <a:lstStyle/>
+          <a:p>
+            <a:r>
+              <a:rPr sz="2800" b="1" i="0">
+                <a:solidFill>
+                  <a:srgbClr val="2A2929"/>
+                </a:solidFill>
+                <a:latin typeface="Roboto"/>
+              </a:rPr>
+              <a:t>From design to disaster recovery</a:t>
+            </a:r>
+          </a:p>
+        </p:txBody>
+      </p:sp>
+      <p:sp>
+        <p:nvSpPr>
+          <p:cNvPr id="3" name="Rectangle 2"/>
+          <p:cNvSpPr/>
+          <p:nvPr/>
+        </p:nvSpPr>
+        <p:spPr>
+          <a:xfrm>
+            <a:off x="658368" y="1371600"/>
+            <a:ext cx="1463040" cy="50800"/>
+          </a:xfrm>
+          <a:prstGeom prst="rect">
+            <a:avLst/>
+          </a:prstGeom>
+          <a:solidFill>
+            <a:srgbClr val="EDAB0C"/>
+          </a:solidFill>
+          <a:ln>
+            <a:noFill/>
+          </a:ln>
+          <a:effectLst/>
+        </p:spPr>
+        <p:style>
+          <a:lnRef idx="1">
+            <a:schemeClr val="accent1"/>
+          </a:lnRef>
+          <a:fillRef idx="3">
+            <a:schemeClr val="accent1"/>
+          </a:fillRef>
+          <a:effectRef idx="2">
+            <a:schemeClr val="accent1"/>
+          </a:effectRef>
+          <a:fontRef idx="minor">
+            <a:schemeClr val="lt1"/>
+          </a:fontRef>
+        </p:style>
+        <p:txBody>
+          <a:bodyPr rtlCol="0" anchor="ctr"/>
+          <a:lstStyle/>
+          <a:p>
+            <a:pPr algn="ctr"/>
+          </a:p>
+        </p:txBody>
+      </p:sp>
+      <p:sp>
+        <p:nvSpPr>
+          <p:cNvPr id="4" name="TextBox 3"/>
+          <p:cNvSpPr txBox="1"/>
+          <p:nvPr/>
+        </p:nvSpPr>
+        <p:spPr>
+          <a:xfrm>
+            <a:off x="658368" y="1737360"/>
+            <a:ext cx="5486400" cy="4297680"/>
+          </a:xfrm>
+          <a:prstGeom prst="rect">
+            <a:avLst/>
+          </a:prstGeom>
+          <a:noFill/>
+        </p:spPr>
+        <p:txBody>
+          <a:bodyPr wrap="square" anchor="t" lIns="0" rIns="0" tIns="0" bIns="0">
+            <a:spAutoFit/>
+          </a:bodyPr>
+          <a:lstStyle/>
+          <a:p>
+            <a:pPr marL="0" indent="0">
+              <a:lnSpc>
+                <a:spcPct val="105000"/>
+              </a:lnSpc>
+              <a:spcBef>
+                <a:spcPts val="0"/>
+              </a:spcBef>
+              <a:spcAft>
+                <a:spcPts val="1000"/>
+              </a:spcAft>
+            </a:pPr>
+            <a:r>
+              <a:rPr sz="1700" b="1" i="0">
+                <a:solidFill>
+                  <a:srgbClr val="EDAB0C"/>
+                </a:solidFill>
+                <a:latin typeface="Roboto"/>
+              </a:rPr>
+              <a:t>■  </a:t>
+            </a:r>
+            <a:r>
+              <a:rPr sz="1700" b="0" i="0">
+                <a:solidFill>
+                  <a:srgbClr val="2A2929"/>
+                </a:solidFill>
+                <a:latin typeface="Roboto"/>
+              </a:rPr>
+              <a:t>Topics 1–2 designed the system; Topic 3 asks what happens when part of it fails.</a:t>
+            </a:r>
+          </a:p>
+          <a:p>
+            <a:pPr marL="0" indent="0">
+              <a:lnSpc>
+                <a:spcPct val="105000"/>
+              </a:lnSpc>
+              <a:spcBef>
+                <a:spcPts val="0"/>
+              </a:spcBef>
+              <a:spcAft>
+                <a:spcPts val="1000"/>
+              </a:spcAft>
+            </a:pPr>
+            <a:r>
+              <a:rPr sz="1700" b="1" i="0">
+                <a:solidFill>
+                  <a:srgbClr val="EDAB0C"/>
+                </a:solidFill>
+                <a:latin typeface="Roboto"/>
+              </a:rPr>
+              <a:t>■  </a:t>
+            </a:r>
+            <a:r>
+              <a:rPr sz="1700" b="0" i="0">
+                <a:solidFill>
+                  <a:srgbClr val="2A2929"/>
+                </a:solidFill>
+                <a:latin typeface="Roboto"/>
+              </a:rPr>
+              <a:t>This is the front half of the DR plan: the requirements and the impact analysis.</a:t>
+            </a:r>
+          </a:p>
+          <a:p>
+            <a:pPr marL="0" indent="0">
+              <a:lnSpc>
+                <a:spcPct val="105000"/>
+              </a:lnSpc>
+              <a:spcBef>
+                <a:spcPts val="0"/>
+              </a:spcBef>
+              <a:spcAft>
+                <a:spcPts val="1000"/>
+              </a:spcAft>
+            </a:pPr>
+            <a:r>
+              <a:rPr sz="1700" b="1" i="0">
+                <a:solidFill>
+                  <a:srgbClr val="EDAB0C"/>
+                </a:solidFill>
+                <a:latin typeface="Roboto"/>
+              </a:rPr>
+              <a:t>■  </a:t>
+            </a:r>
+            <a:r>
+              <a:rPr sz="1700" b="0" i="0">
+                <a:solidFill>
+                  <a:srgbClr val="2A2929"/>
+                </a:solidFill>
+                <a:latin typeface="Roboto"/>
+              </a:rPr>
+              <a:t>You establish what recovery must achieve, then analyse the risks that threaten it.</a:t>
+            </a:r>
+          </a:p>
+          <a:p>
+            <a:pPr marL="0" indent="0">
+              <a:lnSpc>
+                <a:spcPct val="105000"/>
+              </a:lnSpc>
+              <a:spcBef>
+                <a:spcPts val="0"/>
+              </a:spcBef>
+              <a:spcAft>
+                <a:spcPts val="1000"/>
+              </a:spcAft>
+            </a:pPr>
+            <a:r>
+              <a:rPr sz="1700" b="1" i="0">
+                <a:solidFill>
+                  <a:srgbClr val="EDAB0C"/>
+                </a:solidFill>
+                <a:latin typeface="Roboto"/>
+              </a:rPr>
+              <a:t>■  </a:t>
+            </a:r>
+            <a:r>
+              <a:rPr sz="1700" b="0" i="0">
+                <a:solidFill>
+                  <a:srgbClr val="2A2929"/>
+                </a:solidFill>
+                <a:latin typeface="Roboto"/>
+              </a:rPr>
+              <a:t>Analysis only — the strategy and the written plan are Topic 4.</a:t>
+            </a:r>
+          </a:p>
+        </p:txBody>
+      </p:sp>
+      <p:pic>
+        <p:nvPicPr>
+          <p:cNvPr id="5" name="Picture 4" descr="gen-cafb4c1f.png"/>
+          <p:cNvPicPr>
+            <a:picLocks noChangeAspect="1"/>
+          </p:cNvPicPr>
+          <p:nvPr/>
+        </p:nvPicPr>
+        <p:blipFill>
+          <a:blip r:embed="rId2"/>
+          <a:stretch>
+            <a:fillRect/>
+          </a:stretch>
+        </p:blipFill>
+        <p:spPr>
+          <a:xfrm>
+            <a:off x="6949440" y="1783080"/>
+            <a:ext cx="4023360" cy="4023360"/>
+          </a:xfrm>
+          <a:prstGeom prst="rect">
+            <a:avLst/>
+          </a:prstGeom>
+        </p:spPr>
+      </p:pic>
+      <p:sp>
+        <p:nvSpPr>
+          <p:cNvPr id="6" name="Rectangle 5"/>
+          <p:cNvSpPr/>
+          <p:nvPr/>
+        </p:nvSpPr>
+        <p:spPr>
+          <a:xfrm>
+            <a:off x="0" y="6565392"/>
+            <a:ext cx="12191695" cy="38100"/>
+          </a:xfrm>
+          <a:prstGeom prst="rect">
+            <a:avLst/>
+          </a:prstGeom>
+          <a:solidFill>
+            <a:srgbClr val="EDAB0C"/>
+          </a:solidFill>
+          <a:ln>
+            <a:noFill/>
+          </a:ln>
+          <a:effectLst/>
+        </p:spPr>
+        <p:style>
+          <a:lnRef idx="1">
+            <a:schemeClr val="accent1"/>
+          </a:lnRef>
+          <a:fillRef idx="3">
+            <a:schemeClr val="accent1"/>
+          </a:fillRef>
+          <a:effectRef idx="2">
+            <a:schemeClr val="accent1"/>
+          </a:effectRef>
+          <a:fontRef idx="minor">
+            <a:schemeClr val="lt1"/>
+          </a:fontRef>
+        </p:style>
+        <p:txBody>
+          <a:bodyPr rtlCol="0" anchor="ctr"/>
+          <a:lstStyle/>
+          <a:p>
+            <a:pPr algn="ctr"/>
+          </a:p>
+        </p:txBody>
+      </p:sp>
+      <p:sp>
+        <p:nvSpPr>
+          <p:cNvPr id="7" name="TextBox 6"/>
+          <p:cNvSpPr txBox="1"/>
+          <p:nvPr/>
+        </p:nvSpPr>
+        <p:spPr>
+          <a:xfrm>
+            <a:off x="502920" y="6400800"/>
+            <a:ext cx="5486400" cy="320040"/>
+          </a:xfrm>
+          <a:prstGeom prst="rect">
+            <a:avLst/>
+          </a:prstGeom>
+          <a:noFill/>
+        </p:spPr>
+        <p:txBody>
+          <a:bodyPr wrap="square" anchor="t" lIns="0" rIns="0" tIns="0" bIns="0">
+            <a:spAutoFit/>
+          </a:bodyPr>
+          <a:lstStyle/>
+          <a:p>
+            <a:r>
+              <a:rPr sz="1100" b="1" i="0">
+                <a:solidFill>
+                  <a:srgbClr val="2A2929"/>
+                </a:solidFill>
+                <a:latin typeface="Roboto"/>
+              </a:rPr>
+              <a:t>Kangan </a:t>
+            </a:r>
+            <a:r>
+              <a:rPr sz="1100" b="1" i="0">
+                <a:solidFill>
+                  <a:srgbClr val="D68E10"/>
+                </a:solidFill>
+                <a:latin typeface="Roboto"/>
+              </a:rPr>
+              <a:t>Institute</a:t>
+            </a:r>
+          </a:p>
+        </p:txBody>
+      </p:sp>
+      <p:sp>
+        <p:nvSpPr>
+          <p:cNvPr id="8" name="TextBox 7"/>
+          <p:cNvSpPr txBox="1"/>
+          <p:nvPr/>
+        </p:nvSpPr>
+        <p:spPr>
+          <a:xfrm>
+            <a:off x="10515600" y="6400800"/>
+            <a:ext cx="1188720" cy="320040"/>
+          </a:xfrm>
+          <a:prstGeom prst="rect">
+            <a:avLst/>
+          </a:prstGeom>
+          <a:noFill/>
+        </p:spPr>
+        <p:txBody>
+          <a:bodyPr wrap="square" anchor="t" lIns="0" rIns="0" tIns="0" bIns="0">
+            <a:spAutoFit/>
+          </a:bodyPr>
+          <a:lstStyle/>
+          <a:p>
+            <a:pPr algn="r"/>
+            <a:r>
+              <a:rPr sz="1100" b="0" i="0">
+                <a:solidFill>
+                  <a:srgbClr val="7A7A7A"/>
+                </a:solidFill>
+                <a:latin typeface="Roboto"/>
+              </a:rPr>
+              <a:t>1</a:t>
+            </a:r>
+          </a:p>
+        </p:txBody>
+      </p:sp>
+    </p:spTree>
+  </p:cSld>
+  <p:clrMapOvr>
+    <a:masterClrMapping/>
+  </p:clrMapOvr>
+</p:sld>
+</file>
+
+<file path=ppt/slides/slide20.xml><?xml version="1.0" encoding="utf-8"?>
+<p:sld xmlns:a="http://schemas.openxmlformats.org/drawingml/2006/main" xmlns:p="http://schemas.openxmlformats.org/presentationml/2006/main" xmlns:r="http://schemas.openxmlformats.org/officeDocument/2006/relationships">
+  <p:cSld>
+    <p:bg>
+      <p:bgPr>
+        <a:solidFill>
+          <a:srgbClr val="FFFFFF"/>
+        </a:solidFill>
+        <a:effectLst/>
+      </p:bgPr>
+    </p:bg>
+    <p:spTree>
+      <p:nvGrpSpPr>
+        <p:cNvPr id="1" name=""/>
+        <p:cNvGrpSpPr/>
+        <p:nvPr/>
+      </p:nvGrpSpPr>
+      <p:grpSpPr/>
+      <p:sp>
+        <p:nvSpPr>
+          <p:cNvPr id="2" name="TextBox 1"/>
+          <p:cNvSpPr txBox="1"/>
+          <p:nvPr/>
+        </p:nvSpPr>
+        <p:spPr>
+          <a:xfrm>
+            <a:off x="640080" y="457200"/>
+            <a:ext cx="10881360" cy="960120"/>
+          </a:xfrm>
+          <a:prstGeom prst="rect">
+            <a:avLst/>
+          </a:prstGeom>
+          <a:noFill/>
+        </p:spPr>
+        <p:txBody>
+          <a:bodyPr wrap="square" anchor="t" lIns="0" rIns="0" tIns="0" bIns="0">
+            <a:spAutoFit/>
+          </a:bodyPr>
+          <a:lstStyle/>
+          <a:p>
+            <a:r>
+              <a:rPr sz="2800" b="1" i="0">
+                <a:solidFill>
+                  <a:srgbClr val="2A2929"/>
+                </a:solidFill>
+                <a:latin typeface="Roboto"/>
+              </a:rPr>
+              <a:t>Risk register — worked shape</a:t>
+            </a:r>
+          </a:p>
+        </p:txBody>
+      </p:sp>
+      <p:sp>
+        <p:nvSpPr>
+          <p:cNvPr id="3" name="Rectangle 2"/>
+          <p:cNvSpPr/>
+          <p:nvPr/>
+        </p:nvSpPr>
+        <p:spPr>
+          <a:xfrm>
+            <a:off x="658368" y="1371600"/>
+            <a:ext cx="1463040" cy="50800"/>
+          </a:xfrm>
+          <a:prstGeom prst="rect">
+            <a:avLst/>
+          </a:prstGeom>
+          <a:solidFill>
+            <a:srgbClr val="205F61"/>
+          </a:solidFill>
+          <a:ln>
+            <a:noFill/>
+          </a:ln>
+          <a:effectLst/>
+        </p:spPr>
+        <p:style>
+          <a:lnRef idx="1">
+            <a:schemeClr val="accent1"/>
+          </a:lnRef>
+          <a:fillRef idx="3">
+            <a:schemeClr val="accent1"/>
+          </a:fillRef>
+          <a:effectRef idx="2">
+            <a:schemeClr val="accent1"/>
+          </a:effectRef>
+          <a:fontRef idx="minor">
+            <a:schemeClr val="lt1"/>
+          </a:fontRef>
+        </p:style>
+        <p:txBody>
+          <a:bodyPr rtlCol="0" anchor="ctr"/>
+          <a:lstStyle/>
+          <a:p>
+            <a:pPr algn="ctr"/>
+          </a:p>
+        </p:txBody>
+      </p:sp>
       <p:graphicFrame>
         <p:nvGraphicFramePr>
           <p:cNvPr id="4" name="Table 3"/>
@@ -7997,7 +8970,7 @@
         </p:nvGraphicFramePr>
         <p:xfrm>
           <a:off x="658368" y="1828800"/>
-          <a:ext cx="10881360" cy="1828800"/>
+          <a:ext cx="10881360" cy="2286000"/>
         </p:xfrm>
         <a:graphic>
           <a:graphicData uri="http://schemas.openxmlformats.org/drawingml/2006/table">
@@ -8024,7 +8997,7 @@
                           </a:solidFill>
                           <a:latin typeface="Roboto"/>
                         </a:rPr>
-                        <a:t>Risk event</a:t>
+                        <a:t>Event</a:t>
                       </a:r>
                     </a:p>
                   </a:txBody>
@@ -8090,7 +9063,7 @@
                           </a:solidFill>
                           <a:latin typeface="Roboto"/>
                         </a:rPr>
-                        <a:t>Severity</a:t>
+                        <a:t>Rank</a:t>
                       </a:r>
                     </a:p>
                   </a:txBody>
@@ -8114,7 +9087,7 @@
                           </a:solidFill>
                           <a:latin typeface="Roboto"/>
                         </a:rPr>
-                        <a:t>AZ outage in the primary region</a:t>
+                        <a:t>Zone outage</a:t>
                       </a:r>
                     </a:p>
                   </a:txBody>
@@ -8136,7 +9109,7 @@
                           </a:solidFill>
                           <a:latin typeface="Roboto"/>
                         </a:rPr>
-                        <a:t>Low</a:t>
+                        <a:t>possible</a:t>
                       </a:r>
                     </a:p>
                   </a:txBody>
@@ -8158,7 +9131,7 @@
                           </a:solidFill>
                           <a:latin typeface="Roboto"/>
                         </a:rPr>
-                        <a:t>High</a:t>
+                        <a:t>service degraded, capacity halved</a:t>
                       </a:r>
                     </a:p>
                   </a:txBody>
@@ -8180,7 +9153,7 @@
                           </a:solidFill>
                           <a:latin typeface="Roboto"/>
                         </a:rPr>
-                        <a:t>High</a:t>
+                        <a:t>2</a:t>
                       </a:r>
                     </a:p>
                   </a:txBody>
@@ -8204,7 +9177,7 @@
                           </a:solidFill>
                           <a:latin typeface="Roboto"/>
                         </a:rPr>
-                        <a:t>Data corruption / bad deploy</a:t>
+                        <a:t>Region outage</a:t>
                       </a:r>
                     </a:p>
                   </a:txBody>
@@ -8226,7 +9199,7 @@
                           </a:solidFill>
                           <a:latin typeface="Roboto"/>
                         </a:rPr>
-                        <a:t>Medium</a:t>
+                        <a:t>rare</a:t>
                       </a:r>
                     </a:p>
                   </a:txBody>
@@ -8248,7 +9221,7 @@
                           </a:solidFill>
                           <a:latin typeface="Roboto"/>
                         </a:rPr>
-                        <a:t>High</a:t>
+                        <a:t>full outage, recovery from backup</a:t>
                       </a:r>
                     </a:p>
                   </a:txBody>
@@ -8270,7 +9243,7 @@
                           </a:solidFill>
                           <a:latin typeface="Roboto"/>
                         </a:rPr>
-                        <a:t>High</a:t>
+                        <a:t>3</a:t>
                       </a:r>
                     </a:p>
                   </a:txBody>
@@ -8294,7 +9267,7 @@
                           </a:solidFill>
                           <a:latin typeface="Roboto"/>
                         </a:rPr>
-                        <a:t>Accidental deletion (human error)</a:t>
+                        <a:t>Credential compromise</a:t>
                       </a:r>
                     </a:p>
                   </a:txBody>
@@ -8316,7 +9289,7 @@
                           </a:solidFill>
                           <a:latin typeface="Roboto"/>
                         </a:rPr>
-                        <a:t>Medium</a:t>
+                        <a:t>possible</a:t>
                       </a:r>
                     </a:p>
                   </a:txBody>
@@ -8338,7 +9311,7 @@
                           </a:solidFill>
                           <a:latin typeface="Roboto"/>
                         </a:rPr>
-                        <a:t>Medium</a:t>
+                        <a:t>data exposure, obligation breach</a:t>
                       </a:r>
                     </a:p>
                   </a:txBody>
@@ -8360,7 +9333,7 @@
                           </a:solidFill>
                           <a:latin typeface="Roboto"/>
                         </a:rPr>
-                        <a:t>Medium</a:t>
+                        <a:t>1</a:t>
                       </a:r>
                     </a:p>
                   </a:txBody>
@@ -8371,6 +9344,96 @@
                   </a:tcPr>
                 </a:tc>
               </a:tr>
+              <a:tr h="457200">
+                <a:tc>
+                  <a:txBody>
+                    <a:bodyPr/>
+                    <a:lstStyle/>
+                    <a:p>
+                      <a:r>
+                        <a:rPr sz="1300" b="0" i="0">
+                          <a:solidFill>
+                            <a:srgbClr val="2A2929"/>
+                          </a:solidFill>
+                          <a:latin typeface="Roboto"/>
+                        </a:rPr>
+                        <a:t>Volumetric attack</a:t>
+                      </a:r>
+                    </a:p>
+                  </a:txBody>
+                  <a:tcPr marL="76200" marR="76200" marT="50800" marB="50800">
+                    <a:solidFill>
+                      <a:srgbClr val="F9F9F9"/>
+                    </a:solidFill>
+                  </a:tcPr>
+                </a:tc>
+                <a:tc>
+                  <a:txBody>
+                    <a:bodyPr/>
+                    <a:lstStyle/>
+                    <a:p>
+                      <a:r>
+                        <a:rPr sz="1300" b="0" i="0">
+                          <a:solidFill>
+                            <a:srgbClr val="2A2929"/>
+                          </a:solidFill>
+                          <a:latin typeface="Roboto"/>
+                        </a:rPr>
+                        <a:t>likely</a:t>
+                      </a:r>
+                    </a:p>
+                  </a:txBody>
+                  <a:tcPr marL="76200" marR="76200" marT="50800" marB="50800">
+                    <a:solidFill>
+                      <a:srgbClr val="F9F9F9"/>
+                    </a:solidFill>
+                  </a:tcPr>
+                </a:tc>
+                <a:tc>
+                  <a:txBody>
+                    <a:bodyPr/>
+                    <a:lstStyle/>
+                    <a:p>
+                      <a:r>
+                        <a:rPr sz="1300" b="0" i="0">
+                          <a:solidFill>
+                            <a:srgbClr val="2A2929"/>
+                          </a:solidFill>
+                          <a:latin typeface="Roboto"/>
+                        </a:rPr>
+                        <a:t>front door degraded for hours</a:t>
+                      </a:r>
+                    </a:p>
+                  </a:txBody>
+                  <a:tcPr marL="76200" marR="76200" marT="50800" marB="50800">
+                    <a:solidFill>
+                      <a:srgbClr val="F9F9F9"/>
+                    </a:solidFill>
+                  </a:tcPr>
+                </a:tc>
+                <a:tc>
+                  <a:txBody>
+                    <a:bodyPr/>
+                    <a:lstStyle/>
+                    <a:p>
+                      <a:r>
+                        <a:rPr sz="1300" b="0" i="0">
+                          <a:solidFill>
+                            <a:srgbClr val="2A2929"/>
+                          </a:solidFill>
+                          <a:latin typeface="Roboto"/>
+                        </a:rPr>
+                        <a:t>4</a:t>
+                      </a:r>
+                    </a:p>
+                  </a:txBody>
+                  <a:tcPr marL="76200" marR="76200" marT="50800" marB="50800">
+                    <a:solidFill>
+                      <a:srgbClr val="F9F9F9"/>
+                    </a:solidFill>
+                  </a:tcPr>
+                </a:tc>
+              </a:tr>
             </a:tbl>
           </a:graphicData>
         </a:graphic>
@@ -8404,7 +9467,7 @@
                 </a:solidFill>
                 <a:latin typeface="Roboto Light"/>
               </a:rPr>
-              <a:t>Score every event on the same scale; severity ranks the recovery priority.</a:t>
+              <a:t>A worked shape, not an answer — the practice scenario's events, ratings and ranks are the student's own.</a:t>
             </a:r>
           </a:p>
         </p:txBody>
@@ -8526,7 +9589,7 @@
                 </a:solidFill>
                 <a:latin typeface="Roboto"/>
               </a:rPr>
-              <a:t>14</a:t>
+              <a:t>16</a:t>
             </a:r>
           </a:p>
         </p:txBody>
@@ -8539,7 +9602,482 @@
 </p:sld>
 </file>
 
-<file path=ppt/slides/slide19.xml><?xml version="1.0" encoding="utf-8"?>
+<file path=ppt/slides/slide21.xml><?xml version="1.0" encoding="utf-8"?>
+<p:sld xmlns:a="http://schemas.openxmlformats.org/drawingml/2006/main" xmlns:p="http://schemas.openxmlformats.org/presentationml/2006/main" xmlns:r="http://schemas.openxmlformats.org/officeDocument/2006/relationships">
+  <p:cSld>
+    <p:bg>
+      <p:bgPr>
+        <a:solidFill>
+          <a:srgbClr val="FFFFFF"/>
+        </a:solidFill>
+        <a:effectLst/>
+      </p:bgPr>
+    </p:bg>
+    <p:spTree>
+      <p:nvGrpSpPr>
+        <p:cNvPr id="1" name=""/>
+        <p:cNvGrpSpPr/>
+        <p:nvPr/>
+      </p:nvGrpSpPr>
+      <p:grpSpPr/>
+      <p:sp>
+        <p:nvSpPr>
+          <p:cNvPr id="2" name="Rectangle 1"/>
+          <p:cNvSpPr/>
+          <p:nvPr/>
+        </p:nvSpPr>
+        <p:spPr>
+          <a:xfrm>
+            <a:off x="0" y="0"/>
+            <a:ext cx="12191695" cy="1234440"/>
+          </a:xfrm>
+          <a:prstGeom prst="rect">
+            <a:avLst/>
+          </a:prstGeom>
+          <a:solidFill>
+            <a:srgbClr val="205F61"/>
+          </a:solidFill>
+          <a:ln>
+            <a:noFill/>
+          </a:ln>
+          <a:effectLst/>
+        </p:spPr>
+        <p:style>
+          <a:lnRef idx="1">
+            <a:schemeClr val="accent1"/>
+          </a:lnRef>
+          <a:fillRef idx="3">
+            <a:schemeClr val="accent1"/>
+          </a:fillRef>
+          <a:effectRef idx="2">
+            <a:schemeClr val="accent1"/>
+          </a:effectRef>
+          <a:fontRef idx="minor">
+            <a:schemeClr val="lt1"/>
+          </a:fontRef>
+        </p:style>
+        <p:txBody>
+          <a:bodyPr rtlCol="0" anchor="ctr"/>
+          <a:lstStyle/>
+          <a:p>
+            <a:pPr algn="ctr"/>
+          </a:p>
+        </p:txBody>
+      </p:sp>
+      <p:sp>
+        <p:nvSpPr>
+          <p:cNvPr id="3" name="Rounded Rectangle 2"/>
+          <p:cNvSpPr/>
+          <p:nvPr/>
+        </p:nvSpPr>
+        <p:spPr>
+          <a:xfrm>
+            <a:off x="640080" y="384048"/>
+            <a:ext cx="1691640" cy="457200"/>
+          </a:xfrm>
+          <a:prstGeom prst="roundRect">
+            <a:avLst/>
+          </a:prstGeom>
+          <a:solidFill>
+            <a:srgbClr val="2A2929"/>
+          </a:solidFill>
+          <a:ln>
+            <a:noFill/>
+          </a:ln>
+          <a:effectLst/>
+        </p:spPr>
+        <p:style>
+          <a:lnRef idx="1">
+            <a:schemeClr val="accent1"/>
+          </a:lnRef>
+          <a:fillRef idx="3">
+            <a:schemeClr val="accent1"/>
+          </a:fillRef>
+          <a:effectRef idx="2">
+            <a:schemeClr val="accent1"/>
+          </a:effectRef>
+          <a:fontRef idx="minor">
+            <a:schemeClr val="lt1"/>
+          </a:fontRef>
+        </p:style>
+        <p:txBody>
+          <a:bodyPr rtlCol="0" anchor="ctr"/>
+          <a:lstStyle/>
+          <a:p>
+            <a:pPr algn="ctr"/>
+            <a:r>
+              <a:rPr sz="1400" b="1" i="0">
+                <a:solidFill>
+                  <a:srgbClr val="FBB900"/>
+                </a:solidFill>
+                <a:latin typeface="Roboto"/>
+              </a:rPr>
+              <a:t>ACTIVITY</a:t>
+            </a:r>
+          </a:p>
+        </p:txBody>
+      </p:sp>
+      <p:sp>
+        <p:nvSpPr>
+          <p:cNvPr id="4" name="TextBox 3"/>
+          <p:cNvSpPr txBox="1"/>
+          <p:nvPr/>
+        </p:nvSpPr>
+        <p:spPr>
+          <a:xfrm>
+            <a:off x="2560320" y="310896"/>
+            <a:ext cx="8961120" cy="685800"/>
+          </a:xfrm>
+          <a:prstGeom prst="rect">
+            <a:avLst/>
+          </a:prstGeom>
+          <a:noFill/>
+        </p:spPr>
+        <p:txBody>
+          <a:bodyPr wrap="square" anchor="ctr" lIns="0" rIns="0" tIns="0" bIns="0">
+            <a:spAutoFit/>
+          </a:bodyPr>
+          <a:lstStyle/>
+          <a:p>
+            <a:r>
+              <a:rPr sz="2600" b="1" i="0">
+                <a:solidFill>
+                  <a:srgbClr val="FFFFFF"/>
+                </a:solidFill>
+                <a:latin typeface="Roboto"/>
+              </a:rPr>
+              <a:t>Risks, exclusions and impact</a:t>
+            </a:r>
+          </a:p>
+        </p:txBody>
+      </p:sp>
+      <p:sp>
+        <p:nvSpPr>
+          <p:cNvPr id="5" name="TextBox 4"/>
+          <p:cNvSpPr txBox="1"/>
+          <p:nvPr/>
+        </p:nvSpPr>
+        <p:spPr>
+          <a:xfrm>
+            <a:off x="658368" y="1554480"/>
+            <a:ext cx="10881360" cy="4297680"/>
+          </a:xfrm>
+          <a:prstGeom prst="rect">
+            <a:avLst/>
+          </a:prstGeom>
+          <a:noFill/>
+        </p:spPr>
+        <p:txBody>
+          <a:bodyPr wrap="square" anchor="t" lIns="0" rIns="0" tIns="0" bIns="0">
+            <a:spAutoFit/>
+          </a:bodyPr>
+          <a:lstStyle/>
+          <a:p>
+            <a:pPr marL="0" indent="0">
+              <a:lnSpc>
+                <a:spcPct val="105000"/>
+              </a:lnSpc>
+              <a:spcBef>
+                <a:spcPts val="0"/>
+              </a:spcBef>
+              <a:spcAft>
+                <a:spcPts val="1000"/>
+              </a:spcAft>
+            </a:pPr>
+            <a:r>
+              <a:rPr sz="1700" b="1" i="0">
+                <a:solidFill>
+                  <a:srgbClr val="EDAB0C"/>
+                </a:solidFill>
+                <a:latin typeface="Roboto"/>
+              </a:rPr>
+              <a:t>■  </a:t>
+            </a:r>
+            <a:r>
+              <a:rPr sz="1700" b="0" i="0">
+                <a:solidFill>
+                  <a:srgbClr val="2A2929"/>
+                </a:solidFill>
+                <a:latin typeface="Roboto"/>
+              </a:rPr>
+              <a:t>Workbook — tasks 25, 26 and 27.</a:t>
+            </a:r>
+          </a:p>
+          <a:p>
+            <a:pPr marL="0" indent="0">
+              <a:lnSpc>
+                <a:spcPct val="105000"/>
+              </a:lnSpc>
+              <a:spcBef>
+                <a:spcPts val="0"/>
+              </a:spcBef>
+              <a:spcAft>
+                <a:spcPts val="1000"/>
+              </a:spcAft>
+            </a:pPr>
+            <a:r>
+              <a:rPr sz="1700" b="1" i="0">
+                <a:solidFill>
+                  <a:srgbClr val="EDAB0C"/>
+                </a:solidFill>
+                <a:latin typeface="Roboto"/>
+              </a:rPr>
+              <a:t>■  </a:t>
+            </a:r>
+            <a:r>
+              <a:rPr sz="1700" b="0" i="0">
+                <a:solidFill>
+                  <a:srgbClr val="2A2929"/>
+                </a:solidFill>
+                <a:latin typeface="Roboto"/>
+              </a:rPr>
+              <a:t>Assess the major risk events, record what the plan excludes and why, then record the outcomes of the impact analysis in business terms.</a:t>
+            </a:r>
+          </a:p>
+          <a:p>
+            <a:pPr marL="0" indent="0">
+              <a:lnSpc>
+                <a:spcPct val="105000"/>
+              </a:lnSpc>
+              <a:spcBef>
+                <a:spcPts val="0"/>
+              </a:spcBef>
+              <a:spcAft>
+                <a:spcPts val="1000"/>
+              </a:spcAft>
+            </a:pPr>
+            <a:r>
+              <a:rPr sz="1700" b="1" i="0">
+                <a:solidFill>
+                  <a:srgbClr val="EDAB0C"/>
+                </a:solidFill>
+                <a:latin typeface="Roboto"/>
+              </a:rPr>
+              <a:t>■  </a:t>
+            </a:r>
+            <a:r>
+              <a:rPr sz="1700" b="0" i="0">
+                <a:solidFill>
+                  <a:srgbClr val="2A2929"/>
+                </a:solidFill>
+                <a:latin typeface="Roboto"/>
+              </a:rPr>
+              <a:t>Then rehearse the assessment's Part B questions Q5 and Q6 — the risk environment, and your method — from your own register.</a:t>
+            </a:r>
+          </a:p>
+        </p:txBody>
+      </p:sp>
+      <p:sp>
+        <p:nvSpPr>
+          <p:cNvPr id="6" name="Rounded Rectangle 5"/>
+          <p:cNvSpPr/>
+          <p:nvPr/>
+        </p:nvSpPr>
+        <p:spPr>
+          <a:xfrm>
+            <a:off x="640080" y="5897880"/>
+            <a:ext cx="4023360" cy="457200"/>
+          </a:xfrm>
+          <a:prstGeom prst="roundRect">
+            <a:avLst/>
+          </a:prstGeom>
+          <a:solidFill>
+            <a:srgbClr val="F9F9F9"/>
+          </a:solidFill>
+          <a:ln w="12700">
+            <a:solidFill>
+              <a:srgbClr val="CCCCCC"/>
+            </a:solidFill>
+          </a:ln>
+          <a:effectLst/>
+        </p:spPr>
+        <p:style>
+          <a:lnRef idx="1">
+            <a:schemeClr val="accent1"/>
+          </a:lnRef>
+          <a:fillRef idx="3">
+            <a:schemeClr val="accent1"/>
+          </a:fillRef>
+          <a:effectRef idx="2">
+            <a:schemeClr val="accent1"/>
+          </a:effectRef>
+          <a:fontRef idx="minor">
+            <a:schemeClr val="lt1"/>
+          </a:fontRef>
+        </p:style>
+        <p:txBody>
+          <a:bodyPr rtlCol="0" anchor="ctr"/>
+          <a:lstStyle/>
+          <a:p>
+            <a:pPr algn="ctr"/>
+          </a:p>
+        </p:txBody>
+      </p:sp>
+      <p:sp>
+        <p:nvSpPr>
+          <p:cNvPr id="7" name="TextBox 6"/>
+          <p:cNvSpPr txBox="1"/>
+          <p:nvPr/>
+        </p:nvSpPr>
+        <p:spPr>
+          <a:xfrm>
+            <a:off x="822960" y="5943600"/>
+            <a:ext cx="3657600" cy="365760"/>
+          </a:xfrm>
+          <a:prstGeom prst="rect">
+            <a:avLst/>
+          </a:prstGeom>
+          <a:noFill/>
+        </p:spPr>
+        <p:txBody>
+          <a:bodyPr wrap="square" anchor="ctr" lIns="0" rIns="0" tIns="0" bIns="0">
+            <a:spAutoFit/>
+          </a:bodyPr>
+          <a:lstStyle/>
+          <a:p>
+            <a:r>
+              <a:rPr sz="1500" b="1" i="0">
+                <a:solidFill>
+                  <a:srgbClr val="2A2929"/>
+                </a:solidFill>
+                <a:latin typeface="Roboto"/>
+              </a:rPr>
+              <a:t>⏱  ~35 min</a:t>
+            </a:r>
+          </a:p>
+        </p:txBody>
+      </p:sp>
+      <p:sp>
+        <p:nvSpPr>
+          <p:cNvPr id="8" name="Rectangle 7"/>
+          <p:cNvSpPr/>
+          <p:nvPr/>
+        </p:nvSpPr>
+        <p:spPr>
+          <a:xfrm>
+            <a:off x="0" y="6565392"/>
+            <a:ext cx="12191695" cy="38100"/>
+          </a:xfrm>
+          <a:prstGeom prst="rect">
+            <a:avLst/>
+          </a:prstGeom>
+          <a:solidFill>
+            <a:srgbClr val="205F61"/>
+          </a:solidFill>
+          <a:ln>
+            <a:noFill/>
+          </a:ln>
+          <a:effectLst/>
+        </p:spPr>
+        <p:style>
+          <a:lnRef idx="1">
+            <a:schemeClr val="accent1"/>
+          </a:lnRef>
+          <a:fillRef idx="3">
+            <a:schemeClr val="accent1"/>
+          </a:fillRef>
+          <a:effectRef idx="2">
+            <a:schemeClr val="accent1"/>
+          </a:effectRef>
+          <a:fontRef idx="minor">
+            <a:schemeClr val="lt1"/>
+          </a:fontRef>
+        </p:style>
+        <p:txBody>
+          <a:bodyPr rtlCol="0" anchor="ctr"/>
+          <a:lstStyle/>
+          <a:p>
+            <a:pPr algn="ctr"/>
+          </a:p>
+        </p:txBody>
+      </p:sp>
+      <p:sp>
+        <p:nvSpPr>
+          <p:cNvPr id="9" name="TextBox 8"/>
+          <p:cNvSpPr txBox="1"/>
+          <p:nvPr/>
+        </p:nvSpPr>
+        <p:spPr>
+          <a:xfrm>
+            <a:off x="502920" y="6400800"/>
+            <a:ext cx="5486400" cy="320040"/>
+          </a:xfrm>
+          <a:prstGeom prst="rect">
+            <a:avLst/>
+          </a:prstGeom>
+          <a:noFill/>
+        </p:spPr>
+        <p:txBody>
+          <a:bodyPr wrap="square" anchor="t" lIns="0" rIns="0" tIns="0" bIns="0">
+            <a:spAutoFit/>
+          </a:bodyPr>
+          <a:lstStyle/>
+          <a:p>
+            <a:r>
+              <a:rPr sz="1100" b="1" i="0">
+                <a:solidFill>
+                  <a:srgbClr val="2A2929"/>
+                </a:solidFill>
+                <a:latin typeface="Roboto"/>
+              </a:rPr>
+              <a:t>Kangan </a:t>
+            </a:r>
+            <a:r>
+              <a:rPr sz="1100" b="1" i="0">
+                <a:solidFill>
+                  <a:srgbClr val="D68E10"/>
+                </a:solidFill>
+                <a:latin typeface="Roboto"/>
+              </a:rPr>
+              <a:t>Institute</a:t>
+            </a:r>
+          </a:p>
+        </p:txBody>
+      </p:sp>
+      <p:sp>
+        <p:nvSpPr>
+          <p:cNvPr id="10" name="TextBox 9"/>
+          <p:cNvSpPr txBox="1"/>
+          <p:nvPr/>
+        </p:nvSpPr>
+        <p:spPr>
+          <a:xfrm>
+            <a:off x="10515600" y="6400800"/>
+            <a:ext cx="1188720" cy="320040"/>
+          </a:xfrm>
+          <a:prstGeom prst="rect">
+            <a:avLst/>
+          </a:prstGeom>
+          <a:noFill/>
+        </p:spPr>
+        <p:txBody>
+          <a:bodyPr wrap="square" anchor="t" lIns="0" rIns="0" tIns="0" bIns="0">
+            <a:spAutoFit/>
+          </a:bodyPr>
+          <a:lstStyle/>
+          <a:p>
+            <a:pPr algn="r"/>
+            <a:r>
+              <a:rPr sz="1100" b="0" i="0">
+                <a:solidFill>
+                  <a:srgbClr val="7A7A7A"/>
+                </a:solidFill>
+                <a:latin typeface="Roboto"/>
+              </a:rPr>
+              <a:t>17</a:t>
+            </a:r>
+          </a:p>
+        </p:txBody>
+      </p:sp>
+    </p:spTree>
+  </p:cSld>
+  <p:clrMapOvr>
+    <a:masterClrMapping/>
+  </p:clrMapOvr>
+</p:sld>
+</file>
+
+<file path=ppt/slides/slide22.xml><?xml version="1.0" encoding="utf-8"?>
 <p:sld xmlns:a="http://schemas.openxmlformats.org/drawingml/2006/main" xmlns:p="http://schemas.openxmlformats.org/presentationml/2006/main" xmlns:r="http://schemas.openxmlformats.org/officeDocument/2006/relationships">
   <p:cSld>
     <p:bg>
@@ -8775,7 +10313,7 @@
                 </a:solidFill>
                 <a:latin typeface="Roboto"/>
               </a:rPr>
-              <a:t>DR requirements come from business needs; the plan is tested against them.</a:t>
+              <a:t>Requirements first, each testable; objectives from business tolerances.</a:t>
             </a:r>
           </a:p>
         </p:txBody>
@@ -8904,7 +10442,7 @@
                 </a:solidFill>
                 <a:latin typeface="Roboto"/>
               </a:rPr>
-              <a:t>RTO/RPO express how fast and how recent recovery must be — set to the need.</a:t>
+              <a:t>Two clocks: RTO and RPO. A measured quantity of data.</a:t>
             </a:r>
           </a:p>
         </p:txBody>
@@ -9033,7 +10571,7 @@
                 </a:solidFill>
                 <a:latin typeface="Roboto"/>
               </a:rPr>
-              <a:t>Assess at least three risks by likelihood x impact = severity; record exclusions.</a:t>
+              <a:t>A defensible method, honest ratings, stated exclusions, business-terms impact.</a:t>
             </a:r>
           </a:p>
         </p:txBody>
@@ -9046,54 +10584,8 @@
         </p:nvSpPr>
         <p:spPr>
           <a:xfrm>
-            <a:off x="640080" y="4818888"/>
-            <a:ext cx="10927080" cy="841248"/>
-          </a:xfrm>
-          <a:prstGeom prst="rect">
-            <a:avLst/>
-          </a:prstGeom>
-          <a:solidFill>
-            <a:srgbClr val="FFFFFF"/>
-          </a:solidFill>
-          <a:ln w="12700">
-            <a:solidFill>
-              <a:srgbClr val="CCCCCC"/>
-            </a:solidFill>
-          </a:ln>
-          <a:effectLst/>
-        </p:spPr>
-        <p:style>
-          <a:lnRef idx="1">
-            <a:schemeClr val="accent1"/>
-          </a:lnRef>
-          <a:fillRef idx="3">
-            <a:schemeClr val="accent1"/>
-          </a:fillRef>
-          <a:effectRef idx="2">
-            <a:schemeClr val="accent1"/>
-          </a:effectRef>
-          <a:fontRef idx="minor">
-            <a:schemeClr val="lt1"/>
-          </a:fontRef>
-        </p:style>
-        <p:txBody>
-          <a:bodyPr rtlCol="0" anchor="ctr"/>
-          <a:lstStyle/>
-          <a:p>
-            <a:pPr algn="ctr"/>
-          </a:p>
-        </p:txBody>
-      </p:sp>
-      <p:sp>
-        <p:nvSpPr>
-          <p:cNvPr id="14" name="Rectangle 13"/>
-          <p:cNvSpPr/>
-          <p:nvPr/>
-        </p:nvSpPr>
-        <p:spPr>
-          <a:xfrm>
-            <a:off x="640080" y="4818888"/>
-            <a:ext cx="109728" cy="841248"/>
+            <a:off x="0" y="6565392"/>
+            <a:ext cx="12191695" cy="38100"/>
           </a:xfrm>
           <a:prstGeom prst="rect">
             <a:avLst/>
@@ -9130,90 +10622,7 @@
       </p:sp>
       <p:sp>
         <p:nvSpPr>
-          <p:cNvPr id="15" name="TextBox 14"/>
-          <p:cNvSpPr txBox="1"/>
-          <p:nvPr/>
-        </p:nvSpPr>
-        <p:spPr>
-          <a:xfrm>
-            <a:off x="960120" y="4818888"/>
-            <a:ext cx="10424160" cy="841248"/>
-          </a:xfrm>
-          <a:prstGeom prst="rect">
-            <a:avLst/>
-          </a:prstGeom>
-          <a:noFill/>
-        </p:spPr>
-        <p:txBody>
-          <a:bodyPr wrap="square" anchor="ctr" lIns="0" rIns="0" tIns="0" bIns="0">
-            <a:spAutoFit/>
-          </a:bodyPr>
-          <a:lstStyle/>
-          <a:p>
-            <a:pPr>
-              <a:lnSpc>
-                <a:spcPct val="100000"/>
-              </a:lnSpc>
-            </a:pPr>
-            <a:r>
-              <a:rPr sz="1700" b="0" i="0">
-                <a:solidFill>
-                  <a:srgbClr val="2A2929"/>
-                </a:solidFill>
-                <a:latin typeface="Roboto"/>
-              </a:rPr>
-              <a:t>Document the impact analysis — it is the input to the Topic 4 plan.</a:t>
-            </a:r>
-          </a:p>
-        </p:txBody>
-      </p:sp>
-      <p:sp>
-        <p:nvSpPr>
-          <p:cNvPr id="16" name="Rectangle 15"/>
-          <p:cNvSpPr/>
-          <p:nvPr/>
-        </p:nvSpPr>
-        <p:spPr>
-          <a:xfrm>
-            <a:off x="0" y="6565392"/>
-            <a:ext cx="12191695" cy="38100"/>
-          </a:xfrm>
-          <a:prstGeom prst="rect">
-            <a:avLst/>
-          </a:prstGeom>
-          <a:solidFill>
-            <a:srgbClr val="205F61"/>
-          </a:solidFill>
-          <a:ln>
-            <a:noFill/>
-          </a:ln>
-          <a:effectLst/>
-        </p:spPr>
-        <p:style>
-          <a:lnRef idx="1">
-            <a:schemeClr val="accent1"/>
-          </a:lnRef>
-          <a:fillRef idx="3">
-            <a:schemeClr val="accent1"/>
-          </a:fillRef>
-          <a:effectRef idx="2">
-            <a:schemeClr val="accent1"/>
-          </a:effectRef>
-          <a:fontRef idx="minor">
-            <a:schemeClr val="lt1"/>
-          </a:fontRef>
-        </p:style>
-        <p:txBody>
-          <a:bodyPr rtlCol="0" anchor="ctr"/>
-          <a:lstStyle/>
-          <a:p>
-            <a:pPr algn="ctr"/>
-          </a:p>
-        </p:txBody>
-      </p:sp>
-      <p:sp>
-        <p:nvSpPr>
-          <p:cNvPr id="17" name="TextBox 16"/>
+          <p:cNvPr id="14" name="TextBox 13"/>
           <p:cNvSpPr txBox="1"/>
           <p:nvPr/>
         </p:nvSpPr>
@@ -9256,7 +10665,7 @@
       </p:sp>
       <p:sp>
         <p:nvSpPr>
-          <p:cNvPr id="18" name="TextBox 17"/>
+          <p:cNvPr id="15" name="TextBox 14"/>
           <p:cNvSpPr txBox="1"/>
           <p:nvPr/>
         </p:nvSpPr>
@@ -9284,7 +10693,7 @@
                 </a:solidFill>
                 <a:latin typeface="Roboto"/>
               </a:rPr>
-              <a:t>15</a:t>
+              <a:t>18</a:t>
             </a:r>
           </a:p>
         </p:txBody>
@@ -9297,404 +10706,7 @@
 </p:sld>
 </file>
 
-<file path=ppt/slides/slide2.xml><?xml version="1.0" encoding="utf-8"?>
-<p:sld xmlns:a="http://schemas.openxmlformats.org/drawingml/2006/main" xmlns:p="http://schemas.openxmlformats.org/presentationml/2006/main" xmlns:r="http://schemas.openxmlformats.org/officeDocument/2006/relationships">
-  <p:cSld>
-    <p:bg>
-      <p:bgPr>
-        <a:solidFill>
-          <a:srgbClr val="FFFFFF"/>
-        </a:solidFill>
-        <a:effectLst/>
-      </p:bgPr>
-    </p:bg>
-    <p:spTree>
-      <p:nvGrpSpPr>
-        <p:cNvPr id="1" name=""/>
-        <p:cNvGrpSpPr/>
-        <p:nvPr/>
-      </p:nvGrpSpPr>
-      <p:grpSpPr/>
-      <p:sp>
-        <p:nvSpPr>
-          <p:cNvPr id="2" name="TextBox 1"/>
-          <p:cNvSpPr txBox="1"/>
-          <p:nvPr/>
-        </p:nvSpPr>
-        <p:spPr>
-          <a:xfrm>
-            <a:off x="640080" y="457200"/>
-            <a:ext cx="10881360" cy="960120"/>
-          </a:xfrm>
-          <a:prstGeom prst="rect">
-            <a:avLst/>
-          </a:prstGeom>
-          <a:noFill/>
-        </p:spPr>
-        <p:txBody>
-          <a:bodyPr wrap="square" anchor="t" lIns="0" rIns="0" tIns="0" bIns="0">
-            <a:spAutoFit/>
-          </a:bodyPr>
-          <a:lstStyle/>
-          <a:p>
-            <a:r>
-              <a:rPr sz="2800" b="1" i="0">
-                <a:solidFill>
-                  <a:srgbClr val="2A2929"/>
-                </a:solidFill>
-                <a:latin typeface="Roboto"/>
-              </a:rPr>
-              <a:t>From design to disaster recovery</a:t>
-            </a:r>
-          </a:p>
-        </p:txBody>
-      </p:sp>
-      <p:sp>
-        <p:nvSpPr>
-          <p:cNvPr id="3" name="Rectangle 2"/>
-          <p:cNvSpPr/>
-          <p:nvPr/>
-        </p:nvSpPr>
-        <p:spPr>
-          <a:xfrm>
-            <a:off x="658368" y="1371600"/>
-            <a:ext cx="1463040" cy="50800"/>
-          </a:xfrm>
-          <a:prstGeom prst="rect">
-            <a:avLst/>
-          </a:prstGeom>
-          <a:solidFill>
-            <a:srgbClr val="EDAB0C"/>
-          </a:solidFill>
-          <a:ln>
-            <a:noFill/>
-          </a:ln>
-          <a:effectLst/>
-        </p:spPr>
-        <p:style>
-          <a:lnRef idx="1">
-            <a:schemeClr val="accent1"/>
-          </a:lnRef>
-          <a:fillRef idx="3">
-            <a:schemeClr val="accent1"/>
-          </a:fillRef>
-          <a:effectRef idx="2">
-            <a:schemeClr val="accent1"/>
-          </a:effectRef>
-          <a:fontRef idx="minor">
-            <a:schemeClr val="lt1"/>
-          </a:fontRef>
-        </p:style>
-        <p:txBody>
-          <a:bodyPr rtlCol="0" anchor="ctr"/>
-          <a:lstStyle/>
-          <a:p>
-            <a:pPr algn="ctr"/>
-          </a:p>
-        </p:txBody>
-      </p:sp>
-      <p:sp>
-        <p:nvSpPr>
-          <p:cNvPr id="4" name="TextBox 3"/>
-          <p:cNvSpPr txBox="1"/>
-          <p:nvPr/>
-        </p:nvSpPr>
-        <p:spPr>
-          <a:xfrm>
-            <a:off x="658368" y="1737360"/>
-            <a:ext cx="5486400" cy="4297680"/>
-          </a:xfrm>
-          <a:prstGeom prst="rect">
-            <a:avLst/>
-          </a:prstGeom>
-          <a:noFill/>
-        </p:spPr>
-        <p:txBody>
-          <a:bodyPr wrap="square" anchor="t" lIns="0" rIns="0" tIns="0" bIns="0">
-            <a:spAutoFit/>
-          </a:bodyPr>
-          <a:lstStyle/>
-          <a:p>
-            <a:pPr marL="0" indent="0">
-              <a:lnSpc>
-                <a:spcPct val="105000"/>
-              </a:lnSpc>
-              <a:spcBef>
-                <a:spcPts val="0"/>
-              </a:spcBef>
-              <a:spcAft>
-                <a:spcPts val="1000"/>
-              </a:spcAft>
-            </a:pPr>
-            <a:r>
-              <a:rPr sz="1700" b="1" i="0">
-                <a:solidFill>
-                  <a:srgbClr val="EDAB0C"/>
-                </a:solidFill>
-                <a:latin typeface="Roboto"/>
-              </a:rPr>
-              <a:t>■  </a:t>
-            </a:r>
-            <a:r>
-              <a:rPr sz="1700" b="0" i="0">
-                <a:solidFill>
-                  <a:srgbClr val="2A2929"/>
-                </a:solidFill>
-                <a:latin typeface="Roboto"/>
-              </a:rPr>
-              <a:t>Topics 1–2 designed the system; Topic 3 asks what happens when part of it fails.</a:t>
-            </a:r>
-          </a:p>
-          <a:p>
-            <a:pPr marL="0" indent="0">
-              <a:lnSpc>
-                <a:spcPct val="105000"/>
-              </a:lnSpc>
-              <a:spcBef>
-                <a:spcPts val="0"/>
-              </a:spcBef>
-              <a:spcAft>
-                <a:spcPts val="1000"/>
-              </a:spcAft>
-            </a:pPr>
-            <a:r>
-              <a:rPr sz="1700" b="1" i="0">
-                <a:solidFill>
-                  <a:srgbClr val="EDAB0C"/>
-                </a:solidFill>
-                <a:latin typeface="Roboto"/>
-              </a:rPr>
-              <a:t>■  </a:t>
-            </a:r>
-            <a:r>
-              <a:rPr sz="1700" b="0" i="0">
-                <a:solidFill>
-                  <a:srgbClr val="2A2929"/>
-                </a:solidFill>
-                <a:latin typeface="Roboto"/>
-              </a:rPr>
-              <a:t>This is the front half of the DR plan: the requirements and the impact analysis.</a:t>
-            </a:r>
-          </a:p>
-          <a:p>
-            <a:pPr marL="0" indent="0">
-              <a:lnSpc>
-                <a:spcPct val="105000"/>
-              </a:lnSpc>
-              <a:spcBef>
-                <a:spcPts val="0"/>
-              </a:spcBef>
-              <a:spcAft>
-                <a:spcPts val="1000"/>
-              </a:spcAft>
-            </a:pPr>
-            <a:r>
-              <a:rPr sz="1700" b="1" i="0">
-                <a:solidFill>
-                  <a:srgbClr val="EDAB0C"/>
-                </a:solidFill>
-                <a:latin typeface="Roboto"/>
-              </a:rPr>
-              <a:t>■  </a:t>
-            </a:r>
-            <a:r>
-              <a:rPr sz="1700" b="0" i="0">
-                <a:solidFill>
-                  <a:srgbClr val="2A2929"/>
-                </a:solidFill>
-                <a:latin typeface="Roboto"/>
-              </a:rPr>
-              <a:t>You establish what recovery must achieve, then analyse the risks that threaten it.</a:t>
-            </a:r>
-          </a:p>
-          <a:p>
-            <a:pPr marL="0" indent="0">
-              <a:lnSpc>
-                <a:spcPct val="105000"/>
-              </a:lnSpc>
-              <a:spcBef>
-                <a:spcPts val="0"/>
-              </a:spcBef>
-              <a:spcAft>
-                <a:spcPts val="1000"/>
-              </a:spcAft>
-            </a:pPr>
-            <a:r>
-              <a:rPr sz="1700" b="1" i="0">
-                <a:solidFill>
-                  <a:srgbClr val="EDAB0C"/>
-                </a:solidFill>
-                <a:latin typeface="Roboto"/>
-              </a:rPr>
-              <a:t>■  </a:t>
-            </a:r>
-            <a:r>
-              <a:rPr sz="1700" b="0" i="0">
-                <a:solidFill>
-                  <a:srgbClr val="2A2929"/>
-                </a:solidFill>
-                <a:latin typeface="Roboto"/>
-              </a:rPr>
-              <a:t>Analysis only — the strategy and the written plan are Topic 4.</a:t>
-            </a:r>
-          </a:p>
-        </p:txBody>
-      </p:sp>
-      <p:pic>
-        <p:nvPicPr>
-          <p:cNvPr id="5" name="Picture 4" descr="gen-cafb4c1f.png"/>
-          <p:cNvPicPr>
-            <a:picLocks noChangeAspect="1"/>
-          </p:cNvPicPr>
-          <p:nvPr/>
-        </p:nvPicPr>
-        <p:blipFill>
-          <a:blip r:embed="rId2"/>
-          <a:stretch>
-            <a:fillRect/>
-          </a:stretch>
-        </p:blipFill>
-        <p:spPr>
-          <a:xfrm>
-            <a:off x="6949440" y="1783080"/>
-            <a:ext cx="4023360" cy="4023360"/>
-          </a:xfrm>
-          <a:prstGeom prst="rect">
-            <a:avLst/>
-          </a:prstGeom>
-        </p:spPr>
-      </p:pic>
-      <p:sp>
-        <p:nvSpPr>
-          <p:cNvPr id="6" name="Rectangle 5"/>
-          <p:cNvSpPr/>
-          <p:nvPr/>
-        </p:nvSpPr>
-        <p:spPr>
-          <a:xfrm>
-            <a:off x="0" y="6565392"/>
-            <a:ext cx="12191695" cy="38100"/>
-          </a:xfrm>
-          <a:prstGeom prst="rect">
-            <a:avLst/>
-          </a:prstGeom>
-          <a:solidFill>
-            <a:srgbClr val="EDAB0C"/>
-          </a:solidFill>
-          <a:ln>
-            <a:noFill/>
-          </a:ln>
-          <a:effectLst/>
-        </p:spPr>
-        <p:style>
-          <a:lnRef idx="1">
-            <a:schemeClr val="accent1"/>
-          </a:lnRef>
-          <a:fillRef idx="3">
-            <a:schemeClr val="accent1"/>
-          </a:fillRef>
-          <a:effectRef idx="2">
-            <a:schemeClr val="accent1"/>
-          </a:effectRef>
-          <a:fontRef idx="minor">
-            <a:schemeClr val="lt1"/>
-          </a:fontRef>
-        </p:style>
-        <p:txBody>
-          <a:bodyPr rtlCol="0" anchor="ctr"/>
-          <a:lstStyle/>
-          <a:p>
-            <a:pPr algn="ctr"/>
-          </a:p>
-        </p:txBody>
-      </p:sp>
-      <p:sp>
-        <p:nvSpPr>
-          <p:cNvPr id="7" name="TextBox 6"/>
-          <p:cNvSpPr txBox="1"/>
-          <p:nvPr/>
-        </p:nvSpPr>
-        <p:spPr>
-          <a:xfrm>
-            <a:off x="502920" y="6400800"/>
-            <a:ext cx="5486400" cy="320040"/>
-          </a:xfrm>
-          <a:prstGeom prst="rect">
-            <a:avLst/>
-          </a:prstGeom>
-          <a:noFill/>
-        </p:spPr>
-        <p:txBody>
-          <a:bodyPr wrap="square" anchor="t" lIns="0" rIns="0" tIns="0" bIns="0">
-            <a:spAutoFit/>
-          </a:bodyPr>
-          <a:lstStyle/>
-          <a:p>
-            <a:r>
-              <a:rPr sz="1100" b="1" i="0">
-                <a:solidFill>
-                  <a:srgbClr val="2A2929"/>
-                </a:solidFill>
-                <a:latin typeface="Roboto"/>
-              </a:rPr>
-              <a:t>Kangan </a:t>
-            </a:r>
-            <a:r>
-              <a:rPr sz="1100" b="1" i="0">
-                <a:solidFill>
-                  <a:srgbClr val="D68E10"/>
-                </a:solidFill>
-                <a:latin typeface="Roboto"/>
-              </a:rPr>
-              <a:t>Institute</a:t>
-            </a:r>
-          </a:p>
-        </p:txBody>
-      </p:sp>
-      <p:sp>
-        <p:nvSpPr>
-          <p:cNvPr id="8" name="TextBox 7"/>
-          <p:cNvSpPr txBox="1"/>
-          <p:nvPr/>
-        </p:nvSpPr>
-        <p:spPr>
-          <a:xfrm>
-            <a:off x="10515600" y="6400800"/>
-            <a:ext cx="1188720" cy="320040"/>
-          </a:xfrm>
-          <a:prstGeom prst="rect">
-            <a:avLst/>
-          </a:prstGeom>
-          <a:noFill/>
-        </p:spPr>
-        <p:txBody>
-          <a:bodyPr wrap="square" anchor="t" lIns="0" rIns="0" tIns="0" bIns="0">
-            <a:spAutoFit/>
-          </a:bodyPr>
-          <a:lstStyle/>
-          <a:p>
-            <a:pPr algn="r"/>
-            <a:r>
-              <a:rPr sz="1100" b="0" i="0">
-                <a:solidFill>
-                  <a:srgbClr val="7A7A7A"/>
-                </a:solidFill>
-                <a:latin typeface="Roboto"/>
-              </a:rPr>
-              <a:t>1</a:t>
-            </a:r>
-          </a:p>
-        </p:txBody>
-      </p:sp>
-    </p:spTree>
-  </p:cSld>
-  <p:clrMapOvr>
-    <a:masterClrMapping/>
-  </p:clrMapOvr>
-</p:sld>
-</file>
-
-<file path=ppt/slides/slide20.xml><?xml version="1.0" encoding="utf-8"?>
+<file path=ppt/slides/slide23.xml><?xml version="1.0" encoding="utf-8"?>
 <p:sld xmlns:a="http://schemas.openxmlformats.org/drawingml/2006/main" xmlns:p="http://schemas.openxmlformats.org/presentationml/2006/main" xmlns:r="http://schemas.openxmlformats.org/officeDocument/2006/relationships">
   <p:cSld>
     <p:bg>
@@ -9785,7 +10797,7 @@
                 </a:solidFill>
                 <a:latin typeface="Roboto"/>
               </a:rPr>
-              <a:t>Next: Topic 4 — strategy &amp; plan</a:t>
+              <a:t>Next: Topic 4 — strategy and plan</a:t>
             </a:r>
           </a:p>
           <a:p>
@@ -9804,7 +10816,7 @@
                 </a:solidFill>
                 <a:latin typeface="Roboto Light"/>
               </a:rPr>
-              <a:t>You've set the requirements, objectives and impact analysis — the front half of the DR lifecycle.</a:t>
+              <a:t>The analysis is done: targets set, risks ranked, impact recorded.</a:t>
             </a:r>
           </a:p>
           <a:p>
@@ -9823,7 +10835,7 @@
                 </a:solidFill>
                 <a:latin typeface="Roboto Light"/>
               </a:rPr>
-              <a:t>Next you choose a recovery strategy and write the documented DR plan.</a:t>
+              <a:t>Next you choose the recovery strategy that answers it, and write the plan.</a:t>
             </a:r>
           </a:p>
         </p:txBody>
@@ -9977,7 +10989,7 @@
                 </a:solidFill>
                 <a:latin typeface="Roboto"/>
               </a:rPr>
-              <a:t>Plan requirements &amp; current recovery position</a:t>
+              <a:t>Requirements, and the current recovery position</a:t>
             </a:r>
           </a:p>
           <a:p>
@@ -10615,7 +11627,7 @@
                 </a:solidFill>
                 <a:latin typeface="Roboto"/>
               </a:rPr>
-              <a:t>Read the engagement brief: which systems are business-critical, and to whom.</a:t>
+              <a:t>Read the brief: which systems are business-critical, and to whom.</a:t>
             </a:r>
           </a:p>
           <a:p>
@@ -10646,7 +11658,7 @@
                 </a:solidFill>
                 <a:latin typeface="Roboto"/>
               </a:rPr>
-              <a:t>Requirements come from the business — enrolment front-door uptime, financial-record integrity, residency.</a:t>
+              <a:t>Requirements mix availability, integrity and compliance — the business sets each tolerance.</a:t>
             </a:r>
           </a:p>
           <a:p>
@@ -10859,7 +11871,7 @@
                 </a:solidFill>
                 <a:latin typeface="Roboto"/>
               </a:rPr>
-              <a:t>Current recovery position &amp; vendor provisions</a:t>
+              <a:t>Current recovery position and vendor provisions</a:t>
             </a:r>
           </a:p>
         </p:txBody>
@@ -10957,7 +11969,7 @@
                 </a:solidFill>
                 <a:latin typeface="Roboto"/>
               </a:rPr>
-              <a:t>Determine the existing organisational recovery arrangements — what's already in place, and its gaps.</a:t>
+              <a:t>Determine the existing recovery arrangements — what's already in place, and its gaps.</a:t>
             </a:r>
           </a:p>
           <a:p>
@@ -10988,7 +12000,7 @@
                 </a:solidFill>
                 <a:latin typeface="Roboto"/>
               </a:rPr>
-              <a:t>Identify the cloud vendor's DR provisions and SLAs: what the provider guarantees vs what you must add.</a:t>
+              <a:t>Identify the vendor's DR provisions and SLAs: what the provider guarantees versus what you must add.</a:t>
             </a:r>
           </a:p>
           <a:p>
@@ -11019,7 +12031,7 @@
                 </a:solidFill>
                 <a:latin typeface="Roboto"/>
               </a:rPr>
-              <a:t>The plan builds on the vendor's native durability, it doesn't reinvent it.</a:t>
+              <a:t>The plan builds on the vendor's native durability; it doesn't reinvent it.</a:t>
             </a:r>
           </a:p>
         </p:txBody>
@@ -11298,7 +12310,7 @@
                 </a:solidFill>
                 <a:latin typeface="Roboto"/>
               </a:rPr>
-              <a:t>Gather requirements &amp; current position</a:t>
+              <a:t>Requirements and current position</a:t>
             </a:r>
           </a:p>
         </p:txBody>
@@ -11352,7 +12364,7 @@
                 </a:solidFill>
                 <a:latin typeface="Roboto"/>
               </a:rPr>
-              <a:t>For the practice scenario, list the DR plan requirements from the business needs.</a:t>
+              <a:t>Workbook — tasks 20, 21 and 22.</a:t>
             </a:r>
           </a:p>
           <a:p>
@@ -11383,7 +12395,7 @@
                 </a:solidFill>
                 <a:latin typeface="Roboto"/>
               </a:rPr>
-              <a:t>Record the current recovery arrangements and the relevant vendor DR provisions/SLAs.</a:t>
+              <a:t>Record the recovery requirements from the business needs, the existing recovery arrangements, and the vendor provisions and SLAs that apply.</a:t>
             </a:r>
           </a:p>
         </p:txBody>
@@ -11463,7 +12475,7 @@
                 </a:solidFill>
                 <a:latin typeface="Roboto"/>
               </a:rPr>
-              <a:t>⏱  ~20 min</a:t>
+              <a:t>⏱  ~25 min</a:t>
             </a:r>
           </a:p>
         </p:txBody>
@@ -11604,7 +12616,7 @@
     <p:bg>
       <p:bgPr>
         <a:solidFill>
-          <a:srgbClr val="FFFFFF"/>
+          <a:srgbClr val="F9F9F9"/>
         </a:solidFill>
         <a:effectLst/>
       </p:bgPr>
@@ -11618,20 +12630,70 @@
       <p:grpSpPr/>
       <p:sp>
         <p:nvSpPr>
-          <p:cNvPr id="2" name="Rectangle 1"/>
+          <p:cNvPr id="2" name="TextBox 1"/>
+          <p:cNvSpPr txBox="1"/>
+          <p:nvPr/>
+        </p:nvSpPr>
+        <p:spPr>
+          <a:xfrm>
+            <a:off x="640080" y="548640"/>
+            <a:ext cx="10881360" cy="1097280"/>
+          </a:xfrm>
+          <a:prstGeom prst="rect">
+            <a:avLst/>
+          </a:prstGeom>
+          <a:noFill/>
+        </p:spPr>
+        <p:txBody>
+          <a:bodyPr wrap="square" anchor="t" lIns="0" rIns="0" tIns="0" bIns="0">
+            <a:spAutoFit/>
+          </a:bodyPr>
+          <a:lstStyle/>
+          <a:p>
+            <a:r>
+              <a:rPr sz="3200" b="1" i="0">
+                <a:solidFill>
+                  <a:srgbClr val="2A2929"/>
+                </a:solidFill>
+                <a:latin typeface="Roboto"/>
+              </a:rPr>
+              <a:t>Key takeaways</a:t>
+            </a:r>
+          </a:p>
+          <a:p>
+            <a:pPr>
+              <a:spcBef>
+                <a:spcPts val="200"/>
+              </a:spcBef>
+            </a:pPr>
+            <a:r>
+              <a:rPr sz="1800" b="1" i="0">
+                <a:solidFill>
+                  <a:srgbClr val="92268F"/>
+                </a:solidFill>
+                <a:latin typeface="Roboto"/>
+              </a:rPr>
+              <a:t>Section 1 · The inputs</a:t>
+            </a:r>
+          </a:p>
+        </p:txBody>
+      </p:sp>
+      <p:sp>
+        <p:nvSpPr>
+          <p:cNvPr id="3" name="Rectangle 2"/>
           <p:cNvSpPr/>
           <p:nvPr/>
         </p:nvSpPr>
         <p:spPr>
           <a:xfrm>
-            <a:off x="0" y="0"/>
-            <a:ext cx="3931920" cy="6858000"/>
+            <a:off x="658368" y="1600200"/>
+            <a:ext cx="1463040" cy="50800"/>
           </a:xfrm>
           <a:prstGeom prst="rect">
             <a:avLst/>
           </a:prstGeom>
           <a:solidFill>
-            <a:srgbClr val="27B5CE"/>
+            <a:srgbClr val="92268F"/>
           </a:solidFill>
           <a:ln>
             <a:noFill/>
@@ -11662,101 +12724,47 @@
       </p:sp>
       <p:sp>
         <p:nvSpPr>
-          <p:cNvPr id="3" name="TextBox 2"/>
-          <p:cNvSpPr txBox="1"/>
-          <p:nvPr/>
-        </p:nvSpPr>
-        <p:spPr>
-          <a:xfrm>
-            <a:off x="365760" y="2103120"/>
-            <a:ext cx="3291840" cy="2194560"/>
-          </a:xfrm>
-          <a:prstGeom prst="rect">
-            <a:avLst/>
-          </a:prstGeom>
-          <a:noFill/>
-        </p:spPr>
-        <p:txBody>
-          <a:bodyPr wrap="square" anchor="t" lIns="0" rIns="0" tIns="0" bIns="0">
-            <a:spAutoFit/>
-          </a:bodyPr>
-          <a:lstStyle/>
-          <a:p>
-            <a:r>
-              <a:rPr sz="13000" b="1" i="0">
-                <a:solidFill>
-                  <a:srgbClr val="FFFFFF"/>
-                </a:solidFill>
-                <a:latin typeface="Roboto"/>
-              </a:rPr>
-              <a:t>02</a:t>
-            </a:r>
-          </a:p>
-        </p:txBody>
-      </p:sp>
-      <p:sp>
-        <p:nvSpPr>
-          <p:cNvPr id="4" name="TextBox 3"/>
-          <p:cNvSpPr txBox="1"/>
-          <p:nvPr/>
-        </p:nvSpPr>
-        <p:spPr>
-          <a:xfrm>
-            <a:off x="4480560" y="2468880"/>
-            <a:ext cx="7132320" cy="2194560"/>
-          </a:xfrm>
-          <a:prstGeom prst="rect">
-            <a:avLst/>
-          </a:prstGeom>
-          <a:noFill/>
-        </p:spPr>
-        <p:txBody>
-          <a:bodyPr wrap="square" anchor="t" lIns="0" rIns="0" tIns="0" bIns="0">
-            <a:spAutoFit/>
-          </a:bodyPr>
-          <a:lstStyle/>
-          <a:p>
-            <a:r>
-              <a:rPr sz="1600" b="1" i="0">
-                <a:solidFill>
-                  <a:srgbClr val="27B5CE"/>
-                </a:solidFill>
-                <a:latin typeface="Roboto"/>
-              </a:rPr>
-              <a:t>SECTION</a:t>
-            </a:r>
-          </a:p>
-          <a:p>
-            <a:pPr>
-              <a:spcBef>
-                <a:spcPts val="600"/>
-              </a:spcBef>
-            </a:pPr>
-            <a:r>
-              <a:rPr sz="3800" b="1" i="0">
-                <a:solidFill>
-                  <a:srgbClr val="2A2929"/>
-                </a:solidFill>
-                <a:latin typeface="Roboto"/>
-              </a:rPr>
-              <a:t>Recovery objectives &amp; data managed</a:t>
-            </a:r>
-          </a:p>
-          <a:p>
-            <a:pPr>
-              <a:spcBef>
-                <a:spcPts val="1000"/>
-              </a:spcBef>
-            </a:pPr>
-            <a:r>
-              <a:rPr sz="2000" b="0" i="1">
-                <a:solidFill>
-                  <a:srgbClr val="484848"/>
-                </a:solidFill>
-                <a:latin typeface="Roboto Light"/>
-              </a:rPr>
-              <a:t>how fast, how recent, how much</a:t>
-            </a:r>
+          <p:cNvPr id="4" name="Rectangle 3"/>
+          <p:cNvSpPr/>
+          <p:nvPr/>
+        </p:nvSpPr>
+        <p:spPr>
+          <a:xfrm>
+            <a:off x="640080" y="1965960"/>
+            <a:ext cx="10927080" cy="841248"/>
+          </a:xfrm>
+          <a:prstGeom prst="rect">
+            <a:avLst/>
+          </a:prstGeom>
+          <a:solidFill>
+            <a:srgbClr val="FFFFFF"/>
+          </a:solidFill>
+          <a:ln w="12700">
+            <a:solidFill>
+              <a:srgbClr val="CCCCCC"/>
+            </a:solidFill>
+          </a:ln>
+          <a:effectLst/>
+        </p:spPr>
+        <p:style>
+          <a:lnRef idx="1">
+            <a:schemeClr val="accent1"/>
+          </a:lnRef>
+          <a:fillRef idx="3">
+            <a:schemeClr val="accent1"/>
+          </a:fillRef>
+          <a:effectRef idx="2">
+            <a:schemeClr val="accent1"/>
+          </a:effectRef>
+          <a:fontRef idx="minor">
+            <a:schemeClr val="lt1"/>
+          </a:fontRef>
+        </p:style>
+        <p:txBody>
+          <a:bodyPr rtlCol="0" anchor="ctr"/>
+          <a:lstStyle/>
+          <a:p>
+            <a:pPr algn="ctr"/>
           </a:p>
         </p:txBody>
       </p:sp>
@@ -11768,14 +12776,14 @@
         </p:nvSpPr>
         <p:spPr>
           <a:xfrm>
-            <a:off x="0" y="6565392"/>
-            <a:ext cx="12191695" cy="38100"/>
+            <a:off x="640080" y="1965960"/>
+            <a:ext cx="109728" cy="841248"/>
           </a:xfrm>
           <a:prstGeom prst="rect">
             <a:avLst/>
           </a:prstGeom>
           <a:solidFill>
-            <a:srgbClr val="27B5CE"/>
+            <a:srgbClr val="92268F"/>
           </a:solidFill>
           <a:ln>
             <a:noFill/>
@@ -11812,6 +12820,347 @@
         </p:nvSpPr>
         <p:spPr>
           <a:xfrm>
+            <a:off x="960120" y="1965960"/>
+            <a:ext cx="10424160" cy="841248"/>
+          </a:xfrm>
+          <a:prstGeom prst="rect">
+            <a:avLst/>
+          </a:prstGeom>
+          <a:noFill/>
+        </p:spPr>
+        <p:txBody>
+          <a:bodyPr wrap="square" anchor="ctr" lIns="0" rIns="0" tIns="0" bIns="0">
+            <a:spAutoFit/>
+          </a:bodyPr>
+          <a:lstStyle/>
+          <a:p>
+            <a:pPr>
+              <a:lnSpc>
+                <a:spcPct val="100000"/>
+              </a:lnSpc>
+            </a:pPr>
+            <a:r>
+              <a:rPr sz="1700" b="0" i="0">
+                <a:solidFill>
+                  <a:srgbClr val="2A2929"/>
+                </a:solidFill>
+                <a:latin typeface="Roboto"/>
+              </a:rPr>
+              <a:t>Requirements before technology, each one testable.</a:t>
+            </a:r>
+          </a:p>
+        </p:txBody>
+      </p:sp>
+      <p:sp>
+        <p:nvSpPr>
+          <p:cNvPr id="7" name="Rectangle 6"/>
+          <p:cNvSpPr/>
+          <p:nvPr/>
+        </p:nvSpPr>
+        <p:spPr>
+          <a:xfrm>
+            <a:off x="640080" y="2916936"/>
+            <a:ext cx="10927080" cy="841248"/>
+          </a:xfrm>
+          <a:prstGeom prst="rect">
+            <a:avLst/>
+          </a:prstGeom>
+          <a:solidFill>
+            <a:srgbClr val="FFFFFF"/>
+          </a:solidFill>
+          <a:ln w="12700">
+            <a:solidFill>
+              <a:srgbClr val="CCCCCC"/>
+            </a:solidFill>
+          </a:ln>
+          <a:effectLst/>
+        </p:spPr>
+        <p:style>
+          <a:lnRef idx="1">
+            <a:schemeClr val="accent1"/>
+          </a:lnRef>
+          <a:fillRef idx="3">
+            <a:schemeClr val="accent1"/>
+          </a:fillRef>
+          <a:effectRef idx="2">
+            <a:schemeClr val="accent1"/>
+          </a:effectRef>
+          <a:fontRef idx="minor">
+            <a:schemeClr val="lt1"/>
+          </a:fontRef>
+        </p:style>
+        <p:txBody>
+          <a:bodyPr rtlCol="0" anchor="ctr"/>
+          <a:lstStyle/>
+          <a:p>
+            <a:pPr algn="ctr"/>
+          </a:p>
+        </p:txBody>
+      </p:sp>
+      <p:sp>
+        <p:nvSpPr>
+          <p:cNvPr id="8" name="Rectangle 7"/>
+          <p:cNvSpPr/>
+          <p:nvPr/>
+        </p:nvSpPr>
+        <p:spPr>
+          <a:xfrm>
+            <a:off x="640080" y="2916936"/>
+            <a:ext cx="109728" cy="841248"/>
+          </a:xfrm>
+          <a:prstGeom prst="rect">
+            <a:avLst/>
+          </a:prstGeom>
+          <a:solidFill>
+            <a:srgbClr val="92268F"/>
+          </a:solidFill>
+          <a:ln>
+            <a:noFill/>
+          </a:ln>
+          <a:effectLst/>
+        </p:spPr>
+        <p:style>
+          <a:lnRef idx="1">
+            <a:schemeClr val="accent1"/>
+          </a:lnRef>
+          <a:fillRef idx="3">
+            <a:schemeClr val="accent1"/>
+          </a:fillRef>
+          <a:effectRef idx="2">
+            <a:schemeClr val="accent1"/>
+          </a:effectRef>
+          <a:fontRef idx="minor">
+            <a:schemeClr val="lt1"/>
+          </a:fontRef>
+        </p:style>
+        <p:txBody>
+          <a:bodyPr rtlCol="0" anchor="ctr"/>
+          <a:lstStyle/>
+          <a:p>
+            <a:pPr algn="ctr"/>
+          </a:p>
+        </p:txBody>
+      </p:sp>
+      <p:sp>
+        <p:nvSpPr>
+          <p:cNvPr id="9" name="TextBox 8"/>
+          <p:cNvSpPr txBox="1"/>
+          <p:nvPr/>
+        </p:nvSpPr>
+        <p:spPr>
+          <a:xfrm>
+            <a:off x="960120" y="2916936"/>
+            <a:ext cx="10424160" cy="841248"/>
+          </a:xfrm>
+          <a:prstGeom prst="rect">
+            <a:avLst/>
+          </a:prstGeom>
+          <a:noFill/>
+        </p:spPr>
+        <p:txBody>
+          <a:bodyPr wrap="square" anchor="ctr" lIns="0" rIns="0" tIns="0" bIns="0">
+            <a:spAutoFit/>
+          </a:bodyPr>
+          <a:lstStyle/>
+          <a:p>
+            <a:pPr>
+              <a:lnSpc>
+                <a:spcPct val="100000"/>
+              </a:lnSpc>
+            </a:pPr>
+            <a:r>
+              <a:rPr sz="1700" b="0" i="0">
+                <a:solidFill>
+                  <a:srgbClr val="2A2929"/>
+                </a:solidFill>
+                <a:latin typeface="Roboto"/>
+              </a:rPr>
+              <a:t>Assess what's in place before designing what's missing.</a:t>
+            </a:r>
+          </a:p>
+        </p:txBody>
+      </p:sp>
+      <p:sp>
+        <p:nvSpPr>
+          <p:cNvPr id="10" name="Rectangle 9"/>
+          <p:cNvSpPr/>
+          <p:nvPr/>
+        </p:nvSpPr>
+        <p:spPr>
+          <a:xfrm>
+            <a:off x="640080" y="3867912"/>
+            <a:ext cx="10927080" cy="841248"/>
+          </a:xfrm>
+          <a:prstGeom prst="rect">
+            <a:avLst/>
+          </a:prstGeom>
+          <a:solidFill>
+            <a:srgbClr val="FFFFFF"/>
+          </a:solidFill>
+          <a:ln w="12700">
+            <a:solidFill>
+              <a:srgbClr val="CCCCCC"/>
+            </a:solidFill>
+          </a:ln>
+          <a:effectLst/>
+        </p:spPr>
+        <p:style>
+          <a:lnRef idx="1">
+            <a:schemeClr val="accent1"/>
+          </a:lnRef>
+          <a:fillRef idx="3">
+            <a:schemeClr val="accent1"/>
+          </a:fillRef>
+          <a:effectRef idx="2">
+            <a:schemeClr val="accent1"/>
+          </a:effectRef>
+          <a:fontRef idx="minor">
+            <a:schemeClr val="lt1"/>
+          </a:fontRef>
+        </p:style>
+        <p:txBody>
+          <a:bodyPr rtlCol="0" anchor="ctr"/>
+          <a:lstStyle/>
+          <a:p>
+            <a:pPr algn="ctr"/>
+          </a:p>
+        </p:txBody>
+      </p:sp>
+      <p:sp>
+        <p:nvSpPr>
+          <p:cNvPr id="11" name="Rectangle 10"/>
+          <p:cNvSpPr/>
+          <p:nvPr/>
+        </p:nvSpPr>
+        <p:spPr>
+          <a:xfrm>
+            <a:off x="640080" y="3867912"/>
+            <a:ext cx="109728" cy="841248"/>
+          </a:xfrm>
+          <a:prstGeom prst="rect">
+            <a:avLst/>
+          </a:prstGeom>
+          <a:solidFill>
+            <a:srgbClr val="92268F"/>
+          </a:solidFill>
+          <a:ln>
+            <a:noFill/>
+          </a:ln>
+          <a:effectLst/>
+        </p:spPr>
+        <p:style>
+          <a:lnRef idx="1">
+            <a:schemeClr val="accent1"/>
+          </a:lnRef>
+          <a:fillRef idx="3">
+            <a:schemeClr val="accent1"/>
+          </a:fillRef>
+          <a:effectRef idx="2">
+            <a:schemeClr val="accent1"/>
+          </a:effectRef>
+          <a:fontRef idx="minor">
+            <a:schemeClr val="lt1"/>
+          </a:fontRef>
+        </p:style>
+        <p:txBody>
+          <a:bodyPr rtlCol="0" anchor="ctr"/>
+          <a:lstStyle/>
+          <a:p>
+            <a:pPr algn="ctr"/>
+          </a:p>
+        </p:txBody>
+      </p:sp>
+      <p:sp>
+        <p:nvSpPr>
+          <p:cNvPr id="12" name="TextBox 11"/>
+          <p:cNvSpPr txBox="1"/>
+          <p:nvPr/>
+        </p:nvSpPr>
+        <p:spPr>
+          <a:xfrm>
+            <a:off x="960120" y="3867912"/>
+            <a:ext cx="10424160" cy="841248"/>
+          </a:xfrm>
+          <a:prstGeom prst="rect">
+            <a:avLst/>
+          </a:prstGeom>
+          <a:noFill/>
+        </p:spPr>
+        <p:txBody>
+          <a:bodyPr wrap="square" anchor="ctr" lIns="0" rIns="0" tIns="0" bIns="0">
+            <a:spAutoFit/>
+          </a:bodyPr>
+          <a:lstStyle/>
+          <a:p>
+            <a:pPr>
+              <a:lnSpc>
+                <a:spcPct val="100000"/>
+              </a:lnSpc>
+            </a:pPr>
+            <a:r>
+              <a:rPr sz="1700" b="0" i="0">
+                <a:solidFill>
+                  <a:srgbClr val="2A2929"/>
+                </a:solidFill>
+                <a:latin typeface="Roboto"/>
+              </a:rPr>
+              <a:t>The vendor guarantees some of it; your plan covers the rest.</a:t>
+            </a:r>
+          </a:p>
+        </p:txBody>
+      </p:sp>
+      <p:sp>
+        <p:nvSpPr>
+          <p:cNvPr id="13" name="Rectangle 12"/>
+          <p:cNvSpPr/>
+          <p:nvPr/>
+        </p:nvSpPr>
+        <p:spPr>
+          <a:xfrm>
+            <a:off x="0" y="6565392"/>
+            <a:ext cx="12191695" cy="38100"/>
+          </a:xfrm>
+          <a:prstGeom prst="rect">
+            <a:avLst/>
+          </a:prstGeom>
+          <a:solidFill>
+            <a:srgbClr val="92268F"/>
+          </a:solidFill>
+          <a:ln>
+            <a:noFill/>
+          </a:ln>
+          <a:effectLst/>
+        </p:spPr>
+        <p:style>
+          <a:lnRef idx="1">
+            <a:schemeClr val="accent1"/>
+          </a:lnRef>
+          <a:fillRef idx="3">
+            <a:schemeClr val="accent1"/>
+          </a:fillRef>
+          <a:effectRef idx="2">
+            <a:schemeClr val="accent1"/>
+          </a:effectRef>
+          <a:fontRef idx="minor">
+            <a:schemeClr val="lt1"/>
+          </a:fontRef>
+        </p:style>
+        <p:txBody>
+          <a:bodyPr rtlCol="0" anchor="ctr"/>
+          <a:lstStyle/>
+          <a:p>
+            <a:pPr algn="ctr"/>
+          </a:p>
+        </p:txBody>
+      </p:sp>
+      <p:sp>
+        <p:nvSpPr>
+          <p:cNvPr id="14" name="TextBox 13"/>
+          <p:cNvSpPr txBox="1"/>
+          <p:nvPr/>
+        </p:nvSpPr>
+        <p:spPr>
+          <a:xfrm>
             <a:off x="502920" y="6400800"/>
             <a:ext cx="5486400" cy="320040"/>
           </a:xfrm>
@@ -11849,7 +13198,7 @@
       </p:sp>
       <p:sp>
         <p:nvSpPr>
-          <p:cNvPr id="7" name="TextBox 6"/>
+          <p:cNvPr id="15" name="TextBox 14"/>
           <p:cNvSpPr txBox="1"/>
           <p:nvPr/>
         </p:nvSpPr>
@@ -11877,7 +13226,7 @@
                 </a:solidFill>
                 <a:latin typeface="Roboto"/>
               </a:rPr>
-              <a:t/>
+              <a:t>6</a:t>
             </a:r>
           </a:p>
         </p:txBody>
@@ -11910,48 +13259,14 @@
       <p:grpSpPr/>
       <p:sp>
         <p:nvSpPr>
-          <p:cNvPr id="2" name="TextBox 1"/>
-          <p:cNvSpPr txBox="1"/>
-          <p:nvPr/>
-        </p:nvSpPr>
-        <p:spPr>
-          <a:xfrm>
-            <a:off x="640080" y="457200"/>
-            <a:ext cx="10881360" cy="960120"/>
-          </a:xfrm>
-          <a:prstGeom prst="rect">
-            <a:avLst/>
-          </a:prstGeom>
-          <a:noFill/>
-        </p:spPr>
-        <p:txBody>
-          <a:bodyPr wrap="square" anchor="t" lIns="0" rIns="0" tIns="0" bIns="0">
-            <a:spAutoFit/>
-          </a:bodyPr>
-          <a:lstStyle/>
-          <a:p>
-            <a:r>
-              <a:rPr sz="2800" b="1" i="0">
-                <a:solidFill>
-                  <a:srgbClr val="2A2929"/>
-                </a:solidFill>
-                <a:latin typeface="Roboto"/>
-              </a:rPr>
-              <a:t>RTO &amp; RPO</a:t>
-            </a:r>
-          </a:p>
-        </p:txBody>
-      </p:sp>
-      <p:sp>
-        <p:nvSpPr>
-          <p:cNvPr id="3" name="Rectangle 2"/>
+          <p:cNvPr id="2" name="Rectangle 1"/>
           <p:cNvSpPr/>
           <p:nvPr/>
         </p:nvSpPr>
         <p:spPr>
           <a:xfrm>
-            <a:off x="658368" y="1371600"/>
-            <a:ext cx="1463040" cy="50800"/>
+            <a:off x="0" y="0"/>
+            <a:ext cx="3931920" cy="6858000"/>
           </a:xfrm>
           <a:prstGeom prst="rect">
             <a:avLst/>
@@ -11988,14 +13303,14 @@
       </p:sp>
       <p:sp>
         <p:nvSpPr>
-          <p:cNvPr id="4" name="TextBox 3"/>
+          <p:cNvPr id="3" name="TextBox 2"/>
           <p:cNvSpPr txBox="1"/>
           <p:nvPr/>
         </p:nvSpPr>
         <p:spPr>
           <a:xfrm>
-            <a:off x="658368" y="1737360"/>
-            <a:ext cx="5486400" cy="4297680"/>
+            <a:off x="365760" y="2103120"/>
+            <a:ext cx="3291840" cy="2194560"/>
           </a:xfrm>
           <a:prstGeom prst="rect">
             <a:avLst/>
@@ -12008,127 +13323,87 @@
           </a:bodyPr>
           <a:lstStyle/>
           <a:p>
-            <a:pPr marL="0" indent="0">
-              <a:lnSpc>
-                <a:spcPct val="105000"/>
-              </a:lnSpc>
+            <a:r>
+              <a:rPr sz="13000" b="1" i="0">
+                <a:solidFill>
+                  <a:srgbClr val="FFFFFF"/>
+                </a:solidFill>
+                <a:latin typeface="Roboto"/>
+              </a:rPr>
+              <a:t>02</a:t>
+            </a:r>
+          </a:p>
+        </p:txBody>
+      </p:sp>
+      <p:sp>
+        <p:nvSpPr>
+          <p:cNvPr id="4" name="TextBox 3"/>
+          <p:cNvSpPr txBox="1"/>
+          <p:nvPr/>
+        </p:nvSpPr>
+        <p:spPr>
+          <a:xfrm>
+            <a:off x="4480560" y="2468880"/>
+            <a:ext cx="7132320" cy="2194560"/>
+          </a:xfrm>
+          <a:prstGeom prst="rect">
+            <a:avLst/>
+          </a:prstGeom>
+          <a:noFill/>
+        </p:spPr>
+        <p:txBody>
+          <a:bodyPr wrap="square" anchor="t" lIns="0" rIns="0" tIns="0" bIns="0">
+            <a:spAutoFit/>
+          </a:bodyPr>
+          <a:lstStyle/>
+          <a:p>
+            <a:r>
+              <a:rPr sz="1600" b="1" i="0">
+                <a:solidFill>
+                  <a:srgbClr val="27B5CE"/>
+                </a:solidFill>
+                <a:latin typeface="Roboto"/>
+              </a:rPr>
+              <a:t>SECTION</a:t>
+            </a:r>
+          </a:p>
+          <a:p>
+            <a:pPr>
               <a:spcBef>
-                <a:spcPts val="0"/>
+                <a:spcPts val="600"/>
               </a:spcBef>
-              <a:spcAft>
+            </a:pPr>
+            <a:r>
+              <a:rPr sz="3800" b="1" i="0">
+                <a:solidFill>
+                  <a:srgbClr val="2A2929"/>
+                </a:solidFill>
+                <a:latin typeface="Roboto"/>
+              </a:rPr>
+              <a:t>Recovery objectives, and the data you protect</a:t>
+            </a:r>
+          </a:p>
+          <a:p>
+            <a:pPr>
+              <a:spcBef>
                 <a:spcPts val="1000"/>
-              </a:spcAft>
+              </a:spcBef>
             </a:pPr>
             <a:r>
-              <a:rPr sz="1700" b="1" i="0">
-                <a:solidFill>
-                  <a:srgbClr val="EDAB0C"/>
-                </a:solidFill>
-                <a:latin typeface="Roboto"/>
-              </a:rPr>
-              <a:t>■  </a:t>
-            </a:r>
-            <a:r>
-              <a:rPr sz="1700" b="0" i="0">
-                <a:solidFill>
-                  <a:srgbClr val="2A2929"/>
-                </a:solidFill>
-                <a:latin typeface="Roboto"/>
-              </a:rPr>
-              <a:t>RTO (Recovery Time Objective): how long you can be down before it hurts too much.</a:t>
-            </a:r>
-          </a:p>
-          <a:p>
-            <a:pPr marL="0" indent="0">
-              <a:lnSpc>
-                <a:spcPct val="105000"/>
-              </a:lnSpc>
-              <a:spcBef>
-                <a:spcPts val="0"/>
-              </a:spcBef>
-              <a:spcAft>
-                <a:spcPts val="1000"/>
-              </a:spcAft>
-            </a:pPr>
-            <a:r>
-              <a:rPr sz="1700" b="1" i="0">
-                <a:solidFill>
-                  <a:srgbClr val="EDAB0C"/>
-                </a:solidFill>
-                <a:latin typeface="Roboto"/>
-              </a:rPr>
-              <a:t>■  </a:t>
-            </a:r>
-            <a:r>
-              <a:rPr sz="1700" b="0" i="0">
-                <a:solidFill>
-                  <a:srgbClr val="2A2929"/>
-                </a:solidFill>
-                <a:latin typeface="Roboto"/>
-              </a:rPr>
-              <a:t>RPO (Recovery Point Objective): how much recent data you can afford to lose.</a:t>
-            </a:r>
-          </a:p>
-          <a:p>
-            <a:pPr marL="0" indent="0">
-              <a:lnSpc>
-                <a:spcPct val="105000"/>
-              </a:lnSpc>
-              <a:spcBef>
-                <a:spcPts val="0"/>
-              </a:spcBef>
-              <a:spcAft>
-                <a:spcPts val="1000"/>
-              </a:spcAft>
-            </a:pPr>
-            <a:r>
-              <a:rPr sz="1700" b="1" i="0">
-                <a:solidFill>
-                  <a:srgbClr val="EDAB0C"/>
-                </a:solidFill>
-                <a:latin typeface="Roboto"/>
-              </a:rPr>
-              <a:t>■  </a:t>
-            </a:r>
-            <a:r>
-              <a:rPr sz="1700" b="0" i="0">
-                <a:solidFill>
-                  <a:srgbClr val="2A2929"/>
-                </a:solidFill>
-                <a:latin typeface="Roboto"/>
-              </a:rPr>
-              <a:t>They are business decisions expressed as time; every DR choice traces back to them.</a:t>
-            </a:r>
-          </a:p>
-        </p:txBody>
-      </p:sp>
-      <p:pic>
-        <p:nvPicPr>
-          <p:cNvPr id="5" name="Picture 4" descr="rto-rpo-timeline.png"/>
-          <p:cNvPicPr>
-            <a:picLocks noChangeAspect="1"/>
-          </p:cNvPicPr>
-          <p:nvPr/>
-        </p:nvPicPr>
-        <p:blipFill>
-          <a:blip r:embed="rId2"/>
-          <a:stretch>
-            <a:fillRect/>
-          </a:stretch>
-        </p:blipFill>
-        <p:spPr>
-          <a:xfrm>
-            <a:off x="6400800" y="3337560"/>
-            <a:ext cx="5120640" cy="914400"/>
-          </a:xfrm>
-          <a:prstGeom prst="rect">
-            <a:avLst/>
-          </a:prstGeom>
-        </p:spPr>
-      </p:pic>
-      <p:sp>
-        <p:nvSpPr>
-          <p:cNvPr id="6" name="Rectangle 5"/>
+              <a:rPr sz="2000" b="0" i="1">
+                <a:solidFill>
+                  <a:srgbClr val="484848"/>
+                </a:solidFill>
+                <a:latin typeface="Roboto Light"/>
+              </a:rPr>
+              <a:t>how fast back, how much lost, how much data</a:t>
+            </a:r>
+          </a:p>
+        </p:txBody>
+      </p:sp>
+      <p:sp>
+        <p:nvSpPr>
+          <p:cNvPr id="5" name="Rectangle 4"/>
           <p:cNvSpPr/>
           <p:nvPr/>
         </p:nvSpPr>
@@ -12172,7 +13447,7 @@
       </p:sp>
       <p:sp>
         <p:nvSpPr>
-          <p:cNvPr id="7" name="TextBox 6"/>
+          <p:cNvPr id="6" name="TextBox 5"/>
           <p:cNvSpPr txBox="1"/>
           <p:nvPr/>
         </p:nvSpPr>
@@ -12215,7 +13490,7 @@
       </p:sp>
       <p:sp>
         <p:nvSpPr>
-          <p:cNvPr id="8" name="TextBox 7"/>
+          <p:cNvPr id="7" name="TextBox 6"/>
           <p:cNvSpPr txBox="1"/>
           <p:nvPr/>
         </p:nvSpPr>
@@ -12243,7 +13518,7 @@
                 </a:solidFill>
                 <a:latin typeface="Roboto"/>
               </a:rPr>
-              <a:t>6</a:t>
+              <a:t/>
             </a:r>
           </a:p>
         </p:txBody>
